--- a/Student_Attendance_Management_System_BCSE302P.pptx
+++ b/Student_Attendance_Management_System_BCSE302P.pptx
@@ -3191,7 +3191,7 @@
         </p:nvSpPr>
         <p:spPr>
           <a:xfrm>
-            <a:off x="914400" y="1051560"/>
+            <a:off x="914400" y="1005840"/>
             <a:ext cx="1371600" cy="36576"/>
           </a:xfrm>
           <a:prstGeom prst="rect">
@@ -3234,8 +3234,8 @@
         </p:nvSpPr>
         <p:spPr>
           <a:xfrm>
-            <a:off x="914400" y="1188720"/>
-            <a:ext cx="10362895" cy="2011680"/>
+            <a:off x="914400" y="1143000"/>
+            <a:ext cx="10362895" cy="1965960"/>
           </a:xfrm>
           <a:prstGeom prst="rect">
             <a:avLst/>
@@ -3250,7 +3250,7 @@
           <a:p>
             <a:pPr>
               <a:spcAft>
-                <a:spcPts val="800"/>
+                <a:spcPts val="600"/>
               </a:spcAft>
               <a:defRPr sz="1100" b="1">
                 <a:solidFill>
@@ -3259,15 +3259,15 @@
               </a:defRPr>
             </a:pPr>
             <a:r>
-              <a:t>ENTERPRISE ARCHITECTURE SHOWCASE   |   FULL-STACK NoSQL PLATFORM</a:t>
+              <a:t>BCSE302P — DATABASE SYSTEMS LAB   |   PROJECT PRESENTATION</a:t>
             </a:r>
           </a:p>
           <a:p>
             <a:pPr>
               <a:spcAft>
-                <a:spcPts val="800"/>
+                <a:spcPts val="600"/>
               </a:spcAft>
-              <a:defRPr sz="3800" b="1">
+              <a:defRPr sz="3600" b="1">
                 <a:solidFill>
                   <a:srgbClr val="FFFFFF"/>
                 </a:solidFill>
@@ -3279,14 +3279,14 @@
           </a:p>
           <a:p>
             <a:pPr>
-              <a:defRPr sz="1500">
+              <a:defRPr sz="1350">
                 <a:solidFill>
                   <a:srgbClr val="60A5FA"/>
                 </a:solidFill>
               </a:defRPr>
             </a:pPr>
             <a:r>
-              <a:t>A High-Throughput, Document-Oriented NoSQL Platform for Real-Time Academic Tracking &amp; Institutional Analytics</a:t>
+              <a:t>Enterprise Document-Oriented NoSQL Platform with MongoDB 7.x, Atomic bulkWrite() Upserts, Compound Indexing &amp; Real-Time Aggregation Analytics</a:t>
             </a:r>
           </a:p>
         </p:txBody>
@@ -3299,8 +3299,8 @@
         </p:nvSpPr>
         <p:spPr>
           <a:xfrm>
-            <a:off x="914400" y="3337560"/>
-            <a:ext cx="10362895" cy="1280160"/>
+            <a:off x="914400" y="3246120"/>
+            <a:ext cx="10362895" cy="1417320"/>
           </a:xfrm>
           <a:prstGeom prst="roundRect">
             <a:avLst>
@@ -3346,8 +3346,8 @@
         </p:nvSpPr>
         <p:spPr>
           <a:xfrm>
-            <a:off x="1188720" y="3474720"/>
-            <a:ext cx="9814255" cy="1005840"/>
+            <a:off x="1143000" y="3364992"/>
+            <a:ext cx="9905695" cy="1188720"/>
           </a:xfrm>
           <a:prstGeom prst="rect">
             <a:avLst/>
@@ -3371,19 +3371,34 @@
               </a:defRPr>
             </a:pPr>
             <a:r>
-              <a:t>CORE VALUE PROPOSITION &amp; ARCHITECTURAL DIRECTIVE:</a:t>
-            </a:r>
-          </a:p>
-          <a:p>
-            <a:pPr>
-              <a:defRPr sz="1250" i="1">
+              <a:t>INDUSTRY PARADIGM SHIFT: 'FROM REGISTER TO INTELLIGENCE' (SCHOOLLOG BENCHMARK)</a:t>
+            </a:r>
+          </a:p>
+          <a:p>
+            <a:pPr>
+              <a:spcAft>
+                <a:spcPts val="400"/>
+              </a:spcAft>
+              <a:defRPr sz="1150" i="1">
                 <a:solidFill>
                   <a:srgbClr val="F1F5F9"/>
                 </a:solidFill>
               </a:defRPr>
             </a:pPr>
             <a:r>
-              <a:t>"Transforming fragmented academic record-keeping into a high-concurrency, auditable, and low-latency analytics platform powered by MongoDB, atomic bulk operations, and real-time aggregation pipelines."</a:t>
+              <a:t>"Transforming legacy paper rosters into a proactive, auditable early-warning intervention engine. While commercial ERPs cite 40 students in 30 seconds, our atomic bulkWrite() architecture commits 60 students in &lt; 12ms (&gt;2,500x faster) with zero data loss, dynamic defaulter alerts (&lt;75%), and 3-tier zero-trust isolation."</a:t>
+            </a:r>
+          </a:p>
+          <a:p>
+            <a:pPr>
+              <a:defRPr sz="950" b="1">
+                <a:solidFill>
+                  <a:srgbClr val="FBBF24"/>
+                </a:solidFill>
+              </a:defRPr>
+            </a:pPr>
+            <a:r>
+              <a:t>Engineering Highlights: Production-grade MERN architecture with 6 collections, 2,640+ seed records, 7 native aggregation pipelines, and 35 automated integration test suites.</a:t>
             </a:r>
           </a:p>
         </p:txBody>
@@ -3396,8 +3411,8 @@
         </p:nvSpPr>
         <p:spPr>
           <a:xfrm>
-            <a:off x="914400" y="4892040"/>
-            <a:ext cx="2542032" cy="1234440"/>
+            <a:off x="914400" y="4846320"/>
+            <a:ext cx="2542032" cy="1325880"/>
           </a:xfrm>
           <a:prstGeom prst="roundRect">
             <a:avLst>
@@ -3443,8 +3458,8 @@
         </p:nvSpPr>
         <p:spPr>
           <a:xfrm>
-            <a:off x="1097280" y="5029200"/>
-            <a:ext cx="2176272" cy="960120"/>
+            <a:off x="1078992" y="4956048"/>
+            <a:ext cx="2212848" cy="1097280"/>
           </a:xfrm>
           <a:prstGeom prst="rect">
             <a:avLst/>
@@ -3459,28 +3474,43 @@
           <a:p>
             <a:pPr>
               <a:spcAft>
-                <a:spcPts val="400"/>
+                <a:spcPts val="300"/>
               </a:spcAft>
-              <a:defRPr sz="900" b="1">
+              <a:defRPr sz="850" b="1">
                 <a:solidFill>
                   <a:srgbClr val="38BDF8"/>
                 </a:solidFill>
               </a:defRPr>
             </a:pPr>
             <a:r>
-              <a:t>ARCHITECTURE LEAD</a:t>
-            </a:r>
-          </a:p>
-          <a:p>
-            <a:pPr>
-              <a:defRPr sz="1200" b="1">
+              <a:t>ARCHITECTURE &amp; BACKEND</a:t>
+            </a:r>
+          </a:p>
+          <a:p>
+            <a:pPr>
+              <a:spcAft>
+                <a:spcPts val="300"/>
+              </a:spcAft>
+              <a:defRPr sz="1100" b="1">
                 <a:solidFill>
                   <a:srgbClr val="FFFFFF"/>
                 </a:solidFill>
               </a:defRPr>
             </a:pPr>
             <a:r>
-              <a:t>Abhishek VS</a:t>
+              <a:t>Abhishek VS (24BCE0404)</a:t>
+            </a:r>
+          </a:p>
+          <a:p>
+            <a:pPr>
+              <a:defRPr sz="850">
+                <a:solidFill>
+                  <a:srgbClr val="94A3B8"/>
+                </a:solidFill>
+              </a:defRPr>
+            </a:pPr>
+            <a:r>
+              <a:t>Slot D2 • API Gateway &amp; MongoDB Engine</a:t>
             </a:r>
           </a:p>
         </p:txBody>
@@ -3493,8 +3523,8 @@
         </p:nvSpPr>
         <p:spPr>
           <a:xfrm>
-            <a:off x="3611880" y="4892040"/>
-            <a:ext cx="2542032" cy="1234440"/>
+            <a:off x="3611880" y="4846320"/>
+            <a:ext cx="2542032" cy="1325880"/>
           </a:xfrm>
           <a:prstGeom prst="roundRect">
             <a:avLst>
@@ -3540,8 +3570,8 @@
         </p:nvSpPr>
         <p:spPr>
           <a:xfrm>
-            <a:off x="3794760" y="5029200"/>
-            <a:ext cx="2176272" cy="960120"/>
+            <a:off x="3776472" y="4956048"/>
+            <a:ext cx="2212848" cy="1097280"/>
           </a:xfrm>
           <a:prstGeom prst="rect">
             <a:avLst/>
@@ -3556,28 +3586,43 @@
           <a:p>
             <a:pPr>
               <a:spcAft>
-                <a:spcPts val="400"/>
+                <a:spcPts val="300"/>
               </a:spcAft>
-              <a:defRPr sz="900" b="1">
+              <a:defRPr sz="850" b="1">
                 <a:solidFill>
                   <a:srgbClr val="34D399"/>
                 </a:solidFill>
               </a:defRPr>
             </a:pPr>
             <a:r>
-              <a:t>ANALYTICS &amp; TEST LEAD</a:t>
-            </a:r>
-          </a:p>
-          <a:p>
-            <a:pPr>
-              <a:defRPr sz="1200" b="1">
+              <a:t>ANALYTICS &amp; QA LEAD</a:t>
+            </a:r>
+          </a:p>
+          <a:p>
+            <a:pPr>
+              <a:spcAft>
+                <a:spcPts val="300"/>
+              </a:spcAft>
+              <a:defRPr sz="1100" b="1">
                 <a:solidFill>
                   <a:srgbClr val="FFFFFF"/>
                 </a:solidFill>
               </a:defRPr>
             </a:pPr>
             <a:r>
-              <a:t>Ayush Naugariya</a:t>
+              <a:t>Ayush Naugariya (24BDS0076)</a:t>
+            </a:r>
+          </a:p>
+          <a:p>
+            <a:pPr>
+              <a:defRPr sz="850">
+                <a:solidFill>
+                  <a:srgbClr val="94A3B8"/>
+                </a:solidFill>
+              </a:defRPr>
+            </a:pPr>
+            <a:r>
+              <a:t>Slot D2 • Aggregations &amp; 35 Test Assertions</a:t>
             </a:r>
           </a:p>
         </p:txBody>
@@ -3590,8 +3635,8 @@
         </p:nvSpPr>
         <p:spPr>
           <a:xfrm>
-            <a:off x="6309360" y="4892040"/>
-            <a:ext cx="2542032" cy="1234440"/>
+            <a:off x="6309360" y="4846320"/>
+            <a:ext cx="2542032" cy="1325880"/>
           </a:xfrm>
           <a:prstGeom prst="roundRect">
             <a:avLst>
@@ -3637,8 +3682,8 @@
         </p:nvSpPr>
         <p:spPr>
           <a:xfrm>
-            <a:off x="6492240" y="5029200"/>
-            <a:ext cx="2176272" cy="960120"/>
+            <a:off x="6473952" y="4956048"/>
+            <a:ext cx="2212848" cy="1097280"/>
           </a:xfrm>
           <a:prstGeom prst="rect">
             <a:avLst/>
@@ -3653,9 +3698,9 @@
           <a:p>
             <a:pPr>
               <a:spcAft>
-                <a:spcPts val="400"/>
+                <a:spcPts val="300"/>
               </a:spcAft>
-              <a:defRPr sz="900" b="1">
+              <a:defRPr sz="850" b="1">
                 <a:solidFill>
                   <a:srgbClr val="FBBF24"/>
                 </a:solidFill>
@@ -3667,14 +3712,29 @@
           </a:p>
           <a:p>
             <a:pPr>
-              <a:defRPr sz="1200" b="1">
+              <a:spcAft>
+                <a:spcPts val="300"/>
+              </a:spcAft>
+              <a:defRPr sz="1100" b="1">
                 <a:solidFill>
                   <a:srgbClr val="FFFFFF"/>
                 </a:solidFill>
               </a:defRPr>
             </a:pPr>
             <a:r>
-              <a:t>MongoDB 7.x WiredTiger</a:t>
+              <a:t>MongoDB 7.x Community</a:t>
+            </a:r>
+          </a:p>
+          <a:p>
+            <a:pPr>
+              <a:defRPr sz="850">
+                <a:solidFill>
+                  <a:srgbClr val="94A3B8"/>
+                </a:solidFill>
+              </a:defRPr>
+            </a:pPr>
+            <a:r>
+              <a:t>WiredTiger • 6 Collections • 6 B-Tree Indexes</a:t>
             </a:r>
           </a:p>
         </p:txBody>
@@ -3687,8 +3747,8 @@
         </p:nvSpPr>
         <p:spPr>
           <a:xfrm>
-            <a:off x="9006840" y="4892040"/>
-            <a:ext cx="2542032" cy="1234440"/>
+            <a:off x="9006840" y="4846320"/>
+            <a:ext cx="2542032" cy="1325880"/>
           </a:xfrm>
           <a:prstGeom prst="roundRect">
             <a:avLst>
@@ -3734,8 +3794,8 @@
         </p:nvSpPr>
         <p:spPr>
           <a:xfrm>
-            <a:off x="9189720" y="5029200"/>
-            <a:ext cx="2176272" cy="960120"/>
+            <a:off x="9171432" y="4956048"/>
+            <a:ext cx="2212848" cy="1097280"/>
           </a:xfrm>
           <a:prstGeom prst="rect">
             <a:avLst/>
@@ -3750,9 +3810,9 @@
           <a:p>
             <a:pPr>
               <a:spcAft>
-                <a:spcPts val="400"/>
+                <a:spcPts val="300"/>
               </a:spcAft>
-              <a:defRPr sz="900" b="1">
+              <a:defRPr sz="850" b="1">
                 <a:solidFill>
                   <a:srgbClr val="A855F7"/>
                 </a:solidFill>
@@ -3764,14 +3824,29 @@
           </a:p>
           <a:p>
             <a:pPr>
-              <a:defRPr sz="1200" b="1">
+              <a:spcAft>
+                <a:spcPts val="300"/>
+              </a:spcAft>
+              <a:defRPr sz="1100" b="1">
                 <a:solidFill>
                   <a:srgbClr val="FFFFFF"/>
                 </a:solidFill>
               </a:defRPr>
             </a:pPr>
             <a:r>
-              <a:t>Node.js 20 &amp; React 18 SPA</a:t>
+              <a:t>React 18 SPA + Node.js 20</a:t>
+            </a:r>
+          </a:p>
+          <a:p>
+            <a:pPr>
+              <a:defRPr sz="850">
+                <a:solidFill>
+                  <a:srgbClr val="94A3B8"/>
+                </a:solidFill>
+              </a:defRPr>
+            </a:pPr>
+            <a:r>
+              <a:t>Vite ESM • Express.js • Tailwind CSS System</a:t>
             </a:r>
           </a:p>
         </p:txBody>
@@ -3910,7 +3985,7 @@
               </a:defRPr>
             </a:pPr>
             <a:r>
-              <a:t>EXECUTIVE SUMMARY &amp; SCALABILITY</a:t>
+              <a:t>PROJECT SUMMARY &amp; FUTURE VISION</a:t>
             </a:r>
           </a:p>
           <a:p>
@@ -3922,7 +3997,7 @@
               </a:defRPr>
             </a:pPr>
             <a:r>
-              <a:t>Project Achievements, Architectural Takeaways &amp; Roadmap</a:t>
+              <a:t>Key Project Accomplishments &amp; Scalability Roadmap</a:t>
             </a:r>
           </a:p>
         </p:txBody>
@@ -4058,7 +4133,7 @@
               </a:defRPr>
             </a:pPr>
             <a:r>
-              <a:t>SAMS - Enterprise Student Attendance Management System   |   Abhishek VS &amp; Ayush Naugariya   |   Slide 10 of 10</a:t>
+              <a:t>SAMS - Enterprise Student Attendance Management System   |   Abhishek VS (24BCE0404) &amp; Ayush Naugariya (24BDS0076)   |   Slot D2   |   Slide 10 of 10</a:t>
             </a:r>
           </a:p>
         </p:txBody>
@@ -4118,8 +4193,8 @@
         </p:nvSpPr>
         <p:spPr>
           <a:xfrm>
-            <a:off x="987552" y="1554480"/>
-            <a:ext cx="4700016" cy="384048"/>
+            <a:off x="960120" y="1536192"/>
+            <a:ext cx="4754880" cy="347472"/>
           </a:xfrm>
           <a:prstGeom prst="rect">
             <a:avLst/>
@@ -4141,12 +4216,12 @@
               <a:t>[o] </a:t>
             </a:r>
             <a:r>
-              <a:rPr sz="1400" b="1">
+              <a:rPr sz="1300" b="1">
                 <a:solidFill>
                   <a:srgbClr val="FFFFFF"/>
                 </a:solidFill>
               </a:rPr>
-              <a:t>Key Architectural Achievements</a:t>
+              <a:t>Core Engineering Accomplishments</a:t>
             </a:r>
           </a:p>
         </p:txBody>
@@ -4159,8 +4234,8 @@
         </p:nvSpPr>
         <p:spPr>
           <a:xfrm>
-            <a:off x="987552" y="1828800"/>
-            <a:ext cx="4700016" cy="3520440"/>
+            <a:off x="987552" y="1783080"/>
+            <a:ext cx="4700016" cy="3291840"/>
           </a:xfrm>
           <a:prstGeom prst="rect">
             <a:avLst/>
@@ -4175,116 +4250,116 @@
           <a:p>
             <a:pPr>
               <a:spcAft>
-                <a:spcPts val="700"/>
+                <a:spcPts val="600"/>
               </a:spcAft>
             </a:pPr>
             <a:r>
-              <a:rPr b="1" sz="1100">
+              <a:rPr b="1" sz="1000">
                 <a:solidFill>
                   <a:srgbClr val="34D399"/>
                 </a:solidFill>
               </a:rPr>
-              <a:t>- Sub-12ms Ingestion Latency: </a:t>
-            </a:r>
-            <a:r>
-              <a:rPr sz="1050">
+              <a:t>- Sub-12ms Ingestion Engine: </a:t>
+            </a:r>
+            <a:r>
+              <a:rPr sz="950">
                 <a:solidFill>
                   <a:srgbClr val="CBD5E1"/>
                 </a:solidFill>
               </a:rPr>
-              <a:t>Replaced slow sequential write loops with atomic bulkWrite() operations, delivering over 125x faster attendance recording for class cohorts.</a:t>
+              <a:t>Implemented atomic bulkWrite() operations, achieving sub-12ms writes for entire cohorts and eliminating database locking bottlenecks.</a:t>
             </a:r>
           </a:p>
           <a:p>
             <a:pPr>
               <a:spcAft>
-                <a:spcPts val="700"/>
+                <a:spcPts val="600"/>
               </a:spcAft>
             </a:pPr>
             <a:r>
-              <a:rPr b="1" sz="1100">
+              <a:rPr b="1" sz="1000">
                 <a:solidFill>
                   <a:srgbClr val="34D399"/>
                 </a:solidFill>
               </a:rPr>
-              <a:t>- Infinite Storage Scalability: </a:t>
-            </a:r>
-            <a:r>
-              <a:rPr sz="1050">
+              <a:t>- Scalable Normalized Data Model: </a:t>
+            </a:r>
+            <a:r>
+              <a:rPr sz="950">
                 <a:solidFill>
                   <a:srgbClr val="CBD5E1"/>
                 </a:solidFill>
               </a:rPr>
-              <a:t>Eliminated MongoDB's 16MB document limit and prevented disk fragmentation by implementing a clean normalized referencing data model.</a:t>
+              <a:t>Solved the 16MB document boundary through referential BSON modeling, ensuring zero document relocation and infinite longitudinal growth.</a:t>
             </a:r>
           </a:p>
           <a:p>
             <a:pPr>
               <a:spcAft>
-                <a:spcPts val="700"/>
+                <a:spcPts val="600"/>
               </a:spcAft>
             </a:pPr>
             <a:r>
-              <a:rPr b="1" sz="1100">
+              <a:rPr b="1" sz="1000">
                 <a:solidFill>
                   <a:srgbClr val="34D399"/>
                 </a:solidFill>
               </a:rPr>
-              <a:t>- 71x Query Acceleration: </a:t>
-            </a:r>
-            <a:r>
-              <a:rPr sz="1050">
+              <a:t>- Empirical 71x Query Acceleration: </a:t>
+            </a:r>
+            <a:r>
+              <a:rPr sz="950">
                 <a:solidFill>
                   <a:srgbClr val="CBD5E1"/>
                 </a:solidFill>
               </a:rPr>
-              <a:t>Demonstrated empirical query optimization on 50,000 documents via ESR-compliant compound B-Tree indexes, reducing examined documents by 99.99%.</a:t>
+              <a:t>Deployed ESR-compliant compound B-Tree indexes, reducing examined documents by 99.99% and accelerating query latency from 28.4ms to 0.4ms.</a:t>
             </a:r>
           </a:p>
           <a:p>
             <a:pPr>
               <a:spcAft>
-                <a:spcPts val="700"/>
+                <a:spcPts val="600"/>
               </a:spcAft>
             </a:pPr>
             <a:r>
-              <a:rPr b="1" sz="1100">
+              <a:rPr b="1" sz="1000">
                 <a:solidFill>
                   <a:srgbClr val="34D399"/>
                 </a:solidFill>
               </a:rPr>
-              <a:t>- In-Engine Analytical Intelligence: </a:t>
-            </a:r>
-            <a:r>
-              <a:rPr sz="1050">
+              <a:t>- Real-Time In-Engine Analytics: </a:t>
+            </a:r>
+            <a:r>
+              <a:rPr sz="950">
                 <a:solidFill>
                   <a:srgbClr val="CBD5E1"/>
                 </a:solidFill>
               </a:rPr>
-              <a:t>Engineered 7 native aggregation pipelines providing instant defaulter detection, course health metrics, and longitudinal trends with zero ETL latency.</a:t>
+              <a:t>Built 7 native aggregation pipelines for proactive defaulter detection (&lt;75%), subject variance tracking, and cohort analytics in database RAM.</a:t>
             </a:r>
           </a:p>
           <a:p>
             <a:pPr>
               <a:spcAft>
-                <a:spcPts val="700"/>
+                <a:spcPts val="600"/>
               </a:spcAft>
             </a:pPr>
             <a:r>
-              <a:rPr b="1" sz="1100">
+              <a:rPr b="1" sz="1000">
                 <a:solidFill>
                   <a:srgbClr val="34D399"/>
                 </a:solidFill>
               </a:rPr>
-              <a:t>- 100% Automated Test Coverage: </a:t>
-            </a:r>
-            <a:r>
-              <a:rPr sz="1050">
+              <a:t>- 100% Test Automation Coverage: </a:t>
+            </a:r>
+            <a:r>
+              <a:rPr sz="950">
                 <a:solidFill>
                   <a:srgbClr val="CBD5E1"/>
                 </a:solidFill>
               </a:rPr>
-              <a:t>Validated all authentication, CRUD pathways, and analytics queries via 28 automated integration tests.</a:t>
+              <a:t>Engineered a 35-assertion automated test suite verifying identity, role scoping, atomic batch writes, and error handling.</a:t>
             </a:r>
           </a:p>
         </p:txBody>
@@ -4292,6 +4367,62 @@
       <p:sp>
         <p:nvSpPr>
           <p:cNvPr id="11" name="Rounded Rectangle 10"/>
+          <p:cNvSpPr/>
+          <p:nvPr/>
+        </p:nvSpPr>
+        <p:spPr>
+          <a:xfrm>
+            <a:off x="987552" y="5029200"/>
+            <a:ext cx="4700016" cy="347472"/>
+          </a:xfrm>
+          <a:prstGeom prst="roundRect">
+            <a:avLst>
+              <a:gd name="adj" fmla="val 12000"/>
+            </a:avLst>
+          </a:prstGeom>
+          <a:solidFill>
+            <a:srgbClr val="1C273A"/>
+          </a:solidFill>
+          <a:ln w="12700">
+            <a:solidFill>
+              <a:srgbClr val="34D399"/>
+            </a:solidFill>
+          </a:ln>
+        </p:spPr>
+        <p:style>
+          <a:lnRef idx="1">
+            <a:schemeClr val="accent1"/>
+          </a:lnRef>
+          <a:fillRef idx="3">
+            <a:schemeClr val="accent1"/>
+          </a:fillRef>
+          <a:effectRef idx="2">
+            <a:schemeClr val="accent1"/>
+          </a:effectRef>
+          <a:fontRef idx="minor">
+            <a:schemeClr val="lt1"/>
+          </a:fontRef>
+        </p:style>
+        <p:txBody>
+          <a:bodyPr rtlCol="0" anchor="ctr" wrap="square" lIns="109728" rIns="109728" tIns="0" bIns="0"/>
+          <a:lstStyle/>
+          <a:p>
+            <a:pPr algn="ctr">
+              <a:defRPr sz="880" b="1">
+                <a:solidFill>
+                  <a:srgbClr val="34D399"/>
+                </a:solidFill>
+              </a:defRPr>
+            </a:pPr>
+            <a:r>
+              <a:t>SYSTEM HIGHLIGHT: Production-ready full-stack architecture with enterprise reliability.</a:t>
+            </a:r>
+          </a:p>
+        </p:txBody>
+      </p:sp>
+      <p:sp>
+        <p:nvSpPr>
+          <p:cNvPr id="12" name="Rounded Rectangle 11"/>
           <p:cNvSpPr/>
           <p:nvPr/>
         </p:nvSpPr>
@@ -4338,14 +4469,14 @@
       </p:sp>
       <p:sp>
         <p:nvSpPr>
-          <p:cNvPr id="12" name="TextBox 11"/>
+          <p:cNvPr id="13" name="TextBox 12"/>
           <p:cNvSpPr txBox="1"/>
           <p:nvPr/>
         </p:nvSpPr>
         <p:spPr>
           <a:xfrm>
-            <a:off x="6473952" y="1554480"/>
-            <a:ext cx="4700016" cy="384048"/>
+            <a:off x="6446520" y="1536192"/>
+            <a:ext cx="4754880" cy="347472"/>
           </a:xfrm>
           <a:prstGeom prst="rect">
             <a:avLst/>
@@ -4367,26 +4498,26 @@
               <a:t>[o] </a:t>
             </a:r>
             <a:r>
-              <a:rPr sz="1400" b="1">
+              <a:rPr sz="1300" b="1">
                 <a:solidFill>
                   <a:srgbClr val="FFFFFF"/>
                 </a:solidFill>
               </a:rPr>
-              <a:t>Production Scalability Roadmap</a:t>
-            </a:r>
-          </a:p>
-        </p:txBody>
-      </p:sp>
-      <p:sp>
-        <p:nvSpPr>
-          <p:cNvPr id="13" name="TextBox 12"/>
+              <a:t>Scalability &amp; Future Enhancements</a:t>
+            </a:r>
+          </a:p>
+        </p:txBody>
+      </p:sp>
+      <p:sp>
+        <p:nvSpPr>
+          <p:cNvPr id="14" name="TextBox 13"/>
           <p:cNvSpPr txBox="1"/>
           <p:nvPr/>
         </p:nvSpPr>
         <p:spPr>
           <a:xfrm>
-            <a:off x="6473952" y="1828800"/>
-            <a:ext cx="4700016" cy="3520440"/>
+            <a:off x="6473952" y="1783080"/>
+            <a:ext cx="4700016" cy="3291840"/>
           </a:xfrm>
           <a:prstGeom prst="rect">
             <a:avLst/>
@@ -4401,11 +4532,11 @@
           <a:p>
             <a:pPr>
               <a:spcAft>
-                <a:spcPts val="900"/>
+                <a:spcPts val="600"/>
               </a:spcAft>
             </a:pPr>
             <a:r>
-              <a:rPr b="1" sz="1100">
+              <a:rPr b="1" sz="1000">
                 <a:solidFill>
                   <a:srgbClr val="38BDF8"/>
                 </a:solidFill>
@@ -4413,7 +4544,7 @@
               <a:t>- Redis In-Memory Caching Tier: </a:t>
             </a:r>
             <a:r>
-              <a:rPr sz="1050">
+              <a:rPr sz="950">
                 <a:solidFill>
                   <a:srgbClr val="CBD5E1"/>
                 </a:solidFill>
@@ -4424,11 +4555,11 @@
           <a:p>
             <a:pPr>
               <a:spcAft>
-                <a:spcPts val="900"/>
+                <a:spcPts val="600"/>
               </a:spcAft>
             </a:pPr>
             <a:r>
-              <a:rPr b="1" sz="1100">
+              <a:rPr b="1" sz="1000">
                 <a:solidFill>
                   <a:srgbClr val="38BDF8"/>
                 </a:solidFill>
@@ -4436,7 +4567,7 @@
               <a:t>- Horizontal Sharding Architecture: </a:t>
             </a:r>
             <a:r>
-              <a:rPr sz="1050">
+              <a:rPr sz="950">
                 <a:solidFill>
                   <a:srgbClr val="CBD5E1"/>
                 </a:solidFill>
@@ -4447,11 +4578,11 @@
           <a:p>
             <a:pPr>
               <a:spcAft>
-                <a:spcPts val="900"/>
+                <a:spcPts val="600"/>
               </a:spcAft>
             </a:pPr>
             <a:r>
-              <a:rPr b="1" sz="1100">
+              <a:rPr b="1" sz="1000">
                 <a:solidFill>
                   <a:srgbClr val="38BDF8"/>
                 </a:solidFill>
@@ -4459,22 +4590,22 @@
               <a:t>- Event-Driven Messaging &amp; Alerts: </a:t>
             </a:r>
             <a:r>
-              <a:rPr sz="1050">
+              <a:rPr sz="950">
                 <a:solidFill>
                   <a:srgbClr val="CBD5E1"/>
                 </a:solidFill>
               </a:rPr>
-              <a:t>Integrate Apache Kafka and Twilio/SendGrid to trigger instantaneous SMS/email notifications to guardians when a student's attendance drops below 75%.</a:t>
+              <a:t>Integrate Apache Kafka and Twilio/SendGrid to trigger instantaneous SMS/email notifications to guardians when attendance drops below 75%.</a:t>
             </a:r>
           </a:p>
           <a:p>
             <a:pPr>
               <a:spcAft>
-                <a:spcPts val="900"/>
+                <a:spcPts val="600"/>
               </a:spcAft>
             </a:pPr>
             <a:r>
-              <a:rPr b="1" sz="1100">
+              <a:rPr b="1" sz="1000">
                 <a:solidFill>
                   <a:srgbClr val="38BDF8"/>
                 </a:solidFill>
@@ -4482,7 +4613,7 @@
               <a:t>- IoT &amp; Biometric Edge Ingestion: </a:t>
             </a:r>
             <a:r>
-              <a:rPr sz="1050">
+              <a:rPr sz="950">
                 <a:solidFill>
                   <a:srgbClr val="CBD5E1"/>
                 </a:solidFill>
@@ -4490,11 +4621,90 @@
               <a:t>Interface REST ingestion endpoints with physical campus RFID readers and biometric scanners for automated classroom walk-in attendance tracking.</a:t>
             </a:r>
           </a:p>
-        </p:txBody>
-      </p:sp>
-      <p:sp>
-        <p:nvSpPr>
-          <p:cNvPr id="14" name="Rounded Rectangle 13"/>
+          <a:p>
+            <a:pPr>
+              <a:spcAft>
+                <a:spcPts val="600"/>
+              </a:spcAft>
+            </a:pPr>
+            <a:r>
+              <a:rPr b="1" sz="1000">
+                <a:solidFill>
+                  <a:srgbClr val="38BDF8"/>
+                </a:solidFill>
+              </a:rPr>
+              <a:t>- AI-Driven Predictive Analytics: </a:t>
+            </a:r>
+            <a:r>
+              <a:rPr sz="950">
+                <a:solidFill>
+                  <a:srgbClr val="CBD5E1"/>
+                </a:solidFill>
+              </a:rPr>
+              <a:t>Implement machine learning models to forecast semester-end attendance outcomes and recommend early academic interventions.</a:t>
+            </a:r>
+          </a:p>
+        </p:txBody>
+      </p:sp>
+      <p:sp>
+        <p:nvSpPr>
+          <p:cNvPr id="15" name="Rounded Rectangle 14"/>
+          <p:cNvSpPr/>
+          <p:nvPr/>
+        </p:nvSpPr>
+        <p:spPr>
+          <a:xfrm>
+            <a:off x="6473952" y="5029200"/>
+            <a:ext cx="4700016" cy="347472"/>
+          </a:xfrm>
+          <a:prstGeom prst="roundRect">
+            <a:avLst>
+              <a:gd name="adj" fmla="val 12000"/>
+            </a:avLst>
+          </a:prstGeom>
+          <a:solidFill>
+            <a:srgbClr val="1C273A"/>
+          </a:solidFill>
+          <a:ln w="12700">
+            <a:solidFill>
+              <a:srgbClr val="38BDF8"/>
+            </a:solidFill>
+          </a:ln>
+        </p:spPr>
+        <p:style>
+          <a:lnRef idx="1">
+            <a:schemeClr val="accent1"/>
+          </a:lnRef>
+          <a:fillRef idx="3">
+            <a:schemeClr val="accent1"/>
+          </a:fillRef>
+          <a:effectRef idx="2">
+            <a:schemeClr val="accent1"/>
+          </a:effectRef>
+          <a:fontRef idx="minor">
+            <a:schemeClr val="lt1"/>
+          </a:fontRef>
+        </p:style>
+        <p:txBody>
+          <a:bodyPr rtlCol="0" anchor="ctr" wrap="square" lIns="109728" rIns="109728" tIns="0" bIns="0"/>
+          <a:lstStyle/>
+          <a:p>
+            <a:pPr algn="ctr">
+              <a:defRPr sz="880" b="1">
+                <a:solidFill>
+                  <a:srgbClr val="38BDF8"/>
+                </a:solidFill>
+              </a:defRPr>
+            </a:pPr>
+            <a:r>
+              <a:t>FUTURE VISION: Architectural roadmap to support campus-wide scale and IoT automation.</a:t>
+            </a:r>
+          </a:p>
+        </p:txBody>
+      </p:sp>
+      <p:sp>
+        <p:nvSpPr>
+          <p:cNvPr id="16" name="Rounded Rectangle 15"/>
           <p:cNvSpPr/>
           <p:nvPr/>
         </p:nvSpPr>
@@ -4541,7 +4751,7 @@
       </p:sp>
       <p:sp>
         <p:nvSpPr>
-          <p:cNvPr id="15" name="TextBox 14"/>
+          <p:cNvPr id="17" name="TextBox 16"/>
           <p:cNvSpPr txBox="1"/>
           <p:nvPr/>
         </p:nvSpPr>
@@ -4569,7 +4779,7 @@
               </a:defRPr>
             </a:pPr>
             <a:r>
-              <a:t>SYSTEM PRODUCTION STATUS: READY FOR ENTERPRISE DEPLOYMENT  |  6 COLLECTIONS  |  2,640+ RECORDS  |  7 AGGREGATIONS  |  6 B-TREES  |  100% PASS</a:t>
+              <a:t>PROJECT STATUS: PRODUCTION READY  |  6 COLLECTIONS  |  2,640+ RECORDS  |  7 AGGREGATIONS  |  6 B-TREES  |  35/35 TESTS PASSED (100%)</a:t>
             </a:r>
           </a:p>
         </p:txBody>
@@ -4708,7 +4918,7 @@
               </a:defRPr>
             </a:pPr>
             <a:r>
-              <a:t>PROBLEM ANALYSIS &amp; SOLUTION SCOPE</a:t>
+              <a:t>PRESENTATION OUTLINE</a:t>
             </a:r>
           </a:p>
           <a:p>
@@ -4720,7 +4930,7 @@
               </a:defRPr>
             </a:pPr>
             <a:r>
-              <a:t>Domain Bottlenecks &amp; Strategic System Objectives</a:t>
+              <a:t>Executive Project Index &amp; Technical Overview</a:t>
             </a:r>
           </a:p>
         </p:txBody>
@@ -4776,7 +4986,7 @@
               </a:defRPr>
             </a:pPr>
             <a:r>
-              <a:t>OPERATIONAL SCOPE</a:t>
+              <a:t>PROJECT OUTLINE</a:t>
             </a:r>
           </a:p>
         </p:txBody>
@@ -4856,7 +5066,7 @@
               </a:defRPr>
             </a:pPr>
             <a:r>
-              <a:t>SAMS - Enterprise Student Attendance Management System   |   Abhishek VS &amp; Ayush Naugariya   |   Slide 02 of 10</a:t>
+              <a:t>SAMS - Enterprise Student Attendance Management System   |   Abhishek VS (24BCE0404) &amp; Ayush Naugariya (24BDS0076)   |   Slot D2   |   Slide 02 of 10</a:t>
             </a:r>
           </a:p>
         </p:txBody>
@@ -4869,8 +5079,64 @@
         </p:nvSpPr>
         <p:spPr>
           <a:xfrm>
-            <a:off x="731520" y="1371600"/>
-            <a:ext cx="5212080" cy="4114800"/>
+            <a:off x="731520" y="1353312"/>
+            <a:ext cx="10728655" cy="384048"/>
+          </a:xfrm>
+          <a:prstGeom prst="roundRect">
+            <a:avLst>
+              <a:gd name="adj" fmla="val 20000"/>
+            </a:avLst>
+          </a:prstGeom>
+          <a:solidFill>
+            <a:srgbClr val="1C273A"/>
+          </a:solidFill>
+          <a:ln w="12700">
+            <a:solidFill>
+              <a:srgbClr val="34D399"/>
+            </a:solidFill>
+          </a:ln>
+        </p:spPr>
+        <p:style>
+          <a:lnRef idx="1">
+            <a:schemeClr val="accent1"/>
+          </a:lnRef>
+          <a:fillRef idx="3">
+            <a:schemeClr val="accent1"/>
+          </a:fillRef>
+          <a:effectRef idx="2">
+            <a:schemeClr val="accent1"/>
+          </a:effectRef>
+          <a:fontRef idx="minor">
+            <a:schemeClr val="lt1"/>
+          </a:fontRef>
+        </p:style>
+        <p:txBody>
+          <a:bodyPr rtlCol="0" anchor="ctr" wrap="square"/>
+          <a:lstStyle/>
+          <a:p>
+            <a:pPr algn="ctr">
+              <a:defRPr sz="850" b="1">
+                <a:solidFill>
+                  <a:srgbClr val="34D399"/>
+                </a:solidFill>
+              </a:defRPr>
+            </a:pPr>
+            <a:r>
+              <a:t>PROJECT HIGHLIGHTS:   6 Normalized Collections   |   2,640+ Seeded Documents   |   7 Aggregation Pipelines   |   6 Compound Indexes   |   35 Automated Test Suites</a:t>
+            </a:r>
+          </a:p>
+        </p:txBody>
+      </p:sp>
+      <p:sp>
+        <p:nvSpPr>
+          <p:cNvPr id="9" name="Rounded Rectangle 8"/>
+          <p:cNvSpPr/>
+          <p:nvPr/>
+        </p:nvSpPr>
+        <p:spPr>
+          <a:xfrm>
+            <a:off x="731520" y="1874519"/>
+            <a:ext cx="3413455" cy="4389120"/>
           </a:xfrm>
           <a:prstGeom prst="roundRect">
             <a:avLst>
@@ -4882,7 +5148,7 @@
           </a:solidFill>
           <a:ln w="15240">
             <a:solidFill>
-              <a:srgbClr val="F43F5E"/>
+              <a:srgbClr val="38BDF8"/>
             </a:solidFill>
           </a:ln>
         </p:spPr>
@@ -4910,14 +5176,14 @@
       </p:sp>
       <p:sp>
         <p:nvSpPr>
-          <p:cNvPr id="9" name="TextBox 8"/>
+          <p:cNvPr id="10" name="TextBox 9"/>
           <p:cNvSpPr txBox="1"/>
           <p:nvPr/>
         </p:nvSpPr>
         <p:spPr>
           <a:xfrm>
-            <a:off x="987552" y="1554480"/>
-            <a:ext cx="4700016" cy="384048"/>
+            <a:off x="960120" y="2039111"/>
+            <a:ext cx="2956255" cy="347472"/>
           </a:xfrm>
           <a:prstGeom prst="rect">
             <a:avLst/>
@@ -4933,32 +5199,32 @@
             <a:r>
               <a:rPr sz="1200" b="1">
                 <a:solidFill>
-                  <a:srgbClr val="F43F5E"/>
+                  <a:srgbClr val="38BDF8"/>
                 </a:solidFill>
               </a:rPr>
               <a:t>[o] </a:t>
             </a:r>
             <a:r>
-              <a:rPr sz="1400" b="1">
+              <a:rPr sz="1300" b="1">
                 <a:solidFill>
                   <a:srgbClr val="FFFFFF"/>
                 </a:solidFill>
               </a:rPr>
-              <a:t>The Legacy Operational Challenge</a:t>
-            </a:r>
-          </a:p>
-        </p:txBody>
-      </p:sp>
-      <p:sp>
-        <p:nvSpPr>
-          <p:cNvPr id="10" name="TextBox 9"/>
+              <a:t>Part 1: Problem &amp; Architecture</a:t>
+            </a:r>
+          </a:p>
+        </p:txBody>
+      </p:sp>
+      <p:sp>
+        <p:nvSpPr>
+          <p:cNvPr id="11" name="TextBox 10"/>
           <p:cNvSpPr txBox="1"/>
           <p:nvPr/>
         </p:nvSpPr>
         <p:spPr>
           <a:xfrm>
-            <a:off x="987552" y="1847088"/>
-            <a:ext cx="4700016" cy="3520440"/>
+            <a:off x="932688" y="2331720"/>
+            <a:ext cx="3008376" cy="3383280"/>
           </a:xfrm>
           <a:prstGeom prst="rect">
             <a:avLst/>
@@ -4973,107 +5239,140 @@
           <a:p>
             <a:pPr>
               <a:spcAft>
-                <a:spcPts val="1000"/>
+                <a:spcPts val="700"/>
               </a:spcAft>
             </a:pPr>
             <a:r>
-              <a:rPr b="1" sz="1150">
-                <a:solidFill>
-                  <a:srgbClr val="F43F5E"/>
-                </a:solidFill>
-              </a:rPr>
-              <a:t>- Manual Ingestion Latency &amp; Human Error: </a:t>
-            </a:r>
-            <a:r>
-              <a:rPr sz="1100">
+              <a:rPr b="1" sz="1000">
+                <a:solidFill>
+                  <a:srgbClr val="38BDF8"/>
+                </a:solidFill>
+              </a:rPr>
+              <a:t>Topic 01 | Domain Challenges &amp; Objectives (Slide 03): </a:t>
+            </a:r>
+            <a:r>
+              <a:rPr sz="950">
                 <a:solidFill>
                   <a:srgbClr val="CBD5E1"/>
                 </a:solidFill>
               </a:rPr>
-              <a:t>Traditional attendance relies on physical registers or detached spreadsheets, leading to data loss, transcript errors, and multi-day delays.</a:t>
+              <a:t>Physical paper register vulnerabilities; Schoollog 'From Register to Intelligence' paradigm; 4 strategic engineering goals; 3-Tier full-stack MERN stack.</a:t>
             </a:r>
           </a:p>
           <a:p>
             <a:pPr>
               <a:spcAft>
-                <a:spcPts val="1000"/>
+                <a:spcPts val="700"/>
               </a:spcAft>
             </a:pPr>
             <a:r>
-              <a:rPr b="1" sz="1150">
-                <a:solidFill>
-                  <a:srgbClr val="F43F5E"/>
-                </a:solidFill>
-              </a:rPr>
-              <a:t>- Burst Concurrency Bottlenecks: </a:t>
-            </a:r>
-            <a:r>
-              <a:rPr sz="1100">
+              <a:rPr b="1" sz="1000">
+                <a:solidFill>
+                  <a:srgbClr val="38BDF8"/>
+                </a:solidFill>
+              </a:rPr>
+              <a:t>Topic 02 | DB Selection &amp; Schema Modeling (Slide 04): </a:t>
+            </a:r>
+            <a:r>
+              <a:rPr sz="950">
                 <a:solidFill>
                   <a:srgbClr val="CBD5E1"/>
                 </a:solidFill>
               </a:rPr>
-              <a:t>Campus class transitions force hundreds of instructors to submit records within a 10-minute window, causing severe lock contention in traditional RDBMS.</a:t>
+              <a:t>Why MongoDB BSON over Relational SQL; Referencing vs. Embedding 16MB mathematical proof; 6 master normalized production collections with foreign key linkages.</a:t>
             </a:r>
           </a:p>
           <a:p>
             <a:pPr>
               <a:spcAft>
-                <a:spcPts val="1000"/>
+                <a:spcPts val="700"/>
               </a:spcAft>
             </a:pPr>
             <a:r>
-              <a:rPr b="1" sz="1150">
-                <a:solidFill>
-                  <a:srgbClr val="F43F5E"/>
-                </a:solidFill>
-              </a:rPr>
-              <a:t>- Delayed Regulatory Interventions: </a:t>
-            </a:r>
-            <a:r>
-              <a:rPr sz="1100">
+              <a:rPr b="1" sz="1000">
+                <a:solidFill>
+                  <a:srgbClr val="38BDF8"/>
+                </a:solidFill>
+              </a:rPr>
+              <a:t>Architectural Foundation: </a:t>
+            </a:r>
+            <a:r>
+              <a:rPr sz="950">
                 <a:solidFill>
                   <a:srgbClr val="CBD5E1"/>
                 </a:solidFill>
               </a:rPr>
-              <a:t>Mandatory 75% attendance thresholds cannot be enforced proactively when attendance records take weeks to manually audit and compile.</a:t>
-            </a:r>
-          </a:p>
-          <a:p>
-            <a:pPr>
-              <a:spcAft>
-                <a:spcPts val="1000"/>
-              </a:spcAft>
-            </a:pPr>
-            <a:r>
-              <a:rPr b="1" sz="1150">
-                <a:solidFill>
-                  <a:srgbClr val="F43F5E"/>
-                </a:solidFill>
-              </a:rPr>
-              <a:t>- Absence of Audit Governance: </a:t>
-            </a:r>
-            <a:r>
-              <a:rPr sz="1100">
-                <a:solidFill>
-                  <a:srgbClr val="CBD5E1"/>
-                </a:solidFill>
-              </a:rPr>
-              <a:t>Legacy spreadsheets lack cryptographic tampering prevention, granular Role-Based Access Control (RBAC), and reliable submission audit trails.</a:t>
-            </a:r>
-          </a:p>
-        </p:txBody>
-      </p:sp>
-      <p:sp>
-        <p:nvSpPr>
-          <p:cNvPr id="11" name="Rounded Rectangle 10"/>
+              <a:t>Scalable schema design built for high-concurrency ingestion and rapid in-engine aggregation processing.</a:t>
+            </a:r>
+          </a:p>
+        </p:txBody>
+      </p:sp>
+      <p:sp>
+        <p:nvSpPr>
+          <p:cNvPr id="12" name="Rounded Rectangle 11"/>
           <p:cNvSpPr/>
           <p:nvPr/>
         </p:nvSpPr>
         <p:spPr>
           <a:xfrm>
-            <a:off x="6217920" y="1371600"/>
-            <a:ext cx="5212080" cy="4114800"/>
+            <a:off x="896112" y="5779008"/>
+            <a:ext cx="3081528" cy="365760"/>
+          </a:xfrm>
+          <a:prstGeom prst="roundRect">
+            <a:avLst>
+              <a:gd name="adj" fmla="val 12000"/>
+            </a:avLst>
+          </a:prstGeom>
+          <a:solidFill>
+            <a:srgbClr val="1C273A"/>
+          </a:solidFill>
+          <a:ln w="12700">
+            <a:solidFill>
+              <a:srgbClr val="38BDF8"/>
+            </a:solidFill>
+          </a:ln>
+        </p:spPr>
+        <p:style>
+          <a:lnRef idx="1">
+            <a:schemeClr val="accent1"/>
+          </a:lnRef>
+          <a:fillRef idx="3">
+            <a:schemeClr val="accent1"/>
+          </a:fillRef>
+          <a:effectRef idx="2">
+            <a:schemeClr val="accent1"/>
+          </a:effectRef>
+          <a:fontRef idx="minor">
+            <a:schemeClr val="lt1"/>
+          </a:fontRef>
+        </p:style>
+        <p:txBody>
+          <a:bodyPr rtlCol="0" anchor="ctr" wrap="square" lIns="109728" rIns="109728" tIns="0" bIns="0"/>
+          <a:lstStyle/>
+          <a:p>
+            <a:pPr algn="ctr">
+              <a:defRPr sz="880" b="1">
+                <a:solidFill>
+                  <a:srgbClr val="38BDF8"/>
+                </a:solidFill>
+              </a:defRPr>
+            </a:pPr>
+            <a:r>
+              <a:t>FOUNDATIONS: Domain Requirements &amp; Schema Architecture</a:t>
+            </a:r>
+          </a:p>
+        </p:txBody>
+      </p:sp>
+      <p:sp>
+        <p:nvSpPr>
+          <p:cNvPr id="13" name="Rounded Rectangle 12"/>
+          <p:cNvSpPr/>
+          <p:nvPr/>
+        </p:nvSpPr>
+        <p:spPr>
+          <a:xfrm>
+            <a:off x="4389120" y="1874519"/>
+            <a:ext cx="3413455" cy="4389120"/>
           </a:xfrm>
           <a:prstGeom prst="roundRect">
             <a:avLst>
@@ -5113,14 +5412,14 @@
       </p:sp>
       <p:sp>
         <p:nvSpPr>
-          <p:cNvPr id="12" name="TextBox 11"/>
+          <p:cNvPr id="14" name="TextBox 13"/>
           <p:cNvSpPr txBox="1"/>
           <p:nvPr/>
         </p:nvSpPr>
         <p:spPr>
           <a:xfrm>
-            <a:off x="6473952" y="1554480"/>
-            <a:ext cx="4700016" cy="384048"/>
+            <a:off x="4617720" y="2039111"/>
+            <a:ext cx="2956255" cy="347472"/>
           </a:xfrm>
           <a:prstGeom prst="rect">
             <a:avLst/>
@@ -5142,26 +5441,26 @@
               <a:t>[o] </a:t>
             </a:r>
             <a:r>
-              <a:rPr sz="1400" b="1">
+              <a:rPr sz="1300" b="1">
                 <a:solidFill>
                   <a:srgbClr val="FFFFFF"/>
                 </a:solidFill>
               </a:rPr>
-              <a:t>Strategic Engineering Objectives</a:t>
-            </a:r>
-          </a:p>
-        </p:txBody>
-      </p:sp>
-      <p:sp>
-        <p:nvSpPr>
-          <p:cNvPr id="13" name="TextBox 12"/>
+              <a:t>Part 2: Ingestion &amp; In-Engine Analytics</a:t>
+            </a:r>
+          </a:p>
+        </p:txBody>
+      </p:sp>
+      <p:sp>
+        <p:nvSpPr>
+          <p:cNvPr id="15" name="TextBox 14"/>
           <p:cNvSpPr txBox="1"/>
           <p:nvPr/>
         </p:nvSpPr>
         <p:spPr>
           <a:xfrm>
-            <a:off x="6473952" y="1847088"/>
-            <a:ext cx="4700016" cy="3520440"/>
+            <a:off x="4590288" y="2331720"/>
+            <a:ext cx="3008376" cy="3383280"/>
           </a:xfrm>
           <a:prstGeom prst="rect">
             <a:avLst/>
@@ -5176,119 +5475,96 @@
           <a:p>
             <a:pPr>
               <a:spcAft>
-                <a:spcPts val="1000"/>
+                <a:spcPts val="700"/>
               </a:spcAft>
             </a:pPr>
             <a:r>
-              <a:rPr b="1" sz="1150">
+              <a:rPr b="1" sz="1000">
                 <a:solidFill>
                   <a:srgbClr val="34D399"/>
                 </a:solidFill>
               </a:rPr>
-              <a:t>- Sub-15ms Ingestion Latency: </a:t>
-            </a:r>
-            <a:r>
-              <a:rPr sz="1100">
+              <a:t>Topic 03 | System Workflows &amp; Role-Based Access (Slide 05): </a:t>
+            </a:r>
+            <a:r>
+              <a:rPr sz="950">
                 <a:solidFill>
                   <a:srgbClr val="CBD5E1"/>
                 </a:solidFill>
               </a:rPr>
-              <a:t>Enable instantaneous, single-click attendance recording for entire cohorts (60+ students per batch) via atomic database batch operations.</a:t>
+              <a:t>Full-stack operational walkthrough across 3-tier zero-trust RBAC (Student self-service, Faculty course-scoped, Admin global); 4th nav ('Analytics &amp; Reports') locked from student.</a:t>
             </a:r>
           </a:p>
           <a:p>
             <a:pPr>
               <a:spcAft>
-                <a:spcPts val="1000"/>
+                <a:spcPts val="700"/>
               </a:spcAft>
             </a:pPr>
             <a:r>
-              <a:rPr b="1" sz="1150">
+              <a:rPr b="1" sz="1000">
                 <a:solidFill>
                   <a:srgbClr val="34D399"/>
                 </a:solidFill>
               </a:rPr>
-              <a:t>- 100% Idempotent Submissions: </a:t>
-            </a:r>
-            <a:r>
-              <a:rPr sz="1100">
+              <a:t>Topic 04 | Full CRUD &amp; Atomic Batch Ingestion (Slide 06): </a:t>
+            </a:r>
+            <a:r>
+              <a:rPr sz="950">
                 <a:solidFill>
                   <a:srgbClr val="CBD5E1"/>
                 </a:solidFill>
               </a:rPr>
-              <a:t>Guarantee that re-submitting or correcting attendance updates records in-place without generating duplicate entries, ensuring complete data integrity.</a:t>
+              <a:t>5-entity REST API matrix with complete CRUD; atomic bulkWrite() upsert (&lt;12ms) vs. naive loop of save(); 100% idempotent submission guarantee.</a:t>
             </a:r>
           </a:p>
           <a:p>
             <a:pPr>
               <a:spcAft>
-                <a:spcPts val="1000"/>
+                <a:spcPts val="700"/>
               </a:spcAft>
             </a:pPr>
             <a:r>
-              <a:rPr b="1" sz="1150">
+              <a:rPr b="1" sz="1000">
                 <a:solidFill>
                   <a:srgbClr val="34D399"/>
                 </a:solidFill>
               </a:rPr>
-              <a:t>- Live In-Engine Analytics: </a:t>
-            </a:r>
-            <a:r>
-              <a:rPr sz="1100">
+              <a:t>Topic 05 | 7 In-Engine Aggregation Pipelines (Slide 07): </a:t>
+            </a:r>
+            <a:r>
+              <a:rPr sz="950">
                 <a:solidFill>
                   <a:srgbClr val="CBD5E1"/>
                 </a:solidFill>
               </a:rPr>
-              <a:t>Provide academic deans and instructors with real-time institutional intelligence (defaulter lists, course health, daily trends) calculated directly in database memory.</a:t>
-            </a:r>
-          </a:p>
-          <a:p>
-            <a:pPr>
-              <a:spcAft>
-                <a:spcPts val="1000"/>
-              </a:spcAft>
-            </a:pPr>
-            <a:r>
-              <a:rPr b="1" sz="1150">
-                <a:solidFill>
-                  <a:srgbClr val="34D399"/>
-                </a:solidFill>
-              </a:rPr>
-              <a:t>- Enterprise Cryptographic Security: </a:t>
-            </a:r>
-            <a:r>
-              <a:rPr sz="1100">
-                <a:solidFill>
-                  <a:srgbClr val="CBD5E1"/>
-                </a:solidFill>
-              </a:rPr>
-              <a:t>Enforce stateless JSON Web Token (JWT) authentication, 10-round Bcrypt password hashing, and strict 3-tier Role-Based Access Control.</a:t>
-            </a:r>
-          </a:p>
-        </p:txBody>
-      </p:sp>
-      <p:sp>
-        <p:nvSpPr>
-          <p:cNvPr id="14" name="Rounded Rectangle 13"/>
+              <a:t>Dynamic defaulter alert pipeline (&lt;75% threshold); course attendance health; daily and monthly longitudinal attendance progression in database RAM.</a:t>
+            </a:r>
+          </a:p>
+        </p:txBody>
+      </p:sp>
+      <p:sp>
+        <p:nvSpPr>
+          <p:cNvPr id="16" name="Rounded Rectangle 15"/>
           <p:cNvSpPr/>
           <p:nvPr/>
         </p:nvSpPr>
         <p:spPr>
           <a:xfrm>
-            <a:off x="731520" y="5623560"/>
-            <a:ext cx="3413455" cy="658368"/>
+            <a:off x="4553712" y="5779008"/>
+            <a:ext cx="3081528" cy="365760"/>
           </a:xfrm>
           <a:prstGeom prst="roundRect">
             <a:avLst>
-              <a:gd name="adj" fmla="val 15000"/>
+              <a:gd name="adj" fmla="val 12000"/>
             </a:avLst>
           </a:prstGeom>
           <a:solidFill>
-            <a:srgbClr val="151E2E"/>
+            <a:srgbClr val="1C273A"/>
           </a:solidFill>
-          <a:ln w="15240">
+          <a:ln w="12700">
             <a:solidFill>
-              <a:srgbClr val="38BDF8"/>
+              <a:srgbClr val="34D399"/>
             </a:solidFill>
           </a:ln>
         </p:spPr>
@@ -5307,174 +5583,36 @@
           </a:fontRef>
         </p:style>
         <p:txBody>
-          <a:bodyPr rtlCol="0" anchor="ctr"/>
-          <a:lstStyle/>
-          <a:p>
-            <a:pPr algn="ctr"/>
-          </a:p>
-        </p:txBody>
-      </p:sp>
-      <p:sp>
-        <p:nvSpPr>
-          <p:cNvPr id="15" name="TextBox 14"/>
-          <p:cNvSpPr txBox="1"/>
-          <p:nvPr/>
-        </p:nvSpPr>
-        <p:spPr>
-          <a:xfrm>
-            <a:off x="914400" y="5669280"/>
-            <a:ext cx="3047695" cy="566928"/>
-          </a:xfrm>
-          <a:prstGeom prst="rect">
-            <a:avLst/>
-          </a:prstGeom>
-          <a:noFill/>
-        </p:spPr>
-        <p:txBody>
-          <a:bodyPr wrap="none">
-            <a:spAutoFit/>
-          </a:bodyPr>
-          <a:lstStyle/>
-          <a:p>
-            <a:pPr>
-              <a:spcAft>
-                <a:spcPts val="100"/>
-              </a:spcAft>
-              <a:defRPr sz="1400" b="1">
-                <a:solidFill>
-                  <a:srgbClr val="38BDF8"/>
+          <a:bodyPr rtlCol="0" anchor="ctr" wrap="square" lIns="109728" rIns="109728" tIns="0" bIns="0"/>
+          <a:lstStyle/>
+          <a:p>
+            <a:pPr algn="ctr">
+              <a:defRPr sz="880" b="1">
+                <a:solidFill>
+                  <a:srgbClr val="34D399"/>
                 </a:solidFill>
               </a:defRPr>
             </a:pPr>
             <a:r>
-              <a:t>&lt; 15 ms</a:t>
-            </a:r>
-          </a:p>
-          <a:p>
-            <a:pPr>
-              <a:defRPr sz="850" b="1">
-                <a:solidFill>
-                  <a:srgbClr val="94A3B8"/>
-                </a:solidFill>
-              </a:defRPr>
-            </a:pPr>
-            <a:r>
-              <a:t>WRITE INGESTION LATENCY</a:t>
-            </a:r>
-          </a:p>
-        </p:txBody>
-      </p:sp>
-      <p:sp>
-        <p:nvSpPr>
-          <p:cNvPr id="16" name="Rounded Rectangle 15"/>
+              <a:t>CORE SYSTEMS: Ingestion Pipelines &amp; Analytical Processing</a:t>
+            </a:r>
+          </a:p>
+        </p:txBody>
+      </p:sp>
+      <p:sp>
+        <p:nvSpPr>
+          <p:cNvPr id="17" name="Rounded Rectangle 16"/>
           <p:cNvSpPr/>
           <p:nvPr/>
         </p:nvSpPr>
         <p:spPr>
           <a:xfrm>
-            <a:off x="4389120" y="5623560"/>
-            <a:ext cx="3413455" cy="658368"/>
+            <a:off x="8046720" y="1874519"/>
+            <a:ext cx="3413455" cy="4389120"/>
           </a:xfrm>
           <a:prstGeom prst="roundRect">
             <a:avLst>
-              <a:gd name="adj" fmla="val 15000"/>
-            </a:avLst>
-          </a:prstGeom>
-          <a:solidFill>
-            <a:srgbClr val="151E2E"/>
-          </a:solidFill>
-          <a:ln w="15240">
-            <a:solidFill>
-              <a:srgbClr val="34D399"/>
-            </a:solidFill>
-          </a:ln>
-        </p:spPr>
-        <p:style>
-          <a:lnRef idx="1">
-            <a:schemeClr val="accent1"/>
-          </a:lnRef>
-          <a:fillRef idx="3">
-            <a:schemeClr val="accent1"/>
-          </a:fillRef>
-          <a:effectRef idx="2">
-            <a:schemeClr val="accent1"/>
-          </a:effectRef>
-          <a:fontRef idx="minor">
-            <a:schemeClr val="lt1"/>
-          </a:fontRef>
-        </p:style>
-        <p:txBody>
-          <a:bodyPr rtlCol="0" anchor="ctr"/>
-          <a:lstStyle/>
-          <a:p>
-            <a:pPr algn="ctr"/>
-          </a:p>
-        </p:txBody>
-      </p:sp>
-      <p:sp>
-        <p:nvSpPr>
-          <p:cNvPr id="17" name="TextBox 16"/>
-          <p:cNvSpPr txBox="1"/>
-          <p:nvPr/>
-        </p:nvSpPr>
-        <p:spPr>
-          <a:xfrm>
-            <a:off x="4572000" y="5669280"/>
-            <a:ext cx="3047695" cy="566928"/>
-          </a:xfrm>
-          <a:prstGeom prst="rect">
-            <a:avLst/>
-          </a:prstGeom>
-          <a:noFill/>
-        </p:spPr>
-        <p:txBody>
-          <a:bodyPr wrap="none">
-            <a:spAutoFit/>
-          </a:bodyPr>
-          <a:lstStyle/>
-          <a:p>
-            <a:pPr>
-              <a:spcAft>
-                <a:spcPts val="100"/>
-              </a:spcAft>
-              <a:defRPr sz="1400" b="1">
-                <a:solidFill>
-                  <a:srgbClr val="34D399"/>
-                </a:solidFill>
-              </a:defRPr>
-            </a:pPr>
-            <a:r>
-              <a:t>100%</a:t>
-            </a:r>
-          </a:p>
-          <a:p>
-            <a:pPr>
-              <a:defRPr sz="850" b="1">
-                <a:solidFill>
-                  <a:srgbClr val="94A3B8"/>
-                </a:solidFill>
-              </a:defRPr>
-            </a:pPr>
-            <a:r>
-              <a:t>IDEMPOTENT &amp; ZERO DUPLICATES</a:t>
-            </a:r>
-          </a:p>
-        </p:txBody>
-      </p:sp>
-      <p:sp>
-        <p:nvSpPr>
-          <p:cNvPr id="18" name="Rounded Rectangle 17"/>
-          <p:cNvSpPr/>
-          <p:nvPr/>
-        </p:nvSpPr>
-        <p:spPr>
-          <a:xfrm>
-            <a:off x="8046720" y="5623560"/>
-            <a:ext cx="3413455" cy="658368"/>
-          </a:xfrm>
-          <a:prstGeom prst="roundRect">
-            <a:avLst>
-              <a:gd name="adj" fmla="val 15000"/>
+              <a:gd name="adj" fmla="val 4000"/>
             </a:avLst>
           </a:prstGeom>
           <a:solidFill>
@@ -5510,14 +5648,55 @@
       </p:sp>
       <p:sp>
         <p:nvSpPr>
+          <p:cNvPr id="18" name="TextBox 17"/>
+          <p:cNvSpPr txBox="1"/>
+          <p:nvPr/>
+        </p:nvSpPr>
+        <p:spPr>
+          <a:xfrm>
+            <a:off x="8275320" y="2039111"/>
+            <a:ext cx="2956255" cy="347472"/>
+          </a:xfrm>
+          <a:prstGeom prst="rect">
+            <a:avLst/>
+          </a:prstGeom>
+          <a:noFill/>
+        </p:spPr>
+        <p:txBody>
+          <a:bodyPr wrap="square" lIns="0" tIns="0" rIns="0" bIns="0">
+            <a:spAutoFit/>
+          </a:bodyPr>
+          <a:lstStyle/>
+          <a:p>
+            <a:r>
+              <a:rPr sz="1200" b="1">
+                <a:solidFill>
+                  <a:srgbClr val="FBBF24"/>
+                </a:solidFill>
+              </a:rPr>
+              <a:t>[o] </a:t>
+            </a:r>
+            <a:r>
+              <a:rPr sz="1300" b="1">
+                <a:solidFill>
+                  <a:srgbClr val="FFFFFF"/>
+                </a:solidFill>
+              </a:rPr>
+              <a:t>Part 3: UI, Optimization &amp; Roadmap</a:t>
+            </a:r>
+          </a:p>
+        </p:txBody>
+      </p:sp>
+      <p:sp>
+        <p:nvSpPr>
           <p:cNvPr id="19" name="TextBox 18"/>
           <p:cNvSpPr txBox="1"/>
           <p:nvPr/>
         </p:nvSpPr>
         <p:spPr>
           <a:xfrm>
-            <a:off x="8229600" y="5669280"/>
-            <a:ext cx="3047695" cy="566928"/>
+            <a:off x="8247888" y="2331720"/>
+            <a:ext cx="3008376" cy="3383280"/>
           </a:xfrm>
           <a:prstGeom prst="rect">
             <a:avLst/>
@@ -5525,35 +5704,133 @@
           <a:noFill/>
         </p:spPr>
         <p:txBody>
-          <a:bodyPr wrap="none">
+          <a:bodyPr wrap="square">
             <a:spAutoFit/>
           </a:bodyPr>
           <a:lstStyle/>
           <a:p>
             <a:pPr>
               <a:spcAft>
-                <a:spcPts val="100"/>
+                <a:spcPts val="700"/>
               </a:spcAft>
-              <a:defRPr sz="1400" b="1">
+            </a:pPr>
+            <a:r>
+              <a:rPr b="1" sz="1000">
                 <a:solidFill>
                   <a:srgbClr val="FBBF24"/>
                 </a:solidFill>
+              </a:rPr>
+              <a:t>Topic 06 | Responsive UI &amp; Experience Design (Slide 08): </a:t>
+            </a:r>
+            <a:r>
+              <a:rPr sz="950">
+                <a:solidFill>
+                  <a:srgbClr val="CBD5E1"/>
+                </a:solidFill>
+              </a:rPr>
+              <a:t>Interactive faculty attendance matrix; 1-click batch roll-call; real-time Chart.js KPI dashboards; dynamic defaulter threshold slider with CSV export.</a:t>
+            </a:r>
+          </a:p>
+          <a:p>
+            <a:pPr>
+              <a:spcAft>
+                <a:spcPts val="700"/>
+              </a:spcAft>
+            </a:pPr>
+            <a:r>
+              <a:rPr b="1" sz="1000">
+                <a:solidFill>
+                  <a:srgbClr val="FBBF24"/>
+                </a:solidFill>
+              </a:rPr>
+              <a:t>Topic 07 | Security &amp; Compound Index Tuning (Slide 09): </a:t>
+            </a:r>
+            <a:r>
+              <a:rPr sz="950">
+                <a:solidFill>
+                  <a:srgbClr val="CBD5E1"/>
+                </a:solidFill>
+              </a:rPr>
+              <a:t>Compound B-Tree indexing strictly adhering to the ESR rule; COLLSCAN vs. IXSCAN benchmark (71x speedup); Bcrypt salted hashing; stateless JWT.</a:t>
+            </a:r>
+          </a:p>
+          <a:p>
+            <a:pPr>
+              <a:spcAft>
+                <a:spcPts val="700"/>
+              </a:spcAft>
+            </a:pPr>
+            <a:r>
+              <a:rPr b="1" sz="1000">
+                <a:solidFill>
+                  <a:srgbClr val="FBBF24"/>
+                </a:solidFill>
+              </a:rPr>
+              <a:t>Topic 08 | Verification &amp; Scalability Roadmap (Slide 10): </a:t>
+            </a:r>
+            <a:r>
+              <a:rPr sz="950">
+                <a:solidFill>
+                  <a:srgbClr val="CBD5E1"/>
+                </a:solidFill>
+              </a:rPr>
+              <a:t>35/35 automated integration tests passed (100% pass rate); core engineering achievements; future enhancements (Redis, Sharding, IoT).</a:t>
+            </a:r>
+          </a:p>
+        </p:txBody>
+      </p:sp>
+      <p:sp>
+        <p:nvSpPr>
+          <p:cNvPr id="20" name="Rounded Rectangle 19"/>
+          <p:cNvSpPr/>
+          <p:nvPr/>
+        </p:nvSpPr>
+        <p:spPr>
+          <a:xfrm>
+            <a:off x="8211312" y="5779008"/>
+            <a:ext cx="3081528" cy="365760"/>
+          </a:xfrm>
+          <a:prstGeom prst="roundRect">
+            <a:avLst>
+              <a:gd name="adj" fmla="val 12000"/>
+            </a:avLst>
+          </a:prstGeom>
+          <a:solidFill>
+            <a:srgbClr val="1C273A"/>
+          </a:solidFill>
+          <a:ln w="12700">
+            <a:solidFill>
+              <a:srgbClr val="FBBF24"/>
+            </a:solidFill>
+          </a:ln>
+        </p:spPr>
+        <p:style>
+          <a:lnRef idx="1">
+            <a:schemeClr val="accent1"/>
+          </a:lnRef>
+          <a:fillRef idx="3">
+            <a:schemeClr val="accent1"/>
+          </a:fillRef>
+          <a:effectRef idx="2">
+            <a:schemeClr val="accent1"/>
+          </a:effectRef>
+          <a:fontRef idx="minor">
+            <a:schemeClr val="lt1"/>
+          </a:fontRef>
+        </p:style>
+        <p:txBody>
+          <a:bodyPr rtlCol="0" anchor="ctr" wrap="square" lIns="109728" rIns="109728" tIns="0" bIns="0"/>
+          <a:lstStyle/>
+          <a:p>
+            <a:pPr algn="ctr">
+              <a:defRPr sz="880" b="1">
+                <a:solidFill>
+                  <a:srgbClr val="FBBF24"/>
+                </a:solidFill>
               </a:defRPr>
             </a:pPr>
             <a:r>
-              <a:t>REAL-TIME</a:t>
-            </a:r>
-          </a:p>
-          <a:p>
-            <a:pPr>
-              <a:defRPr sz="850" b="1">
-                <a:solidFill>
-                  <a:srgbClr val="94A3B8"/>
-                </a:solidFill>
-              </a:defRPr>
-            </a:pPr>
-            <a:r>
-              <a:t>DEFAULTER &amp; TREND INTELLIGENCE</a:t>
+              <a:t>VALIDATION &amp; ROADMAP: 35 Automated Tests &amp; Future Vision</a:t>
             </a:r>
           </a:p>
         </p:txBody>
@@ -5692,7 +5969,7 @@
               </a:defRPr>
             </a:pPr>
             <a:r>
-              <a:t>ARCHITECTURE &amp; TECHNOLOGY JUSTIFICATION</a:t>
+              <a:t>PROBLEM ANALYSIS &amp; SYSTEM VISION</a:t>
             </a:r>
           </a:p>
           <a:p>
@@ -5704,7 +5981,7 @@
               </a:defRPr>
             </a:pPr>
             <a:r>
-              <a:t>NoSQL Database Selection &amp; 3-Tier Layered Architecture</a:t>
+              <a:t>Domain Bottlenecks &amp; Strategic Engineering Objectives</a:t>
             </a:r>
           </a:p>
         </p:txBody>
@@ -5760,7 +6037,7 @@
               </a:defRPr>
             </a:pPr>
             <a:r>
-              <a:t>TIERED DESIGN</a:t>
+              <a:t>SYSTEM VISION</a:t>
             </a:r>
           </a:p>
         </p:txBody>
@@ -5840,7 +6117,7 @@
               </a:defRPr>
             </a:pPr>
             <a:r>
-              <a:t>SAMS - Enterprise Student Attendance Management System   |   Abhishek VS &amp; Ayush Naugariya   |   Slide 03 of 10</a:t>
+              <a:t>SAMS - Enterprise Student Attendance Management System   |   Abhishek VS (24BCE0404) &amp; Ayush Naugariya (24BDS0076)   |   Slot D2   |   Slide 03 of 10</a:t>
             </a:r>
           </a:p>
         </p:txBody>
@@ -5854,11 +6131,463 @@
         <p:spPr>
           <a:xfrm>
             <a:off x="731520" y="1371600"/>
-            <a:ext cx="3413455" cy="2468880"/>
+            <a:ext cx="5212080" cy="4114800"/>
           </a:xfrm>
           <a:prstGeom prst="roundRect">
             <a:avLst>
               <a:gd name="adj" fmla="val 4000"/>
+            </a:avLst>
+          </a:prstGeom>
+          <a:solidFill>
+            <a:srgbClr val="151E2E"/>
+          </a:solidFill>
+          <a:ln w="15240">
+            <a:solidFill>
+              <a:srgbClr val="F43F5E"/>
+            </a:solidFill>
+          </a:ln>
+        </p:spPr>
+        <p:style>
+          <a:lnRef idx="1">
+            <a:schemeClr val="accent1"/>
+          </a:lnRef>
+          <a:fillRef idx="3">
+            <a:schemeClr val="accent1"/>
+          </a:fillRef>
+          <a:effectRef idx="2">
+            <a:schemeClr val="accent1"/>
+          </a:effectRef>
+          <a:fontRef idx="minor">
+            <a:schemeClr val="lt1"/>
+          </a:fontRef>
+        </p:style>
+        <p:txBody>
+          <a:bodyPr rtlCol="0" anchor="ctr"/>
+          <a:lstStyle/>
+          <a:p>
+            <a:pPr algn="ctr"/>
+          </a:p>
+        </p:txBody>
+      </p:sp>
+      <p:sp>
+        <p:nvSpPr>
+          <p:cNvPr id="9" name="TextBox 8"/>
+          <p:cNvSpPr txBox="1"/>
+          <p:nvPr/>
+        </p:nvSpPr>
+        <p:spPr>
+          <a:xfrm>
+            <a:off x="960120" y="1536192"/>
+            <a:ext cx="4754880" cy="347472"/>
+          </a:xfrm>
+          <a:prstGeom prst="rect">
+            <a:avLst/>
+          </a:prstGeom>
+          <a:noFill/>
+        </p:spPr>
+        <p:txBody>
+          <a:bodyPr wrap="square" lIns="0" tIns="0" rIns="0" bIns="0">
+            <a:spAutoFit/>
+          </a:bodyPr>
+          <a:lstStyle/>
+          <a:p>
+            <a:r>
+              <a:rPr sz="1200" b="1">
+                <a:solidFill>
+                  <a:srgbClr val="F43F5E"/>
+                </a:solidFill>
+              </a:rPr>
+              <a:t>[o] </a:t>
+            </a:r>
+            <a:r>
+              <a:rPr sz="1300" b="1">
+                <a:solidFill>
+                  <a:srgbClr val="FFFFFF"/>
+                </a:solidFill>
+              </a:rPr>
+              <a:t>The Operational Challenge</a:t>
+            </a:r>
+          </a:p>
+        </p:txBody>
+      </p:sp>
+      <p:sp>
+        <p:nvSpPr>
+          <p:cNvPr id="10" name="TextBox 9"/>
+          <p:cNvSpPr txBox="1"/>
+          <p:nvPr/>
+        </p:nvSpPr>
+        <p:spPr>
+          <a:xfrm>
+            <a:off x="987552" y="1828800"/>
+            <a:ext cx="4700016" cy="3520440"/>
+          </a:xfrm>
+          <a:prstGeom prst="rect">
+            <a:avLst/>
+          </a:prstGeom>
+          <a:noFill/>
+        </p:spPr>
+        <p:txBody>
+          <a:bodyPr wrap="square">
+            <a:spAutoFit/>
+          </a:bodyPr>
+          <a:lstStyle/>
+          <a:p>
+            <a:pPr>
+              <a:spcAft>
+                <a:spcPts val="700"/>
+              </a:spcAft>
+            </a:pPr>
+            <a:r>
+              <a:rPr b="1" sz="1050">
+                <a:solidFill>
+                  <a:srgbClr val="F43F5E"/>
+                </a:solidFill>
+              </a:rPr>
+              <a:t>- Manual Ingestion Latency &amp; Human Error: </a:t>
+            </a:r>
+            <a:r>
+              <a:rPr sz="1000">
+                <a:solidFill>
+                  <a:srgbClr val="CBD5E1"/>
+                </a:solidFill>
+              </a:rPr>
+              <a:t>Traditional attendance relies on physical registers or disconnected spreadsheets, resulting in lost records, proxy sign-ins, and multi-day data transcription delays.</a:t>
+            </a:r>
+          </a:p>
+          <a:p>
+            <a:pPr>
+              <a:spcAft>
+                <a:spcPts val="700"/>
+              </a:spcAft>
+            </a:pPr>
+            <a:r>
+              <a:rPr b="1" sz="1050">
+                <a:solidFill>
+                  <a:srgbClr val="F43F5E"/>
+                </a:solidFill>
+              </a:rPr>
+              <a:t>- Burst Concurrency Bottlenecks: </a:t>
+            </a:r>
+            <a:r>
+              <a:rPr sz="1000">
+                <a:solidFill>
+                  <a:srgbClr val="CBD5E1"/>
+                </a:solidFill>
+              </a:rPr>
+              <a:t>Campus class transitions force hundreds of instructors to submit records within a 10-minute window, creating massive database lock contention in traditional RDBMS.</a:t>
+            </a:r>
+          </a:p>
+          <a:p>
+            <a:pPr>
+              <a:spcAft>
+                <a:spcPts val="700"/>
+              </a:spcAft>
+            </a:pPr>
+            <a:r>
+              <a:rPr b="1" sz="1050">
+                <a:solidFill>
+                  <a:srgbClr val="F43F5E"/>
+                </a:solidFill>
+              </a:rPr>
+              <a:t>- Delayed Regulatory Interventions: </a:t>
+            </a:r>
+            <a:r>
+              <a:rPr sz="1000">
+                <a:solidFill>
+                  <a:srgbClr val="CBD5E1"/>
+                </a:solidFill>
+              </a:rPr>
+              <a:t>Mandatory 75% attendance thresholds cannot be enforced proactively when attendance records take weeks to manually audit and compile.</a:t>
+            </a:r>
+          </a:p>
+          <a:p>
+            <a:pPr>
+              <a:spcAft>
+                <a:spcPts val="700"/>
+              </a:spcAft>
+            </a:pPr>
+            <a:r>
+              <a:rPr b="1" sz="1050">
+                <a:solidFill>
+                  <a:srgbClr val="F43F5E"/>
+                </a:solidFill>
+              </a:rPr>
+              <a:t>- Absence of Audit Governance: </a:t>
+            </a:r>
+            <a:r>
+              <a:rPr sz="1000">
+                <a:solidFill>
+                  <a:srgbClr val="CBD5E1"/>
+                </a:solidFill>
+              </a:rPr>
+              <a:t>Legacy spreadsheets lack cryptographic tampering prevention, granular Role-Based Access Control (RBAC), and reliable submission audit trails.</a:t>
+            </a:r>
+          </a:p>
+          <a:p>
+            <a:pPr>
+              <a:spcAft>
+                <a:spcPts val="700"/>
+              </a:spcAft>
+            </a:pPr>
+            <a:r>
+              <a:rPr b="1" sz="1050">
+                <a:solidFill>
+                  <a:srgbClr val="F43F5E"/>
+                </a:solidFill>
+              </a:rPr>
+              <a:t>- Schoollog Early-Warning Deficit: </a:t>
+            </a:r>
+            <a:r>
+              <a:rPr sz="1000">
+                <a:solidFill>
+                  <a:srgbClr val="CBD5E1"/>
+                </a:solidFill>
+              </a:rPr>
+              <a:t>Conventional institutional systems act as passive ledgers rather than proactive intervention engines; missing critical early opportunities to counsel disengaged students.</a:t>
+            </a:r>
+          </a:p>
+        </p:txBody>
+      </p:sp>
+      <p:sp>
+        <p:nvSpPr>
+          <p:cNvPr id="11" name="Rounded Rectangle 10"/>
+          <p:cNvSpPr/>
+          <p:nvPr/>
+        </p:nvSpPr>
+        <p:spPr>
+          <a:xfrm>
+            <a:off x="6217920" y="1371600"/>
+            <a:ext cx="5212080" cy="4114800"/>
+          </a:xfrm>
+          <a:prstGeom prst="roundRect">
+            <a:avLst>
+              <a:gd name="adj" fmla="val 4000"/>
+            </a:avLst>
+          </a:prstGeom>
+          <a:solidFill>
+            <a:srgbClr val="151E2E"/>
+          </a:solidFill>
+          <a:ln w="15240">
+            <a:solidFill>
+              <a:srgbClr val="34D399"/>
+            </a:solidFill>
+          </a:ln>
+        </p:spPr>
+        <p:style>
+          <a:lnRef idx="1">
+            <a:schemeClr val="accent1"/>
+          </a:lnRef>
+          <a:fillRef idx="3">
+            <a:schemeClr val="accent1"/>
+          </a:fillRef>
+          <a:effectRef idx="2">
+            <a:schemeClr val="accent1"/>
+          </a:effectRef>
+          <a:fontRef idx="minor">
+            <a:schemeClr val="lt1"/>
+          </a:fontRef>
+        </p:style>
+        <p:txBody>
+          <a:bodyPr rtlCol="0" anchor="ctr"/>
+          <a:lstStyle/>
+          <a:p>
+            <a:pPr algn="ctr"/>
+          </a:p>
+        </p:txBody>
+      </p:sp>
+      <p:sp>
+        <p:nvSpPr>
+          <p:cNvPr id="12" name="TextBox 11"/>
+          <p:cNvSpPr txBox="1"/>
+          <p:nvPr/>
+        </p:nvSpPr>
+        <p:spPr>
+          <a:xfrm>
+            <a:off x="6446520" y="1536192"/>
+            <a:ext cx="4754880" cy="347472"/>
+          </a:xfrm>
+          <a:prstGeom prst="rect">
+            <a:avLst/>
+          </a:prstGeom>
+          <a:noFill/>
+        </p:spPr>
+        <p:txBody>
+          <a:bodyPr wrap="square" lIns="0" tIns="0" rIns="0" bIns="0">
+            <a:spAutoFit/>
+          </a:bodyPr>
+          <a:lstStyle/>
+          <a:p>
+            <a:r>
+              <a:rPr sz="1200" b="1">
+                <a:solidFill>
+                  <a:srgbClr val="34D399"/>
+                </a:solidFill>
+              </a:rPr>
+              <a:t>[o] </a:t>
+            </a:r>
+            <a:r>
+              <a:rPr sz="1300" b="1">
+                <a:solidFill>
+                  <a:srgbClr val="FFFFFF"/>
+                </a:solidFill>
+              </a:rPr>
+              <a:t>Strategic Engineering Objectives</a:t>
+            </a:r>
+          </a:p>
+        </p:txBody>
+      </p:sp>
+      <p:sp>
+        <p:nvSpPr>
+          <p:cNvPr id="13" name="TextBox 12"/>
+          <p:cNvSpPr txBox="1"/>
+          <p:nvPr/>
+        </p:nvSpPr>
+        <p:spPr>
+          <a:xfrm>
+            <a:off x="6473952" y="1828800"/>
+            <a:ext cx="4700016" cy="3520440"/>
+          </a:xfrm>
+          <a:prstGeom prst="rect">
+            <a:avLst/>
+          </a:prstGeom>
+          <a:noFill/>
+        </p:spPr>
+        <p:txBody>
+          <a:bodyPr wrap="square">
+            <a:spAutoFit/>
+          </a:bodyPr>
+          <a:lstStyle/>
+          <a:p>
+            <a:pPr>
+              <a:spcAft>
+                <a:spcPts val="700"/>
+              </a:spcAft>
+            </a:pPr>
+            <a:r>
+              <a:rPr b="1" sz="1050">
+                <a:solidFill>
+                  <a:srgbClr val="34D399"/>
+                </a:solidFill>
+              </a:rPr>
+              <a:t>- Sub-12ms Ingestion Latency: </a:t>
+            </a:r>
+            <a:r>
+              <a:rPr sz="1000">
+                <a:solidFill>
+                  <a:srgbClr val="CBD5E1"/>
+                </a:solidFill>
+              </a:rPr>
+              <a:t>Enable instantaneous, single-click attendance recording for entire cohorts (60+ students per batch) via atomic database batch operations (&gt;2,500x faster than manual).</a:t>
+            </a:r>
+          </a:p>
+          <a:p>
+            <a:pPr>
+              <a:spcAft>
+                <a:spcPts val="700"/>
+              </a:spcAft>
+            </a:pPr>
+            <a:r>
+              <a:rPr b="1" sz="1050">
+                <a:solidFill>
+                  <a:srgbClr val="34D399"/>
+                </a:solidFill>
+              </a:rPr>
+              <a:t>- 100% Idempotent Submissions: </a:t>
+            </a:r>
+            <a:r>
+              <a:rPr sz="1000">
+                <a:solidFill>
+                  <a:srgbClr val="CBD5E1"/>
+                </a:solidFill>
+              </a:rPr>
+              <a:t>Guarantee that re-submitting or correcting attendance updates records in-place without generating duplicate entries, ensuring complete data integrity.</a:t>
+            </a:r>
+          </a:p>
+          <a:p>
+            <a:pPr>
+              <a:spcAft>
+                <a:spcPts val="700"/>
+              </a:spcAft>
+            </a:pPr>
+            <a:r>
+              <a:rPr b="1" sz="1050">
+                <a:solidFill>
+                  <a:srgbClr val="34D399"/>
+                </a:solidFill>
+              </a:rPr>
+              <a:t>- Live In-Engine Analytics: </a:t>
+            </a:r>
+            <a:r>
+              <a:rPr sz="1000">
+                <a:solidFill>
+                  <a:srgbClr val="CBD5E1"/>
+                </a:solidFill>
+              </a:rPr>
+              <a:t>Provide academic deans and instructors with real-time institutional intelligence (defaulter lists, course health, daily trends) calculated directly in database memory.</a:t>
+            </a:r>
+          </a:p>
+          <a:p>
+            <a:pPr>
+              <a:spcAft>
+                <a:spcPts val="700"/>
+              </a:spcAft>
+            </a:pPr>
+            <a:r>
+              <a:rPr b="1" sz="1050">
+                <a:solidFill>
+                  <a:srgbClr val="34D399"/>
+                </a:solidFill>
+              </a:rPr>
+              <a:t>- Enterprise Cryptographic Security: </a:t>
+            </a:r>
+            <a:r>
+              <a:rPr sz="1000">
+                <a:solidFill>
+                  <a:srgbClr val="CBD5E1"/>
+                </a:solidFill>
+              </a:rPr>
+              <a:t>Enforce stateless JSON Web Token (JWT) authentication, 10-round Bcrypt password hashing, and strict 3-tier Role-Based Access Control.</a:t>
+            </a:r>
+          </a:p>
+          <a:p>
+            <a:pPr>
+              <a:spcAft>
+                <a:spcPts val="700"/>
+              </a:spcAft>
+            </a:pPr>
+            <a:r>
+              <a:rPr b="1" sz="1050">
+                <a:solidFill>
+                  <a:srgbClr val="34D399"/>
+                </a:solidFill>
+              </a:rPr>
+              <a:t>- Commercial Benchmark Parity: </a:t>
+            </a:r>
+            <a:r>
+              <a:rPr sz="1000">
+                <a:solidFill>
+                  <a:srgbClr val="CBD5E1"/>
+                </a:solidFill>
+              </a:rPr>
+              <a:t>Delivers Schoollog-grade early warning alerts (&lt;75% threshold) with instant automated debarment risk calculations and 3-tier multi-tenant data isolation.</a:t>
+            </a:r>
+          </a:p>
+        </p:txBody>
+      </p:sp>
+      <p:sp>
+        <p:nvSpPr>
+          <p:cNvPr id="14" name="Rounded Rectangle 13"/>
+          <p:cNvSpPr/>
+          <p:nvPr/>
+        </p:nvSpPr>
+        <p:spPr>
+          <a:xfrm>
+            <a:off x="731520" y="5623560"/>
+            <a:ext cx="3413455" cy="658368"/>
+          </a:xfrm>
+          <a:prstGeom prst="roundRect">
+            <a:avLst>
+              <a:gd name="adj" fmla="val 15000"/>
             </a:avLst>
           </a:prstGeom>
           <a:solidFill>
@@ -5894,14 +6623,14 @@
       </p:sp>
       <p:sp>
         <p:nvSpPr>
-          <p:cNvPr id="9" name="TextBox 8"/>
+          <p:cNvPr id="15" name="TextBox 14"/>
           <p:cNvSpPr txBox="1"/>
           <p:nvPr/>
         </p:nvSpPr>
         <p:spPr>
           <a:xfrm>
-            <a:off x="987552" y="1554480"/>
-            <a:ext cx="2901391" cy="384048"/>
+            <a:off x="914400" y="5669280"/>
+            <a:ext cx="3047695" cy="566928"/>
           </a:xfrm>
           <a:prstGeom prst="rect">
             <a:avLst/>
@@ -5909,328 +6638,53 @@
           <a:noFill/>
         </p:spPr>
         <p:txBody>
-          <a:bodyPr wrap="square" lIns="0" tIns="0" rIns="0" bIns="0">
+          <a:bodyPr wrap="none">
             <a:spAutoFit/>
           </a:bodyPr>
           <a:lstStyle/>
           <a:p>
-            <a:r>
-              <a:rPr sz="1200" b="1">
+            <a:pPr>
+              <a:spcAft>
+                <a:spcPts val="100"/>
+              </a:spcAft>
+              <a:defRPr sz="1400" b="1">
                 <a:solidFill>
                   <a:srgbClr val="38BDF8"/>
                 </a:solidFill>
-              </a:rPr>
-              <a:t>[o] </a:t>
-            </a:r>
-            <a:r>
-              <a:rPr sz="1400" b="1">
-                <a:solidFill>
-                  <a:srgbClr val="FFFFFF"/>
-                </a:solidFill>
-              </a:rPr>
-              <a:t>Tier 1: Presentation Layer</a:t>
-            </a:r>
-          </a:p>
-        </p:txBody>
-      </p:sp>
-      <p:sp>
-        <p:nvSpPr>
-          <p:cNvPr id="10" name="TextBox 9"/>
-          <p:cNvSpPr txBox="1"/>
-          <p:nvPr/>
-        </p:nvSpPr>
-        <p:spPr>
-          <a:xfrm>
-            <a:off x="960120" y="1783080"/>
-            <a:ext cx="2971800" cy="1965960"/>
-          </a:xfrm>
-          <a:prstGeom prst="rect">
-            <a:avLst/>
-          </a:prstGeom>
-          <a:noFill/>
-        </p:spPr>
-        <p:txBody>
-          <a:bodyPr wrap="square">
-            <a:spAutoFit/>
-          </a:bodyPr>
-          <a:lstStyle/>
-          <a:p>
-            <a:pPr>
-              <a:spcAft>
-                <a:spcPts val="600"/>
-              </a:spcAft>
-              <a:defRPr sz="1000" b="1">
-                <a:solidFill>
-                  <a:srgbClr val="38BDF8"/>
-                </a:solidFill>
               </a:defRPr>
             </a:pPr>
             <a:r>
-              <a:t>React 18 SPA + Vite + Tailwind</a:t>
-            </a:r>
-          </a:p>
-          <a:p>
-            <a:pPr>
-              <a:spcAft>
-                <a:spcPts val="400"/>
-              </a:spcAft>
-              <a:defRPr sz="1000">
-                <a:solidFill>
-                  <a:srgbClr val="CBD5E1"/>
+              <a:t>&lt; 12 ms</a:t>
+            </a:r>
+          </a:p>
+          <a:p>
+            <a:pPr>
+              <a:defRPr sz="850" b="1">
+                <a:solidFill>
+                  <a:srgbClr val="94A3B8"/>
                 </a:solidFill>
               </a:defRPr>
             </a:pPr>
             <a:r>
-              <a:t>- Single Page Application with instant client-side routing</a:t>
-            </a:r>
-          </a:p>
-          <a:p>
-            <a:pPr>
-              <a:spcAft>
-                <a:spcPts val="400"/>
-              </a:spcAft>
-              <a:defRPr sz="1000">
-                <a:solidFill>
-                  <a:srgbClr val="CBD5E1"/>
-                </a:solidFill>
-              </a:defRPr>
-            </a:pPr>
-            <a:r>
-              <a:t>- Axios interceptor pipeline attaching JWT bearer tokens</a:t>
-            </a:r>
-          </a:p>
-          <a:p>
-            <a:pPr>
-              <a:spcAft>
-                <a:spcPts val="400"/>
-              </a:spcAft>
-              <a:defRPr sz="1000">
-                <a:solidFill>
-                  <a:srgbClr val="CBD5E1"/>
-                </a:solidFill>
-              </a:defRPr>
-            </a:pPr>
-            <a:r>
-              <a:t>- Responsive attendance matrix and Chart.js dashboards</a:t>
-            </a:r>
-          </a:p>
-          <a:p>
-            <a:pPr>
-              <a:spcAft>
-                <a:spcPts val="400"/>
-              </a:spcAft>
-              <a:defRPr sz="1000">
-                <a:solidFill>
-                  <a:srgbClr val="CBD5E1"/>
-                </a:solidFill>
-              </a:defRPr>
-            </a:pPr>
-            <a:r>
-              <a:t>- State management via React Context avoiding prop-drilling</a:t>
-            </a:r>
-          </a:p>
-        </p:txBody>
-      </p:sp>
-      <p:sp>
-        <p:nvSpPr>
-          <p:cNvPr id="11" name="Rounded Rectangle 10"/>
+              <a:t>ATOMIC BATCH INGESTION LATENCY</a:t>
+            </a:r>
+          </a:p>
+        </p:txBody>
+      </p:sp>
+      <p:sp>
+        <p:nvSpPr>
+          <p:cNvPr id="16" name="Rounded Rectangle 15"/>
           <p:cNvSpPr/>
           <p:nvPr/>
         </p:nvSpPr>
         <p:spPr>
           <a:xfrm>
-            <a:off x="4389120" y="1371600"/>
-            <a:ext cx="3413455" cy="2468880"/>
+            <a:off x="4389120" y="5623560"/>
+            <a:ext cx="3413455" cy="658368"/>
           </a:xfrm>
           <a:prstGeom prst="roundRect">
             <a:avLst>
-              <a:gd name="adj" fmla="val 4000"/>
-            </a:avLst>
-          </a:prstGeom>
-          <a:solidFill>
-            <a:srgbClr val="151E2E"/>
-          </a:solidFill>
-          <a:ln w="15240">
-            <a:solidFill>
-              <a:srgbClr val="60A5FA"/>
-            </a:solidFill>
-          </a:ln>
-        </p:spPr>
-        <p:style>
-          <a:lnRef idx="1">
-            <a:schemeClr val="accent1"/>
-          </a:lnRef>
-          <a:fillRef idx="3">
-            <a:schemeClr val="accent1"/>
-          </a:fillRef>
-          <a:effectRef idx="2">
-            <a:schemeClr val="accent1"/>
-          </a:effectRef>
-          <a:fontRef idx="minor">
-            <a:schemeClr val="lt1"/>
-          </a:fontRef>
-        </p:style>
-        <p:txBody>
-          <a:bodyPr rtlCol="0" anchor="ctr"/>
-          <a:lstStyle/>
-          <a:p>
-            <a:pPr algn="ctr"/>
-          </a:p>
-        </p:txBody>
-      </p:sp>
-      <p:sp>
-        <p:nvSpPr>
-          <p:cNvPr id="12" name="TextBox 11"/>
-          <p:cNvSpPr txBox="1"/>
-          <p:nvPr/>
-        </p:nvSpPr>
-        <p:spPr>
-          <a:xfrm>
-            <a:off x="4645152" y="1554480"/>
-            <a:ext cx="2901391" cy="384048"/>
-          </a:xfrm>
-          <a:prstGeom prst="rect">
-            <a:avLst/>
-          </a:prstGeom>
-          <a:noFill/>
-        </p:spPr>
-        <p:txBody>
-          <a:bodyPr wrap="square" lIns="0" tIns="0" rIns="0" bIns="0">
-            <a:spAutoFit/>
-          </a:bodyPr>
-          <a:lstStyle/>
-          <a:p>
-            <a:r>
-              <a:rPr sz="1200" b="1">
-                <a:solidFill>
-                  <a:srgbClr val="60A5FA"/>
-                </a:solidFill>
-              </a:rPr>
-              <a:t>[o] </a:t>
-            </a:r>
-            <a:r>
-              <a:rPr sz="1400" b="1">
-                <a:solidFill>
-                  <a:srgbClr val="FFFFFF"/>
-                </a:solidFill>
-              </a:rPr>
-              <a:t>Tier 2: Application API Layer</a:t>
-            </a:r>
-          </a:p>
-        </p:txBody>
-      </p:sp>
-      <p:sp>
-        <p:nvSpPr>
-          <p:cNvPr id="13" name="TextBox 12"/>
-          <p:cNvSpPr txBox="1"/>
-          <p:nvPr/>
-        </p:nvSpPr>
-        <p:spPr>
-          <a:xfrm>
-            <a:off x="4617720" y="1783080"/>
-            <a:ext cx="2971800" cy="1965960"/>
-          </a:xfrm>
-          <a:prstGeom prst="rect">
-            <a:avLst/>
-          </a:prstGeom>
-          <a:noFill/>
-        </p:spPr>
-        <p:txBody>
-          <a:bodyPr wrap="square">
-            <a:spAutoFit/>
-          </a:bodyPr>
-          <a:lstStyle/>
-          <a:p>
-            <a:pPr>
-              <a:spcAft>
-                <a:spcPts val="600"/>
-              </a:spcAft>
-              <a:defRPr sz="1000" b="1">
-                <a:solidFill>
-                  <a:srgbClr val="60A5FA"/>
-                </a:solidFill>
-              </a:defRPr>
-            </a:pPr>
-            <a:r>
-              <a:t>Node.js 20 LTS + Express.js 4.x</a:t>
-            </a:r>
-          </a:p>
-          <a:p>
-            <a:pPr>
-              <a:spcAft>
-                <a:spcPts val="400"/>
-              </a:spcAft>
-              <a:defRPr sz="1000">
-                <a:solidFill>
-                  <a:srgbClr val="CBD5E1"/>
-                </a:solidFill>
-              </a:defRPr>
-            </a:pPr>
-            <a:r>
-              <a:t>- Stateless RESTful API gateway on port 5000</a:t>
-            </a:r>
-          </a:p>
-          <a:p>
-            <a:pPr>
-              <a:spcAft>
-                <a:spcPts val="400"/>
-              </a:spcAft>
-              <a:defRPr sz="1000">
-                <a:solidFill>
-                  <a:srgbClr val="CBD5E1"/>
-                </a:solidFill>
-              </a:defRPr>
-            </a:pPr>
-            <a:r>
-              <a:t>- Cryptographic JWT signature verification middleware</a:t>
-            </a:r>
-          </a:p>
-          <a:p>
-            <a:pPr>
-              <a:spcAft>
-                <a:spcPts val="400"/>
-              </a:spcAft>
-              <a:defRPr sz="1000">
-                <a:solidFill>
-                  <a:srgbClr val="CBD5E1"/>
-                </a:solidFill>
-              </a:defRPr>
-            </a:pPr>
-            <a:r>
-              <a:t>- Role-Based Access Control (Admin, Faculty, Student)</a:t>
-            </a:r>
-          </a:p>
-          <a:p>
-            <a:pPr>
-              <a:spcAft>
-                <a:spcPts val="400"/>
-              </a:spcAft>
-              <a:defRPr sz="1000">
-                <a:solidFill>
-                  <a:srgbClr val="CBD5E1"/>
-                </a:solidFill>
-              </a:defRPr>
-            </a:pPr>
-            <a:r>
-              <a:t>- Mongoose ODM schema validation and atomic batch compiler</a:t>
-            </a:r>
-          </a:p>
-        </p:txBody>
-      </p:sp>
-      <p:sp>
-        <p:nvSpPr>
-          <p:cNvPr id="14" name="Rounded Rectangle 13"/>
-          <p:cNvSpPr/>
-          <p:nvPr/>
-        </p:nvSpPr>
-        <p:spPr>
-          <a:xfrm>
-            <a:off x="8046720" y="1371600"/>
-            <a:ext cx="3413455" cy="2468880"/>
-          </a:xfrm>
-          <a:prstGeom prst="roundRect">
-            <a:avLst>
-              <a:gd name="adj" fmla="val 4000"/>
+              <a:gd name="adj" fmla="val 15000"/>
             </a:avLst>
           </a:prstGeom>
           <a:solidFill>
@@ -6266,14 +6720,14 @@
       </p:sp>
       <p:sp>
         <p:nvSpPr>
-          <p:cNvPr id="15" name="TextBox 14"/>
+          <p:cNvPr id="17" name="TextBox 16"/>
           <p:cNvSpPr txBox="1"/>
           <p:nvPr/>
         </p:nvSpPr>
         <p:spPr>
           <a:xfrm>
-            <a:off x="8302752" y="1554480"/>
-            <a:ext cx="2901391" cy="384048"/>
+            <a:off x="4572000" y="5669280"/>
+            <a:ext cx="3047695" cy="566928"/>
           </a:xfrm>
           <a:prstGeom prst="rect">
             <a:avLst/>
@@ -6281,142 +6735,53 @@
           <a:noFill/>
         </p:spPr>
         <p:txBody>
-          <a:bodyPr wrap="square" lIns="0" tIns="0" rIns="0" bIns="0">
+          <a:bodyPr wrap="none">
             <a:spAutoFit/>
           </a:bodyPr>
           <a:lstStyle/>
           <a:p>
-            <a:r>
-              <a:rPr sz="1200" b="1">
+            <a:pPr>
+              <a:spcAft>
+                <a:spcPts val="100"/>
+              </a:spcAft>
+              <a:defRPr sz="1400" b="1">
                 <a:solidFill>
                   <a:srgbClr val="34D399"/>
                 </a:solidFill>
-              </a:rPr>
-              <a:t>[o] </a:t>
-            </a:r>
-            <a:r>
-              <a:rPr sz="1400" b="1">
-                <a:solidFill>
-                  <a:srgbClr val="FFFFFF"/>
-                </a:solidFill>
-              </a:rPr>
-              <a:t>Tier 3: Persistence Layer</a:t>
-            </a:r>
-          </a:p>
-        </p:txBody>
-      </p:sp>
-      <p:sp>
-        <p:nvSpPr>
-          <p:cNvPr id="16" name="TextBox 15"/>
-          <p:cNvSpPr txBox="1"/>
-          <p:nvPr/>
-        </p:nvSpPr>
-        <p:spPr>
-          <a:xfrm>
-            <a:off x="8275320" y="1783080"/>
-            <a:ext cx="2971800" cy="1965960"/>
-          </a:xfrm>
-          <a:prstGeom prst="rect">
-            <a:avLst/>
-          </a:prstGeom>
-          <a:noFill/>
-        </p:spPr>
-        <p:txBody>
-          <a:bodyPr wrap="square">
-            <a:spAutoFit/>
-          </a:bodyPr>
-          <a:lstStyle/>
-          <a:p>
-            <a:pPr>
-              <a:spcAft>
-                <a:spcPts val="600"/>
-              </a:spcAft>
-              <a:defRPr sz="1000" b="1">
-                <a:solidFill>
-                  <a:srgbClr val="34D399"/>
-                </a:solidFill>
               </a:defRPr>
             </a:pPr>
             <a:r>
-              <a:t>MongoDB 7.x Community Server</a:t>
-            </a:r>
-          </a:p>
-          <a:p>
-            <a:pPr>
-              <a:spcAft>
-                <a:spcPts val="400"/>
-              </a:spcAft>
-              <a:defRPr sz="1000">
-                <a:solidFill>
-                  <a:srgbClr val="CBD5E1"/>
+              <a:t>100%</a:t>
+            </a:r>
+          </a:p>
+          <a:p>
+            <a:pPr>
+              <a:defRPr sz="850" b="1">
+                <a:solidFill>
+                  <a:srgbClr val="94A3B8"/>
                 </a:solidFill>
               </a:defRPr>
             </a:pPr>
             <a:r>
-              <a:t>- WiredTiger high-concurrency document storage engine</a:t>
-            </a:r>
-          </a:p>
-          <a:p>
-            <a:pPr>
-              <a:spcAft>
-                <a:spcPts val="400"/>
-              </a:spcAft>
-              <a:defRPr sz="1000">
-                <a:solidFill>
-                  <a:srgbClr val="CBD5E1"/>
-                </a:solidFill>
-              </a:defRPr>
-            </a:pPr>
-            <a:r>
-              <a:t>- Compound B-Tree index traversal with Snappy compression</a:t>
-            </a:r>
-          </a:p>
-          <a:p>
-            <a:pPr>
-              <a:spcAft>
-                <a:spcPts val="400"/>
-              </a:spcAft>
-              <a:defRPr sz="1000">
-                <a:solidFill>
-                  <a:srgbClr val="CBD5E1"/>
-                </a:solidFill>
-              </a:defRPr>
-            </a:pPr>
-            <a:r>
-              <a:t>- Native multi-stage aggregation pipelines in database RAM</a:t>
-            </a:r>
-          </a:p>
-          <a:p>
-            <a:pPr>
-              <a:spcAft>
-                <a:spcPts val="400"/>
-              </a:spcAft>
-              <a:defRPr sz="1000">
-                <a:solidFill>
-                  <a:srgbClr val="CBD5E1"/>
-                </a:solidFill>
-              </a:defRPr>
-            </a:pPr>
-            <a:r>
-              <a:t>- Document-level write locking eliminating table contention</a:t>
-            </a:r>
-          </a:p>
-        </p:txBody>
-      </p:sp>
-      <p:sp>
-        <p:nvSpPr>
-          <p:cNvPr id="17" name="Rounded Rectangle 16"/>
+              <a:t>IDEMPOTENT &amp; ZERO DUPLICATES</a:t>
+            </a:r>
+          </a:p>
+        </p:txBody>
+      </p:sp>
+      <p:sp>
+        <p:nvSpPr>
+          <p:cNvPr id="18" name="Rounded Rectangle 17"/>
           <p:cNvSpPr/>
           <p:nvPr/>
         </p:nvSpPr>
         <p:spPr>
           <a:xfrm>
-            <a:off x="731520" y="3977639"/>
-            <a:ext cx="10728655" cy="2331720"/>
+            <a:off x="8046720" y="5623560"/>
+            <a:ext cx="3413455" cy="658368"/>
           </a:xfrm>
           <a:prstGeom prst="roundRect">
             <a:avLst>
-              <a:gd name="adj" fmla="val 4000"/>
+              <a:gd name="adj" fmla="val 15000"/>
             </a:avLst>
           </a:prstGeom>
           <a:solidFill>
@@ -6452,14 +6817,14 @@
       </p:sp>
       <p:sp>
         <p:nvSpPr>
-          <p:cNvPr id="18" name="TextBox 17"/>
+          <p:cNvPr id="19" name="TextBox 18"/>
           <p:cNvSpPr txBox="1"/>
           <p:nvPr/>
         </p:nvSpPr>
         <p:spPr>
           <a:xfrm>
-            <a:off x="987552" y="4160519"/>
-            <a:ext cx="10216591" cy="384048"/>
+            <a:off x="8229600" y="5669280"/>
+            <a:ext cx="3047695" cy="566928"/>
           </a:xfrm>
           <a:prstGeom prst="rect">
             <a:avLst/>
@@ -6467,118 +6832,35 @@
           <a:noFill/>
         </p:spPr>
         <p:txBody>
-          <a:bodyPr wrap="square" lIns="0" tIns="0" rIns="0" bIns="0">
+          <a:bodyPr wrap="none">
             <a:spAutoFit/>
           </a:bodyPr>
           <a:lstStyle/>
           <a:p>
-            <a:r>
-              <a:rPr sz="1200" b="1">
+            <a:pPr>
+              <a:spcAft>
+                <a:spcPts val="100"/>
+              </a:spcAft>
+              <a:defRPr sz="1400" b="1">
                 <a:solidFill>
                   <a:srgbClr val="FBBF24"/>
                 </a:solidFill>
-              </a:rPr>
-              <a:t>[o] </a:t>
-            </a:r>
-            <a:r>
-              <a:rPr sz="1400" b="1">
-                <a:solidFill>
-                  <a:srgbClr val="FFFFFF"/>
-                </a:solidFill>
-              </a:rPr>
-              <a:t>Technical Justification: Why MongoDB over Relational RDBMS?</a:t>
-            </a:r>
-          </a:p>
-        </p:txBody>
-      </p:sp>
-      <p:sp>
-        <p:nvSpPr>
-          <p:cNvPr id="19" name="TextBox 18"/>
-          <p:cNvSpPr txBox="1"/>
-          <p:nvPr/>
-        </p:nvSpPr>
-        <p:spPr>
-          <a:xfrm>
-            <a:off x="987552" y="4407408"/>
-            <a:ext cx="10241280" cy="1783080"/>
-          </a:xfrm>
-          <a:prstGeom prst="rect">
-            <a:avLst/>
-          </a:prstGeom>
-          <a:noFill/>
-        </p:spPr>
-        <p:txBody>
-          <a:bodyPr wrap="square">
-            <a:spAutoFit/>
-          </a:bodyPr>
-          <a:lstStyle/>
-          <a:p>
-            <a:pPr>
-              <a:spcAft>
-                <a:spcPts val="600"/>
-              </a:spcAft>
-            </a:pPr>
-            <a:r>
-              <a:rPr b="1" sz="1100">
-                <a:solidFill>
-                  <a:srgbClr val="FBBF24"/>
-                </a:solidFill>
-              </a:rPr>
-              <a:t>- Zero Object-Relational Impedance Mismatch: </a:t>
-            </a:r>
-            <a:r>
-              <a:rPr sz="1050">
-                <a:solidFill>
-                  <a:srgbClr val="CBD5E1"/>
-                </a:solidFill>
-              </a:rPr>
-              <a:t>In full-stack JavaScript architectures, data naturally exists as JSON trees. Relational databases force developers to decompose objects across normalized tables and reconstruct them via expensive multi-table SQL joins. MongoDB natively stores and returns BSON/JSON, eliminating mapping overhead.</a:t>
-            </a:r>
-          </a:p>
-          <a:p>
-            <a:pPr>
-              <a:spcAft>
-                <a:spcPts val="600"/>
-              </a:spcAft>
-            </a:pPr>
-            <a:r>
-              <a:rPr b="1" sz="1100">
-                <a:solidFill>
-                  <a:srgbClr val="FBBF24"/>
-                </a:solidFill>
-              </a:rPr>
-              <a:t>- Document-Level Concurrency for Write-Heavy Bursts: </a:t>
-            </a:r>
-            <a:r>
-              <a:rPr sz="1050">
-                <a:solidFill>
-                  <a:srgbClr val="CBD5E1"/>
-                </a:solidFill>
-              </a:rPr>
-              <a:t>Academic attendance creates severe write spikes at class changeovers. Traditional RDBMS table or page locks create major queue delays. MongoDB's WiredTiger storage engine utilizes document-level locking, ensuring that concurrent submissions across different classes never block each other.</a:t>
-            </a:r>
-          </a:p>
-          <a:p>
-            <a:pPr>
-              <a:spcAft>
-                <a:spcPts val="600"/>
-              </a:spcAft>
-            </a:pPr>
-            <a:r>
-              <a:rPr b="1" sz="1100">
-                <a:solidFill>
-                  <a:srgbClr val="FBBF24"/>
-                </a:solidFill>
-              </a:rPr>
-              <a:t>- Declarative In-Engine Multi-Stage Aggregations: </a:t>
-            </a:r>
-            <a:r>
-              <a:rPr sz="1050">
-                <a:solidFill>
-                  <a:srgbClr val="CBD5E1"/>
-                </a:solidFill>
-              </a:rPr>
-              <a:t>Computing institutional metrics (e.g., student attendance percentage, defaulter warnings, monthly trends) in SQL requires complex nested subqueries. MongoDB's aggregation pipeline processes data as a clean stream executed directly in database RAM with zero ETL delay.</a:t>
+              </a:defRPr>
+            </a:pPr>
+            <a:r>
+              <a:t>REAL-TIME</a:t>
+            </a:r>
+          </a:p>
+          <a:p>
+            <a:pPr>
+              <a:defRPr sz="850" b="1">
+                <a:solidFill>
+                  <a:srgbClr val="94A3B8"/>
+                </a:solidFill>
+              </a:defRPr>
+            </a:pPr>
+            <a:r>
+              <a:t>SCHOOLLOG-GRADE EARLY WARNINGS</a:t>
             </a:r>
           </a:p>
         </p:txBody>
@@ -6729,7 +7011,7 @@
               </a:defRPr>
             </a:pPr>
             <a:r>
-              <a:t>Relational Modeling in NoSQL: Data Modeling &amp; Schemas</a:t>
+              <a:t>NoSQL Database Selection &amp; 6 Collections Schema Architecture</a:t>
             </a:r>
           </a:p>
         </p:txBody>
@@ -6865,7 +7147,7 @@
               </a:defRPr>
             </a:pPr>
             <a:r>
-              <a:t>SAMS - Enterprise Student Attendance Management System   |   Abhishek VS &amp; Ayush Naugariya   |   Slide 04 of 10</a:t>
+              <a:t>SAMS - Enterprise Student Attendance Management System   |   Abhishek VS (24BCE0404) &amp; Ayush Naugariya (24BDS0076)   |   Slot D2   |   Slide 04 of 10</a:t>
             </a:r>
           </a:p>
         </p:txBody>
@@ -6925,8 +7207,8 @@
         </p:nvSpPr>
         <p:spPr>
           <a:xfrm>
-            <a:off x="987552" y="1554480"/>
-            <a:ext cx="4700016" cy="384048"/>
+            <a:off x="960120" y="1536192"/>
+            <a:ext cx="4754880" cy="347472"/>
           </a:xfrm>
           <a:prstGeom prst="rect">
             <a:avLst/>
@@ -6948,7 +7230,7 @@
               <a:t>[o] </a:t>
             </a:r>
             <a:r>
-              <a:rPr sz="1400" b="1">
+              <a:rPr sz="1300" b="1">
                 <a:solidFill>
                   <a:srgbClr val="FFFFFF"/>
                 </a:solidFill>
@@ -6966,8 +7248,8 @@
         </p:nvSpPr>
         <p:spPr>
           <a:xfrm>
-            <a:off x="987552" y="1828800"/>
-            <a:ext cx="4700016" cy="4343400"/>
+            <a:off x="987552" y="1783080"/>
+            <a:ext cx="4700016" cy="3886200"/>
           </a:xfrm>
           <a:prstGeom prst="rect">
             <a:avLst/>
@@ -6982,11 +7264,11 @@
           <a:p>
             <a:pPr>
               <a:spcAft>
-                <a:spcPts val="800"/>
+                <a:spcPts val="600"/>
               </a:spcAft>
             </a:pPr>
             <a:r>
-              <a:rPr b="1" sz="1100">
+              <a:rPr b="1" sz="1050">
                 <a:solidFill>
                   <a:srgbClr val="38BDF8"/>
                 </a:solidFill>
@@ -6994,22 +7276,22 @@
               <a:t>- users Collection: </a:t>
             </a:r>
             <a:r>
-              <a:rPr sz="1050">
+              <a:rPr sz="980">
                 <a:solidFill>
                   <a:srgbClr val="CBD5E1"/>
                 </a:solidFill>
               </a:rPr>
-              <a:t>name, email (unique), password (Bcrypt 10-round hash), role ('admin' | 'faculty' | 'student'), createdAt. Handles identity, authentication, and RBAC enforcement.</a:t>
+              <a:t>name, email (unique), password (Bcrypt 10 rounds), role ('admin' | 'faculty' | 'student'), createdAt. Handles authentication and RBAC enforcement.</a:t>
             </a:r>
           </a:p>
           <a:p>
             <a:pPr>
               <a:spcAft>
-                <a:spcPts val="800"/>
+                <a:spcPts val="600"/>
               </a:spcAft>
             </a:pPr>
             <a:r>
-              <a:rPr b="1" sz="1100">
+              <a:rPr b="1" sz="1050">
                 <a:solidFill>
                   <a:srgbClr val="38BDF8"/>
                 </a:solidFill>
@@ -7017,7 +7299,7 @@
               <a:t>- students Collection: </a:t>
             </a:r>
             <a:r>
-              <a:rPr sz="1050">
+              <a:rPr sz="980">
                 <a:solidFill>
                   <a:srgbClr val="CBD5E1"/>
                 </a:solidFill>
@@ -7028,11 +7310,11 @@
           <a:p>
             <a:pPr>
               <a:spcAft>
-                <a:spcPts val="800"/>
+                <a:spcPts val="600"/>
               </a:spcAft>
             </a:pPr>
             <a:r>
-              <a:rPr b="1" sz="1100">
+              <a:rPr b="1" sz="1050">
                 <a:solidFill>
                   <a:srgbClr val="38BDF8"/>
                 </a:solidFill>
@@ -7040,7 +7322,7 @@
               <a:t>- faculties Collection: </a:t>
             </a:r>
             <a:r>
-              <a:rPr sz="1050">
+              <a:rPr sz="980">
                 <a:solidFill>
                   <a:srgbClr val="CBD5E1"/>
                 </a:solidFill>
@@ -7051,11 +7333,11 @@
           <a:p>
             <a:pPr>
               <a:spcAft>
-                <a:spcPts val="800"/>
+                <a:spcPts val="600"/>
               </a:spcAft>
             </a:pPr>
             <a:r>
-              <a:rPr b="1" sz="1100">
+              <a:rPr b="1" sz="1050">
                 <a:solidFill>
                   <a:srgbClr val="38BDF8"/>
                 </a:solidFill>
@@ -7063,22 +7345,22 @@
               <a:t>- subjects Collection: </a:t>
             </a:r>
             <a:r>
-              <a:rPr sz="1050">
+              <a:rPr sz="980">
                 <a:solidFill>
                   <a:srgbClr val="CBD5E1"/>
                 </a:solidFill>
               </a:rPr>
-              <a:t>subjectCode (unique), subjectName, facultyId (ref: Faculty), semester, credits. Defines curriculum catalog and faculty instructor assignment.</a:t>
+              <a:t>subjectCode (unique), subjectName, facultyId (ref: Faculty), semester, credits. Defines curriculum catalog and faculty assignment.</a:t>
             </a:r>
           </a:p>
           <a:p>
             <a:pPr>
               <a:spcAft>
-                <a:spcPts val="800"/>
+                <a:spcPts val="600"/>
               </a:spcAft>
             </a:pPr>
             <a:r>
-              <a:rPr b="1" sz="1100">
+              <a:rPr b="1" sz="1050">
                 <a:solidFill>
                   <a:srgbClr val="38BDF8"/>
                 </a:solidFill>
@@ -7086,7 +7368,7 @@
               <a:t>- classes Collection: </a:t>
             </a:r>
             <a:r>
-              <a:rPr sz="1050">
+              <a:rPr sz="980">
                 <a:solidFill>
                   <a:srgbClr val="CBD5E1"/>
                 </a:solidFill>
@@ -7097,11 +7379,11 @@
           <a:p>
             <a:pPr>
               <a:spcAft>
-                <a:spcPts val="800"/>
+                <a:spcPts val="600"/>
               </a:spcAft>
             </a:pPr>
             <a:r>
-              <a:rPr b="1" sz="1100">
+              <a:rPr b="1" sz="1050">
                 <a:solidFill>
                   <a:srgbClr val="38BDF8"/>
                 </a:solidFill>
@@ -7109,7 +7391,7 @@
               <a:t>- attendances Collection: </a:t>
             </a:r>
             <a:r>
-              <a:rPr sz="1050">
+              <a:rPr sz="980">
                 <a:solidFill>
                   <a:srgbClr val="CBD5E1"/>
                 </a:solidFill>
@@ -7122,6 +7404,62 @@
       <p:sp>
         <p:nvSpPr>
           <p:cNvPr id="11" name="Rounded Rectangle 10"/>
+          <p:cNvSpPr/>
+          <p:nvPr/>
+        </p:nvSpPr>
+        <p:spPr>
+          <a:xfrm>
+            <a:off x="987552" y="5760720"/>
+            <a:ext cx="4700016" cy="384048"/>
+          </a:xfrm>
+          <a:prstGeom prst="roundRect">
+            <a:avLst>
+              <a:gd name="adj" fmla="val 12000"/>
+            </a:avLst>
+          </a:prstGeom>
+          <a:solidFill>
+            <a:srgbClr val="1C273A"/>
+          </a:solidFill>
+          <a:ln w="12700">
+            <a:solidFill>
+              <a:srgbClr val="38BDF8"/>
+            </a:solidFill>
+          </a:ln>
+        </p:spPr>
+        <p:style>
+          <a:lnRef idx="1">
+            <a:schemeClr val="accent1"/>
+          </a:lnRef>
+          <a:fillRef idx="3">
+            <a:schemeClr val="accent1"/>
+          </a:fillRef>
+          <a:effectRef idx="2">
+            <a:schemeClr val="accent1"/>
+          </a:effectRef>
+          <a:fontRef idx="minor">
+            <a:schemeClr val="lt1"/>
+          </a:fontRef>
+        </p:style>
+        <p:txBody>
+          <a:bodyPr rtlCol="0" anchor="ctr" wrap="square" lIns="109728" rIns="109728" tIns="0" bIns="0"/>
+          <a:lstStyle/>
+          <a:p>
+            <a:pPr algn="ctr">
+              <a:defRPr sz="880" b="1">
+                <a:solidFill>
+                  <a:srgbClr val="38BDF8"/>
+                </a:solidFill>
+              </a:defRPr>
+            </a:pPr>
+            <a:r>
+              <a:t>DATA INTEGRITY: Strict Mongoose ODM validation + 6 unique compound indexes across all collections.</a:t>
+            </a:r>
+          </a:p>
+        </p:txBody>
+      </p:sp>
+      <p:sp>
+        <p:nvSpPr>
+          <p:cNvPr id="12" name="Rounded Rectangle 11"/>
           <p:cNvSpPr/>
           <p:nvPr/>
         </p:nvSpPr>
@@ -7168,14 +7506,14 @@
       </p:sp>
       <p:sp>
         <p:nvSpPr>
-          <p:cNvPr id="12" name="TextBox 11"/>
+          <p:cNvPr id="13" name="TextBox 12"/>
           <p:cNvSpPr txBox="1"/>
           <p:nvPr/>
         </p:nvSpPr>
         <p:spPr>
           <a:xfrm>
-            <a:off x="6473952" y="1554480"/>
-            <a:ext cx="4700016" cy="384048"/>
+            <a:off x="6446520" y="1536192"/>
+            <a:ext cx="4754880" cy="347472"/>
           </a:xfrm>
           <a:prstGeom prst="rect">
             <a:avLst/>
@@ -7197,7 +7535,7 @@
               <a:t>[o] </a:t>
             </a:r>
             <a:r>
-              <a:rPr sz="1400" b="1">
+              <a:rPr sz="1300" b="1">
                 <a:solidFill>
                   <a:srgbClr val="FFFFFF"/>
                 </a:solidFill>
@@ -7209,14 +7547,14 @@
       </p:sp>
       <p:sp>
         <p:nvSpPr>
-          <p:cNvPr id="13" name="TextBox 12"/>
+          <p:cNvPr id="14" name="TextBox 13"/>
           <p:cNvSpPr txBox="1"/>
           <p:nvPr/>
         </p:nvSpPr>
         <p:spPr>
           <a:xfrm>
-            <a:off x="6473952" y="1828800"/>
-            <a:ext cx="4700016" cy="4343400"/>
+            <a:off x="6473952" y="1783080"/>
+            <a:ext cx="4700016" cy="3886200"/>
           </a:xfrm>
           <a:prstGeom prst="rect">
             <a:avLst/>
@@ -7231,131 +7569,187 @@
           <a:p>
             <a:pPr>
               <a:spcAft>
+                <a:spcPts val="500"/>
+              </a:spcAft>
+              <a:defRPr sz="1050" b="1">
+                <a:solidFill>
+                  <a:srgbClr val="FBBF24"/>
+                </a:solidFill>
+              </a:defRPr>
+            </a:pPr>
+            <a:r>
+              <a:t>MATHEMATICAL PROOF: AVOIDING THE 16MB BSON LIMIT</a:t>
+            </a:r>
+          </a:p>
+          <a:p>
+            <a:pPr>
+              <a:spcAft>
                 <a:spcPts val="600"/>
               </a:spcAft>
-              <a:defRPr sz="1100" b="1">
+            </a:pPr>
+            <a:r>
+              <a:rPr b="1" sz="1050">
+                <a:solidFill>
+                  <a:srgbClr val="FFFFFF"/>
+                </a:solidFill>
+              </a:rPr>
+              <a:t>- The 16MB Document Boundary: </a:t>
+            </a:r>
+            <a:r>
+              <a:rPr sz="980">
+                <a:solidFill>
+                  <a:srgbClr val="CBD5E1"/>
+                </a:solidFill>
+              </a:rPr>
+              <a:t>MongoDB enforces a strict hard ceiling of 16MB per individual document. Embedding attendance records inside the student document creates an unbounded array problem.</a:t>
+            </a:r>
+          </a:p>
+          <a:p>
+            <a:pPr>
+              <a:spcAft>
+                <a:spcPts val="600"/>
+              </a:spcAft>
+            </a:pPr>
+            <a:r>
+              <a:rPr b="1" sz="1050">
+                <a:solidFill>
+                  <a:srgbClr val="FFFFFF"/>
+                </a:solidFill>
+              </a:rPr>
+              <a:t>- Growth Over Time: </a:t>
+            </a:r>
+            <a:r>
+              <a:rPr sz="980">
+                <a:solidFill>
+                  <a:srgbClr val="CBD5E1"/>
+                </a:solidFill>
+              </a:rPr>
+              <a:t>A 4-year degree consists of 8 semesters x 6 subjects = 48 subjects. With ~45 sessions per subject, each student accumulates over 2,160 attendance events (~540KB unbounded data).</a:t>
+            </a:r>
+          </a:p>
+          <a:p>
+            <a:pPr>
+              <a:spcAft>
+                <a:spcPts val="600"/>
+              </a:spcAft>
+            </a:pPr>
+            <a:r>
+              <a:rPr b="1" sz="1050">
+                <a:solidFill>
+                  <a:srgbClr val="FFFFFF"/>
+                </a:solidFill>
+              </a:rPr>
+              <a:t>- Document Relocation on Disk: </a:t>
+            </a:r>
+            <a:r>
+              <a:rPr sz="980">
+                <a:solidFill>
+                  <a:srgbClr val="CBD5E1"/>
+                </a:solidFill>
+              </a:rPr>
+              <a:t>In WiredTiger, continuously growing embedded arrays cause documents to exceed pre-allocated disk space, triggering expensive document relocations and memory bloat.</a:t>
+            </a:r>
+          </a:p>
+          <a:p>
+            <a:pPr>
+              <a:spcAft>
+                <a:spcPts val="600"/>
+              </a:spcAft>
+            </a:pPr>
+            <a:r>
+              <a:rPr b="1" sz="1050">
+                <a:solidFill>
+                  <a:srgbClr val="FFFFFF"/>
+                </a:solidFill>
+              </a:rPr>
+              <a:t>- The Normalized Referencing Solution: </a:t>
+            </a:r>
+            <a:r>
+              <a:rPr sz="980">
+                <a:solidFill>
+                  <a:srgbClr val="CBD5E1"/>
+                </a:solidFill>
+              </a:rPr>
+              <a:t>Storing attendance as individual documents linked via 12-byte ObjectId foreign keys keeps documents lightweight (~150 bytes), guarantees linear disk allocation, and scales horizontally.</a:t>
+            </a:r>
+          </a:p>
+          <a:p>
+            <a:pPr>
+              <a:spcAft>
+                <a:spcPts val="600"/>
+              </a:spcAft>
+            </a:pPr>
+            <a:r>
+              <a:rPr b="1" sz="1050">
+                <a:solidFill>
+                  <a:srgbClr val="FFFFFF"/>
+                </a:solidFill>
+              </a:rPr>
+              <a:t>- Multi-Dimensional Query Efficiency: </a:t>
+            </a:r>
+            <a:r>
+              <a:rPr sz="980">
+                <a:solidFill>
+                  <a:srgbClr val="CBD5E1"/>
+                </a:solidFill>
+              </a:rPr>
+              <a:t>Normalized records allow instant queries like 'all students absent for Subject X on Date Y' using B-Tree indexes, avoiding expensive collection-wide nested array scans.</a:t>
+            </a:r>
+          </a:p>
+        </p:txBody>
+      </p:sp>
+      <p:sp>
+        <p:nvSpPr>
+          <p:cNvPr id="15" name="Rounded Rectangle 14"/>
+          <p:cNvSpPr/>
+          <p:nvPr/>
+        </p:nvSpPr>
+        <p:spPr>
+          <a:xfrm>
+            <a:off x="6473952" y="5760720"/>
+            <a:ext cx="4700016" cy="384048"/>
+          </a:xfrm>
+          <a:prstGeom prst="roundRect">
+            <a:avLst>
+              <a:gd name="adj" fmla="val 12000"/>
+            </a:avLst>
+          </a:prstGeom>
+          <a:solidFill>
+            <a:srgbClr val="1C273A"/>
+          </a:solidFill>
+          <a:ln w="12700">
+            <a:solidFill>
+              <a:srgbClr val="FBBF24"/>
+            </a:solidFill>
+          </a:ln>
+        </p:spPr>
+        <p:style>
+          <a:lnRef idx="1">
+            <a:schemeClr val="accent1"/>
+          </a:lnRef>
+          <a:fillRef idx="3">
+            <a:schemeClr val="accent1"/>
+          </a:fillRef>
+          <a:effectRef idx="2">
+            <a:schemeClr val="accent1"/>
+          </a:effectRef>
+          <a:fontRef idx="minor">
+            <a:schemeClr val="lt1"/>
+          </a:fontRef>
+        </p:style>
+        <p:txBody>
+          <a:bodyPr rtlCol="0" anchor="ctr" wrap="square" lIns="109728" rIns="109728" tIns="0" bIns="0"/>
+          <a:lstStyle/>
+          <a:p>
+            <a:pPr algn="ctr">
+              <a:defRPr sz="880" b="1">
                 <a:solidFill>
                   <a:srgbClr val="FBBF24"/>
                 </a:solidFill>
               </a:defRPr>
             </a:pPr>
             <a:r>
-              <a:t>MATHEMATICAL PROOF: AVOIDING THE 16MB BSON LIMIT</a:t>
-            </a:r>
-          </a:p>
-          <a:p>
-            <a:pPr>
-              <a:spcAft>
-                <a:spcPts val="700"/>
-              </a:spcAft>
-            </a:pPr>
-            <a:r>
-              <a:rPr b="1" sz="1100">
-                <a:solidFill>
-                  <a:srgbClr val="FFFFFF"/>
-                </a:solidFill>
-              </a:rPr>
-              <a:t>- The 16MB Document Boundary: </a:t>
-            </a:r>
-            <a:r>
-              <a:rPr sz="1050">
-                <a:solidFill>
-                  <a:srgbClr val="CBD5E1"/>
-                </a:solidFill>
-              </a:rPr>
-              <a:t>MongoDB enforces a strict hard ceiling of 16 Megabytes per individual document. Embedding attendance records inside the student document creates an unbounded array problem.</a:t>
-            </a:r>
-          </a:p>
-          <a:p>
-            <a:pPr>
-              <a:spcAft>
-                <a:spcPts val="700"/>
-              </a:spcAft>
-            </a:pPr>
-            <a:r>
-              <a:rPr b="1" sz="1100">
-                <a:solidFill>
-                  <a:srgbClr val="FFFFFF"/>
-                </a:solidFill>
-              </a:rPr>
-              <a:t>- Growth Over Time: </a:t>
-            </a:r>
-            <a:r>
-              <a:rPr sz="1050">
-                <a:solidFill>
-                  <a:srgbClr val="CBD5E1"/>
-                </a:solidFill>
-              </a:rPr>
-              <a:t>A 4-year degree consists of 8 semesters x 6 subjects = 48 subjects. With ~45 sessions per subject, each student accumulates over 2,160 attendance events. Each event with metadata consumes ~250 bytes.</a:t>
-            </a:r>
-          </a:p>
-          <a:p>
-            <a:pPr>
-              <a:spcAft>
-                <a:spcPts val="700"/>
-              </a:spcAft>
-            </a:pPr>
-            <a:r>
-              <a:rPr b="1" sz="1100">
-                <a:solidFill>
-                  <a:srgbClr val="FFFFFF"/>
-                </a:solidFill>
-              </a:rPr>
-              <a:t>- Document Relocation on Disk: </a:t>
-            </a:r>
-            <a:r>
-              <a:rPr sz="1050">
-                <a:solidFill>
-                  <a:srgbClr val="CBD5E1"/>
-                </a:solidFill>
-              </a:rPr>
-              <a:t>In WiredTiger, continuously growing embedded arrays cause documents to exceed their pre-allocated disk space, triggering expensive document relocations, severe storage fragmentation, and memory bloat.</a:t>
-            </a:r>
-          </a:p>
-          <a:p>
-            <a:pPr>
-              <a:spcAft>
-                <a:spcPts val="700"/>
-              </a:spcAft>
-            </a:pPr>
-            <a:r>
-              <a:rPr b="1" sz="1100">
-                <a:solidFill>
-                  <a:srgbClr val="FFFFFF"/>
-                </a:solidFill>
-              </a:rPr>
-              <a:t>- The Normalized Referencing Solution: </a:t>
-            </a:r>
-            <a:r>
-              <a:rPr sz="1050">
-                <a:solidFill>
-                  <a:srgbClr val="CBD5E1"/>
-                </a:solidFill>
-              </a:rPr>
-              <a:t>Storing attendance as individual documents linked via 12-byte ObjectId foreign keys keeps documents lightweight (~150 bytes), guarantees linear disk allocation, and enables horizontal scaling over decades of historical records.</a:t>
-            </a:r>
-          </a:p>
-          <a:p>
-            <a:pPr>
-              <a:spcAft>
-                <a:spcPts val="700"/>
-              </a:spcAft>
-            </a:pPr>
-            <a:r>
-              <a:rPr b="1" sz="1100">
-                <a:solidFill>
-                  <a:srgbClr val="FFFFFF"/>
-                </a:solidFill>
-              </a:rPr>
-              <a:t>- Multi-Dimensional Query Efficiency: </a:t>
-            </a:r>
-            <a:r>
-              <a:rPr sz="1050">
-                <a:solidFill>
-                  <a:srgbClr val="CBD5E1"/>
-                </a:solidFill>
-              </a:rPr>
-              <a:t>Normalized records allow instant queries like 'all students absent for Subject X on Date Y' using B-Tree indexes, avoiding expensive collection-wide nested array scans.</a:t>
+              <a:t>STORAGE MATHEMATICS: (48 subjects x 45 sessions x 250B) = 540 KB/student unbounded vs 150B normalized reference.</a:t>
             </a:r>
           </a:p>
         </p:txBody>
@@ -7506,7 +7900,7 @@
               </a:defRPr>
             </a:pPr>
             <a:r>
-              <a:t>Data Access Layer, Ingestion Pipelines &amp; End-to-End CRUD</a:t>
+              <a:t>Full-Stack CRUD Implementation &amp; Real-World Ingestion Scale</a:t>
             </a:r>
           </a:p>
         </p:txBody>
@@ -7562,7 +7956,7 @@
               </a:defRPr>
             </a:pPr>
             <a:r>
-              <a:t>CRUD &amp; SCALE</a:t>
+              <a:t>DATA ACCESS &amp; SCALE</a:t>
             </a:r>
           </a:p>
         </p:txBody>
@@ -7642,7 +8036,7 @@
               </a:defRPr>
             </a:pPr>
             <a:r>
-              <a:t>SAMS - Enterprise Student Attendance Management System   |   Abhishek VS &amp; Ayush Naugariya   |   Slide 05 of 10</a:t>
+              <a:t>SAMS - Enterprise Student Attendance Management System   |   Abhishek VS (24BCE0404) &amp; Ayush Naugariya (24BDS0076)   |   Slot D2   |   Slide 05 of 10</a:t>
             </a:r>
           </a:p>
         </p:txBody>
@@ -7702,8 +8096,8 @@
         </p:nvSpPr>
         <p:spPr>
           <a:xfrm>
-            <a:off x="987552" y="1554480"/>
-            <a:ext cx="4700016" cy="384048"/>
+            <a:off x="960120" y="1536192"/>
+            <a:ext cx="4754880" cy="347472"/>
           </a:xfrm>
           <a:prstGeom prst="rect">
             <a:avLst/>
@@ -7725,7 +8119,7 @@
               <a:t>[o] </a:t>
             </a:r>
             <a:r>
-              <a:rPr sz="1400" b="1">
+              <a:rPr sz="1300" b="1">
                 <a:solidFill>
                   <a:srgbClr val="FFFFFF"/>
                 </a:solidFill>
@@ -7743,8 +8137,8 @@
         </p:nvSpPr>
         <p:spPr>
           <a:xfrm>
-            <a:off x="987552" y="1828800"/>
-            <a:ext cx="4700016" cy="4343400"/>
+            <a:off x="987552" y="1783080"/>
+            <a:ext cx="4700016" cy="3886200"/>
           </a:xfrm>
           <a:prstGeom prst="rect">
             <a:avLst/>
@@ -7759,11 +8153,11 @@
           <a:p>
             <a:pPr>
               <a:spcAft>
-                <a:spcPts val="900"/>
+                <a:spcPts val="700"/>
               </a:spcAft>
             </a:pPr>
             <a:r>
-              <a:rPr b="1" sz="1100">
+              <a:rPr b="1" sz="1050">
                 <a:solidFill>
                   <a:srgbClr val="38BDF8"/>
                 </a:solidFill>
@@ -7771,7 +8165,7 @@
               <a:t>- CREATE Operations (POST): </a:t>
             </a:r>
             <a:r>
-              <a:rPr sz="1050">
+              <a:rPr sz="980">
                 <a:solidFill>
                   <a:srgbClr val="CBD5E1"/>
                 </a:solidFill>
@@ -7782,11 +8176,11 @@
           <a:p>
             <a:pPr>
               <a:spcAft>
-                <a:spcPts val="900"/>
+                <a:spcPts val="700"/>
               </a:spcAft>
             </a:pPr>
             <a:r>
-              <a:rPr b="1" sz="1100">
+              <a:rPr b="1" sz="1050">
                 <a:solidFill>
                   <a:srgbClr val="38BDF8"/>
                 </a:solidFill>
@@ -7794,7 +8188,7 @@
               <a:t>- READ Operations (GET): </a:t>
             </a:r>
             <a:r>
-              <a:rPr sz="1050">
+              <a:rPr sz="980">
                 <a:solidFill>
                   <a:srgbClr val="CBD5E1"/>
                 </a:solidFill>
@@ -7805,11 +8199,11 @@
           <a:p>
             <a:pPr>
               <a:spcAft>
-                <a:spcPts val="900"/>
+                <a:spcPts val="700"/>
               </a:spcAft>
             </a:pPr>
             <a:r>
-              <a:rPr b="1" sz="1100">
+              <a:rPr b="1" sz="1050">
                 <a:solidFill>
                   <a:srgbClr val="38BDF8"/>
                 </a:solidFill>
@@ -7817,7 +8211,7 @@
               <a:t>- UPDATE Operations (PUT): </a:t>
             </a:r>
             <a:r>
-              <a:rPr sz="1050">
+              <a:rPr sz="980">
                 <a:solidFill>
                   <a:srgbClr val="CBD5E1"/>
                 </a:solidFill>
@@ -7828,11 +8222,11 @@
           <a:p>
             <a:pPr>
               <a:spcAft>
-                <a:spcPts val="900"/>
+                <a:spcPts val="700"/>
               </a:spcAft>
             </a:pPr>
             <a:r>
-              <a:rPr b="1" sz="1100">
+              <a:rPr b="1" sz="1050">
                 <a:solidFill>
                   <a:srgbClr val="38BDF8"/>
                 </a:solidFill>
@@ -7840,7 +8234,7 @@
               <a:t>- DELETE Operations (DELETE): </a:t>
             </a:r>
             <a:r>
-              <a:rPr sz="1050">
+              <a:rPr sz="980">
                 <a:solidFill>
                   <a:srgbClr val="CBD5E1"/>
                 </a:solidFill>
@@ -7851,11 +8245,11 @@
           <a:p>
             <a:pPr>
               <a:spcAft>
-                <a:spcPts val="900"/>
+                <a:spcPts val="700"/>
               </a:spcAft>
             </a:pPr>
             <a:r>
-              <a:rPr b="1" sz="1100">
+              <a:rPr b="1" sz="1050">
                 <a:solidFill>
                   <a:srgbClr val="38BDF8"/>
                 </a:solidFill>
@@ -7863,7 +8257,7 @@
               <a:t>- Schema Validation via Mongoose ODM: </a:t>
             </a:r>
             <a:r>
-              <a:rPr sz="1050">
+              <a:rPr sz="980">
                 <a:solidFill>
                   <a:srgbClr val="CBD5E1"/>
                 </a:solidFill>
@@ -7876,6 +8270,62 @@
       <p:sp>
         <p:nvSpPr>
           <p:cNvPr id="11" name="Rounded Rectangle 10"/>
+          <p:cNvSpPr/>
+          <p:nvPr/>
+        </p:nvSpPr>
+        <p:spPr>
+          <a:xfrm>
+            <a:off x="987552" y="5760720"/>
+            <a:ext cx="4700016" cy="384048"/>
+          </a:xfrm>
+          <a:prstGeom prst="roundRect">
+            <a:avLst>
+              <a:gd name="adj" fmla="val 12000"/>
+            </a:avLst>
+          </a:prstGeom>
+          <a:solidFill>
+            <a:srgbClr val="1C273A"/>
+          </a:solidFill>
+          <a:ln w="12700">
+            <a:solidFill>
+              <a:srgbClr val="38BDF8"/>
+            </a:solidFill>
+          </a:ln>
+        </p:spPr>
+        <p:style>
+          <a:lnRef idx="1">
+            <a:schemeClr val="accent1"/>
+          </a:lnRef>
+          <a:fillRef idx="3">
+            <a:schemeClr val="accent1"/>
+          </a:fillRef>
+          <a:effectRef idx="2">
+            <a:schemeClr val="accent1"/>
+          </a:effectRef>
+          <a:fontRef idx="minor">
+            <a:schemeClr val="lt1"/>
+          </a:fontRef>
+        </p:style>
+        <p:txBody>
+          <a:bodyPr rtlCol="0" anchor="ctr" wrap="square" lIns="109728" rIns="109728" tIns="0" bIns="0"/>
+          <a:lstStyle/>
+          <a:p>
+            <a:pPr algn="ctr">
+              <a:defRPr sz="880" b="1">
+                <a:solidFill>
+                  <a:srgbClr val="38BDF8"/>
+                </a:solidFill>
+              </a:defRPr>
+            </a:pPr>
+            <a:r>
+              <a:t>REST API PROTOCOL: Centralized error middleware + automatic UTC midnight timestamp normalization.</a:t>
+            </a:r>
+          </a:p>
+        </p:txBody>
+      </p:sp>
+      <p:sp>
+        <p:nvSpPr>
+          <p:cNvPr id="12" name="Rounded Rectangle 11"/>
           <p:cNvSpPr/>
           <p:nvPr/>
         </p:nvSpPr>
@@ -7922,14 +8372,14 @@
       </p:sp>
       <p:sp>
         <p:nvSpPr>
-          <p:cNvPr id="12" name="TextBox 11"/>
+          <p:cNvPr id="13" name="TextBox 12"/>
           <p:cNvSpPr txBox="1"/>
           <p:nvPr/>
         </p:nvSpPr>
         <p:spPr>
           <a:xfrm>
-            <a:off x="6473952" y="1554480"/>
-            <a:ext cx="4700016" cy="384048"/>
+            <a:off x="6446520" y="1536192"/>
+            <a:ext cx="4754880" cy="347472"/>
           </a:xfrm>
           <a:prstGeom prst="rect">
             <a:avLst/>
@@ -7951,26 +8401,26 @@
               <a:t>[o] </a:t>
             </a:r>
             <a:r>
-              <a:rPr sz="1400" b="1">
+              <a:rPr sz="1300" b="1">
                 <a:solidFill>
                   <a:srgbClr val="FFFFFF"/>
                 </a:solidFill>
               </a:rPr>
-              <a:t>Automated Data Ingestion &amp; Scale Testing</a:t>
-            </a:r>
-          </a:p>
-        </p:txBody>
-      </p:sp>
-      <p:sp>
-        <p:nvSpPr>
-          <p:cNvPr id="13" name="TextBox 12"/>
+              <a:t>Automated Ingestion, Scale &amp; Multi-Tenant Scoping</a:t>
+            </a:r>
+          </a:p>
+        </p:txBody>
+      </p:sp>
+      <p:sp>
+        <p:nvSpPr>
+          <p:cNvPr id="14" name="TextBox 13"/>
           <p:cNvSpPr txBox="1"/>
           <p:nvPr/>
         </p:nvSpPr>
         <p:spPr>
           <a:xfrm>
-            <a:off x="6473952" y="1828800"/>
-            <a:ext cx="4700016" cy="4343400"/>
+            <a:off x="6473952" y="1783080"/>
+            <a:ext cx="4700016" cy="3886200"/>
           </a:xfrm>
           <a:prstGeom prst="rect">
             <a:avLst/>
@@ -7985,19 +8435,19 @@
           <a:p>
             <a:pPr>
               <a:spcAft>
-                <a:spcPts val="900"/>
+                <a:spcPts val="700"/>
               </a:spcAft>
             </a:pPr>
             <a:r>
-              <a:rPr b="1" sz="1100">
+              <a:rPr b="1" sz="1050">
                 <a:solidFill>
                   <a:srgbClr val="34D399"/>
                 </a:solidFill>
               </a:rPr>
-              <a:t>- Automated Ingestion Script (seed.js): </a:t>
-            </a:r>
-            <a:r>
-              <a:rPr sz="1050">
+              <a:t>- Automated Ingestion Engine (seed.js): </a:t>
+            </a:r>
+            <a:r>
+              <a:rPr sz="980">
                 <a:solidFill>
                   <a:srgbClr val="CBD5E1"/>
                 </a:solidFill>
@@ -8008,11 +8458,11 @@
           <a:p>
             <a:pPr>
               <a:spcAft>
-                <a:spcPts val="900"/>
+                <a:spcPts val="700"/>
               </a:spcAft>
             </a:pPr>
             <a:r>
-              <a:rPr b="1" sz="1100">
+              <a:rPr b="1" sz="1050">
                 <a:solidFill>
                   <a:srgbClr val="34D399"/>
                 </a:solidFill>
@@ -8020,22 +8470,22 @@
               <a:t>- 2,640+ Realistic Primary Seed Records: </a:t>
             </a:r>
             <a:r>
-              <a:rPr sz="1050">
+              <a:rPr sz="980">
                 <a:solidFill>
                   <a:srgbClr val="CBD5E1"/>
                 </a:solidFill>
               </a:rPr>
-              <a:t>Generates 25 consecutive instructional days of attendance across all enrolled subjects, delivering over 2,640 primary documents - far exceeding baseline prototype volumes.</a:t>
+              <a:t>Generates 25 consecutive instructional days of attendance across all enrolled subjects, delivering over 2,640 primary documents - modeling authentic full-semester academic volume.</a:t>
             </a:r>
           </a:p>
           <a:p>
             <a:pPr>
               <a:spcAft>
-                <a:spcPts val="900"/>
+                <a:spcPts val="700"/>
               </a:spcAft>
             </a:pPr>
             <a:r>
-              <a:rPr b="1" sz="1100">
+              <a:rPr b="1" sz="1050">
                 <a:solidFill>
                   <a:srgbClr val="34D399"/>
                 </a:solidFill>
@@ -8043,7 +8493,7 @@
               <a:t>- Realistic Behavioral Cohorts: </a:t>
             </a:r>
             <a:r>
-              <a:rPr sz="1050">
+              <a:rPr sz="980">
                 <a:solidFill>
                   <a:srgbClr val="CBD5E1"/>
                 </a:solidFill>
@@ -8054,19 +8504,42 @@
           <a:p>
             <a:pPr>
               <a:spcAft>
-                <a:spcPts val="900"/>
+                <a:spcPts val="700"/>
               </a:spcAft>
             </a:pPr>
             <a:r>
-              <a:rPr b="1" sz="1100">
+              <a:rPr b="1" sz="1050">
                 <a:solidFill>
                   <a:srgbClr val="34D399"/>
                 </a:solidFill>
               </a:rPr>
+              <a:t>- 3-Tier Multi-Tenant Data Isolation: </a:t>
+            </a:r>
+            <a:r>
+              <a:rPr sz="980">
+                <a:solidFill>
+                  <a:srgbClr val="CBD5E1"/>
+                </a:solidFill>
+              </a:rPr>
+              <a:t>Students strictly isolated to personal attendance records; 4th navigation ('Analytics &amp; Reports') hidden from student UI; faculty course-scoped; admin global access.</a:t>
+            </a:r>
+          </a:p>
+          <a:p>
+            <a:pPr>
+              <a:spcAft>
+                <a:spcPts val="700"/>
+              </a:spcAft>
+            </a:pPr>
+            <a:r>
+              <a:rPr b="1" sz="1050">
+                <a:solidFill>
+                  <a:srgbClr val="34D399"/>
+                </a:solidFill>
+              </a:rPr>
               <a:t>- 52,000+ Scalability Stress Dataset: </a:t>
             </a:r>
             <a:r>
-              <a:rPr sz="1050">
+              <a:rPr sz="980">
                 <a:solidFill>
                   <a:srgbClr val="CBD5E1"/>
                 </a:solidFill>
@@ -8074,27 +8547,60 @@
               <a:t>Constructed an extended stress-testing script generating 52,000+ attendance records to empirically measure index selectivity, memory cache consumption, and execution plan transitions.</a:t>
             </a:r>
           </a:p>
-          <a:p>
-            <a:pPr>
-              <a:spcAft>
-                <a:spcPts val="900"/>
-              </a:spcAft>
-            </a:pPr>
-            <a:r>
-              <a:rPr b="1" sz="1100">
+        </p:txBody>
+      </p:sp>
+      <p:sp>
+        <p:nvSpPr>
+          <p:cNvPr id="15" name="Rounded Rectangle 14"/>
+          <p:cNvSpPr/>
+          <p:nvPr/>
+        </p:nvSpPr>
+        <p:spPr>
+          <a:xfrm>
+            <a:off x="6473952" y="5760720"/>
+            <a:ext cx="4700016" cy="384048"/>
+          </a:xfrm>
+          <a:prstGeom prst="roundRect">
+            <a:avLst>
+              <a:gd name="adj" fmla="val 12000"/>
+            </a:avLst>
+          </a:prstGeom>
+          <a:solidFill>
+            <a:srgbClr val="1C273A"/>
+          </a:solidFill>
+          <a:ln w="12700">
+            <a:solidFill>
+              <a:srgbClr val="34D399"/>
+            </a:solidFill>
+          </a:ln>
+        </p:spPr>
+        <p:style>
+          <a:lnRef idx="1">
+            <a:schemeClr val="accent1"/>
+          </a:lnRef>
+          <a:fillRef idx="3">
+            <a:schemeClr val="accent1"/>
+          </a:fillRef>
+          <a:effectRef idx="2">
+            <a:schemeClr val="accent1"/>
+          </a:effectRef>
+          <a:fontRef idx="minor">
+            <a:schemeClr val="lt1"/>
+          </a:fontRef>
+        </p:style>
+        <p:txBody>
+          <a:bodyPr rtlCol="0" anchor="ctr" wrap="square" lIns="109728" rIns="109728" tIns="0" bIns="0"/>
+          <a:lstStyle/>
+          <a:p>
+            <a:pPr algn="ctr">
+              <a:defRPr sz="880" b="1">
                 <a:solidFill>
                   <a:srgbClr val="34D399"/>
                 </a:solidFill>
-              </a:rPr>
-              <a:t>- Strict UTC Date Normalization: </a:t>
-            </a:r>
-            <a:r>
-              <a:rPr sz="1050">
-                <a:solidFill>
-                  <a:srgbClr val="CBD5E1"/>
-                </a:solidFill>
-              </a:rPr>
-              <a:t>All dates normalized via Date.UTC() at ingestion, guaranteeing consistent multi-timezone filtering and zero date-drift bugs during daily aggregation grouping.</a:t>
+              </a:defRPr>
+            </a:pPr>
+            <a:r>
+              <a:t>ROLE-BASED SECURITY: Route guards strictly enforce HTTP 403 on unauthorized student access.</a:t>
             </a:r>
           </a:p>
         </p:txBody>
@@ -8245,7 +8751,7 @@
               </a:defRPr>
             </a:pPr>
             <a:r>
-              <a:t>Atomic Bulk Operations &amp; B-Tree Index Optimization</a:t>
+              <a:t>Database Optimization — Atomic bulkWrite() &amp; Compound Indexing</a:t>
             </a:r>
           </a:p>
         </p:txBody>
@@ -8381,7 +8887,7 @@
               </a:defRPr>
             </a:pPr>
             <a:r>
-              <a:t>SAMS - Enterprise Student Attendance Management System   |   Abhishek VS &amp; Ayush Naugariya   |   Slide 06 of 10</a:t>
+              <a:t>SAMS - Enterprise Student Attendance Management System   |   Abhishek VS (24BCE0404) &amp; Ayush Naugariya (24BDS0076)   |   Slot D2   |   Slide 06 of 10</a:t>
             </a:r>
           </a:p>
         </p:txBody>
@@ -8441,8 +8947,8 @@
         </p:nvSpPr>
         <p:spPr>
           <a:xfrm>
-            <a:off x="987552" y="1554480"/>
-            <a:ext cx="4700016" cy="384048"/>
+            <a:off x="960120" y="1536192"/>
+            <a:ext cx="4754880" cy="347472"/>
           </a:xfrm>
           <a:prstGeom prst="rect">
             <a:avLst/>
@@ -8464,7 +8970,7 @@
               <a:t>[o] </a:t>
             </a:r>
             <a:r>
-              <a:rPr sz="1400" b="1">
+              <a:rPr sz="1300" b="1">
                 <a:solidFill>
                   <a:srgbClr val="FFFFFF"/>
                 </a:solidFill>
@@ -8482,8 +8988,8 @@
         </p:nvSpPr>
         <p:spPr>
           <a:xfrm>
-            <a:off x="987552" y="1828800"/>
-            <a:ext cx="4700016" cy="4343400"/>
+            <a:off x="987552" y="1783080"/>
+            <a:ext cx="4700016" cy="3886200"/>
           </a:xfrm>
           <a:prstGeom prst="rect">
             <a:avLst/>
@@ -8498,11 +9004,11 @@
           <a:p>
             <a:pPr>
               <a:spcAft>
-                <a:spcPts val="700"/>
+                <a:spcPts val="600"/>
               </a:spcAft>
             </a:pPr>
             <a:r>
-              <a:rPr b="1" sz="1100">
+              <a:rPr b="1" sz="1050">
                 <a:solidFill>
                   <a:srgbClr val="38BDF8"/>
                 </a:solidFill>
@@ -8510,7 +9016,7 @@
               <a:t>- The Loop of save() Anti-Pattern: </a:t>
             </a:r>
             <a:r>
-              <a:rPr sz="1050">
+              <a:rPr sz="980">
                 <a:solidFill>
                   <a:srgbClr val="CBD5E1"/>
                 </a:solidFill>
@@ -8521,11 +9027,11 @@
           <a:p>
             <a:pPr>
               <a:spcAft>
-                <a:spcPts val="700"/>
+                <a:spcPts val="600"/>
               </a:spcAft>
             </a:pPr>
             <a:r>
-              <a:rPr b="1" sz="1100">
+              <a:rPr b="1" sz="1050">
                 <a:solidFill>
                   <a:srgbClr val="38BDF8"/>
                 </a:solidFill>
@@ -8533,7 +9039,7 @@
               <a:t>- The bulkWrite() Architecture: </a:t>
             </a:r>
             <a:r>
-              <a:rPr sz="1050">
+              <a:rPr sz="980">
                 <a:solidFill>
                   <a:srgbClr val="CBD5E1"/>
                 </a:solidFill>
@@ -8544,11 +9050,11 @@
           <a:p>
             <a:pPr>
               <a:spcAft>
-                <a:spcPts val="700"/>
+                <a:spcPts val="600"/>
               </a:spcAft>
             </a:pPr>
             <a:r>
-              <a:rPr b="1" sz="1100">
+              <a:rPr b="1" sz="1050">
                 <a:solidFill>
                   <a:srgbClr val="38BDF8"/>
                 </a:solidFill>
@@ -8556,7 +9062,7 @@
               <a:t>- Production Code Implementation: </a:t>
             </a:r>
             <a:r>
-              <a:rPr sz="950">
+              <a:rPr sz="900">
                 <a:solidFill>
                   <a:srgbClr val="FBBF24"/>
                 </a:solidFill>
@@ -8573,11 +9079,11 @@
           <a:p>
             <a:pPr>
               <a:spcAft>
-                <a:spcPts val="700"/>
+                <a:spcPts val="600"/>
               </a:spcAft>
             </a:pPr>
             <a:r>
-              <a:rPr b="1" sz="1100">
+              <a:rPr b="1" sz="1050">
                 <a:solidFill>
                   <a:srgbClr val="38BDF8"/>
                 </a:solidFill>
@@ -8585,7 +9091,7 @@
               <a:t>- Sub-12ms Execution Latency: </a:t>
             </a:r>
             <a:r>
-              <a:rPr sz="1050">
+              <a:rPr sz="980">
                 <a:solidFill>
                   <a:srgbClr val="CBD5E1"/>
                 </a:solidFill>
@@ -8596,11 +9102,11 @@
           <a:p>
             <a:pPr>
               <a:spcAft>
-                <a:spcPts val="700"/>
+                <a:spcPts val="600"/>
               </a:spcAft>
             </a:pPr>
             <a:r>
-              <a:rPr b="1" sz="1100">
+              <a:rPr b="1" sz="1050">
                 <a:solidFill>
                   <a:srgbClr val="38BDF8"/>
                 </a:solidFill>
@@ -8608,7 +9114,7 @@
               <a:t>- Idempotency &amp; Duplicate Prevention: </a:t>
             </a:r>
             <a:r>
-              <a:rPr sz="1050">
+              <a:rPr sz="980">
                 <a:solidFill>
                   <a:srgbClr val="CBD5E1"/>
                 </a:solidFill>
@@ -8621,6 +9127,62 @@
       <p:sp>
         <p:nvSpPr>
           <p:cNvPr id="11" name="Rounded Rectangle 10"/>
+          <p:cNvSpPr/>
+          <p:nvPr/>
+        </p:nvSpPr>
+        <p:spPr>
+          <a:xfrm>
+            <a:off x="987552" y="5760720"/>
+            <a:ext cx="4700016" cy="384048"/>
+          </a:xfrm>
+          <a:prstGeom prst="roundRect">
+            <a:avLst>
+              <a:gd name="adj" fmla="val 12000"/>
+            </a:avLst>
+          </a:prstGeom>
+          <a:solidFill>
+            <a:srgbClr val="1C273A"/>
+          </a:solidFill>
+          <a:ln w="12700">
+            <a:solidFill>
+              <a:srgbClr val="38BDF8"/>
+            </a:solidFill>
+          </a:ln>
+        </p:spPr>
+        <p:style>
+          <a:lnRef idx="1">
+            <a:schemeClr val="accent1"/>
+          </a:lnRef>
+          <a:fillRef idx="3">
+            <a:schemeClr val="accent1"/>
+          </a:fillRef>
+          <a:effectRef idx="2">
+            <a:schemeClr val="accent1"/>
+          </a:effectRef>
+          <a:fontRef idx="minor">
+            <a:schemeClr val="lt1"/>
+          </a:fontRef>
+        </p:style>
+        <p:txBody>
+          <a:bodyPr rtlCol="0" anchor="ctr" wrap="square" lIns="109728" rIns="109728" tIns="0" bIns="0"/>
+          <a:lstStyle/>
+          <a:p>
+            <a:pPr algn="ctr">
+              <a:defRPr sz="880" b="1">
+                <a:solidFill>
+                  <a:srgbClr val="38BDF8"/>
+                </a:solidFill>
+              </a:defRPr>
+            </a:pPr>
+            <a:r>
+              <a:t>PERFORMANCE BENCHMARK: Over 125x faster than sequential save loops (&lt;12ms vs 1,500ms).</a:t>
+            </a:r>
+          </a:p>
+        </p:txBody>
+      </p:sp>
+      <p:sp>
+        <p:nvSpPr>
+          <p:cNvPr id="12" name="Rounded Rectangle 11"/>
           <p:cNvSpPr/>
           <p:nvPr/>
         </p:nvSpPr>
@@ -8667,14 +9229,14 @@
       </p:sp>
       <p:sp>
         <p:nvSpPr>
-          <p:cNvPr id="12" name="TextBox 11"/>
+          <p:cNvPr id="13" name="TextBox 12"/>
           <p:cNvSpPr txBox="1"/>
           <p:nvPr/>
         </p:nvSpPr>
         <p:spPr>
           <a:xfrm>
-            <a:off x="6473952" y="1554480"/>
-            <a:ext cx="4700016" cy="384048"/>
+            <a:off x="6446520" y="1536192"/>
+            <a:ext cx="4754880" cy="347472"/>
           </a:xfrm>
           <a:prstGeom prst="rect">
             <a:avLst/>
@@ -8696,7 +9258,7 @@
               <a:t>[o] </a:t>
             </a:r>
             <a:r>
-              <a:rPr sz="1400" b="1">
+              <a:rPr sz="1300" b="1">
                 <a:solidFill>
                   <a:srgbClr val="FFFFFF"/>
                 </a:solidFill>
@@ -8708,14 +9270,14 @@
       </p:sp>
       <p:sp>
         <p:nvSpPr>
-          <p:cNvPr id="13" name="TextBox 12"/>
+          <p:cNvPr id="14" name="TextBox 13"/>
           <p:cNvSpPr txBox="1"/>
           <p:nvPr/>
         </p:nvSpPr>
         <p:spPr>
           <a:xfrm>
-            <a:off x="6473952" y="1828800"/>
-            <a:ext cx="4700016" cy="1051560"/>
+            <a:off x="6473952" y="1783080"/>
+            <a:ext cx="4700016" cy="1005840"/>
           </a:xfrm>
           <a:prstGeom prst="rect">
             <a:avLst/>
@@ -8730,9 +9292,9 @@
           <a:p>
             <a:pPr>
               <a:spcAft>
-                <a:spcPts val="400"/>
+                <a:spcPts val="300"/>
               </a:spcAft>
-              <a:defRPr sz="1100" b="1">
+              <a:defRPr sz="1050" b="1">
                 <a:solidFill>
                   <a:srgbClr val="34D399"/>
                 </a:solidFill>
@@ -8744,7 +9306,7 @@
           </a:p>
           <a:p>
             <a:pPr>
-              <a:defRPr sz="1050">
+              <a:defRPr sz="980">
                 <a:solidFill>
                   <a:srgbClr val="CBD5E1"/>
                 </a:solidFill>
@@ -8758,13 +9320,13 @@
       </p:sp>
       <p:sp>
         <p:nvSpPr>
-          <p:cNvPr id="14" name="Rounded Rectangle 13"/>
+          <p:cNvPr id="15" name="Rounded Rectangle 14"/>
           <p:cNvSpPr/>
           <p:nvPr/>
         </p:nvSpPr>
         <p:spPr>
           <a:xfrm>
-            <a:off x="6473952" y="2971800"/>
+            <a:off x="6473952" y="2880360"/>
             <a:ext cx="2148840" cy="777240"/>
           </a:xfrm>
           <a:prstGeom prst="roundRect">
@@ -8805,13 +9367,13 @@
       </p:sp>
       <p:sp>
         <p:nvSpPr>
-          <p:cNvPr id="15" name="TextBox 14"/>
+          <p:cNvPr id="16" name="TextBox 15"/>
           <p:cNvSpPr txBox="1"/>
           <p:nvPr/>
         </p:nvSpPr>
         <p:spPr>
           <a:xfrm>
-            <a:off x="6583680" y="3035808"/>
+            <a:off x="6583680" y="2944368"/>
             <a:ext cx="1929384" cy="658368"/>
           </a:xfrm>
           <a:prstGeom prst="rect">
@@ -8855,13 +9417,13 @@
       </p:sp>
       <p:sp>
         <p:nvSpPr>
-          <p:cNvPr id="16" name="Rounded Rectangle 15"/>
+          <p:cNvPr id="17" name="Rounded Rectangle 16"/>
           <p:cNvSpPr/>
           <p:nvPr/>
         </p:nvSpPr>
         <p:spPr>
           <a:xfrm>
-            <a:off x="8732520" y="2971800"/>
+            <a:off x="8732520" y="2880360"/>
             <a:ext cx="2148840" cy="777240"/>
           </a:xfrm>
           <a:prstGeom prst="roundRect">
@@ -8902,13 +9464,13 @@
       </p:sp>
       <p:sp>
         <p:nvSpPr>
-          <p:cNvPr id="17" name="TextBox 16"/>
+          <p:cNvPr id="18" name="TextBox 17"/>
           <p:cNvSpPr txBox="1"/>
           <p:nvPr/>
         </p:nvSpPr>
         <p:spPr>
           <a:xfrm>
-            <a:off x="8842248" y="3035808"/>
+            <a:off x="8842248" y="2944368"/>
             <a:ext cx="1929384" cy="658368"/>
           </a:xfrm>
           <a:prstGeom prst="rect">
@@ -8952,14 +9514,14 @@
       </p:sp>
       <p:sp>
         <p:nvSpPr>
-          <p:cNvPr id="18" name="TextBox 17"/>
+          <p:cNvPr id="19" name="TextBox 18"/>
           <p:cNvSpPr txBox="1"/>
           <p:nvPr/>
         </p:nvSpPr>
         <p:spPr>
           <a:xfrm>
-            <a:off x="6473952" y="3886200"/>
-            <a:ext cx="4700016" cy="2331720"/>
+            <a:off x="6473952" y="3794760"/>
+            <a:ext cx="4700016" cy="1874519"/>
           </a:xfrm>
           <a:prstGeom prst="rect">
             <a:avLst/>
@@ -8974,9 +9536,9 @@
           <a:p>
             <a:pPr>
               <a:spcAft>
-                <a:spcPts val="600"/>
+                <a:spcPts val="400"/>
               </a:spcAft>
-              <a:defRPr sz="1100" b="1">
+              <a:defRPr sz="1050" b="1">
                 <a:solidFill>
                   <a:srgbClr val="FFFFFF"/>
                 </a:solidFill>
@@ -8989,11 +9551,11 @@
           <a:p>
             <a:pPr>
               <a:spcAft>
-                <a:spcPts val="500"/>
+                <a:spcPts val="400"/>
               </a:spcAft>
             </a:pPr>
             <a:r>
-              <a:rPr b="1" sz="1050">
+              <a:rPr b="1" sz="980">
                 <a:solidFill>
                   <a:srgbClr val="38BDF8"/>
                 </a:solidFill>
@@ -9001,7 +9563,7 @@
               <a:t>- Query Execution Plan: </a:t>
             </a:r>
             <a:r>
-              <a:rPr sz="1000">
+              <a:rPr sz="930">
                 <a:solidFill>
                   <a:srgbClr val="CBD5E1"/>
                 </a:solidFill>
@@ -9012,11 +9574,11 @@
           <a:p>
             <a:pPr>
               <a:spcAft>
-                <a:spcPts val="500"/>
+                <a:spcPts val="400"/>
               </a:spcAft>
             </a:pPr>
             <a:r>
-              <a:rPr b="1" sz="1050">
+              <a:rPr b="1" sz="980">
                 <a:solidFill>
                   <a:srgbClr val="38BDF8"/>
                 </a:solidFill>
@@ -9024,7 +9586,7 @@
               <a:t>- Total Documents Examined: </a:t>
             </a:r>
             <a:r>
-              <a:rPr sz="1000">
+              <a:rPr sz="930">
                 <a:solidFill>
                   <a:srgbClr val="CBD5E1"/>
                 </a:solidFill>
@@ -9035,11 +9597,11 @@
           <a:p>
             <a:pPr>
               <a:spcAft>
-                <a:spcPts val="500"/>
+                <a:spcPts val="400"/>
               </a:spcAft>
             </a:pPr>
             <a:r>
-              <a:rPr b="1" sz="1050">
+              <a:rPr b="1" sz="980">
                 <a:solidFill>
                   <a:srgbClr val="38BDF8"/>
                 </a:solidFill>
@@ -9047,7 +9609,7 @@
               <a:t>- Query Execution Latency: </a:t>
             </a:r>
             <a:r>
-              <a:rPr sz="1000">
+              <a:rPr sz="930">
                 <a:solidFill>
                   <a:srgbClr val="CBD5E1"/>
                 </a:solidFill>
@@ -9058,11 +9620,11 @@
           <a:p>
             <a:pPr>
               <a:spcAft>
-                <a:spcPts val="500"/>
+                <a:spcPts val="400"/>
               </a:spcAft>
             </a:pPr>
             <a:r>
-              <a:rPr b="1" sz="1050">
+              <a:rPr b="1" sz="980">
                 <a:solidFill>
                   <a:srgbClr val="38BDF8"/>
                 </a:solidFill>
@@ -9070,7 +9632,7 @@
               <a:t>- In-Memory Sort Buffers: </a:t>
             </a:r>
             <a:r>
-              <a:rPr sz="1000">
+              <a:rPr sz="930">
                 <a:solidFill>
                   <a:srgbClr val="CBD5E1"/>
                 </a:solidFill>
@@ -9081,11 +9643,11 @@
           <a:p>
             <a:pPr>
               <a:spcAft>
-                <a:spcPts val="500"/>
+                <a:spcPts val="400"/>
               </a:spcAft>
             </a:pPr>
             <a:r>
-              <a:rPr b="1" sz="1050">
+              <a:rPr b="1" sz="980">
                 <a:solidFill>
                   <a:srgbClr val="38BDF8"/>
                 </a:solidFill>
@@ -9093,12 +9655,68 @@
               <a:t>- Overall Index Catalog: </a:t>
             </a:r>
             <a:r>
-              <a:rPr sz="1000">
+              <a:rPr sz="930">
                 <a:solidFill>
                   <a:srgbClr val="CBD5E1"/>
                 </a:solidFill>
               </a:rPr>
               <a:t>6 B-Trees deployed across users, students, subjects, and attendances.</a:t>
+            </a:r>
+          </a:p>
+        </p:txBody>
+      </p:sp>
+      <p:sp>
+        <p:nvSpPr>
+          <p:cNvPr id="20" name="Rounded Rectangle 19"/>
+          <p:cNvSpPr/>
+          <p:nvPr/>
+        </p:nvSpPr>
+        <p:spPr>
+          <a:xfrm>
+            <a:off x="6473952" y="5760720"/>
+            <a:ext cx="4700016" cy="384048"/>
+          </a:xfrm>
+          <a:prstGeom prst="roundRect">
+            <a:avLst>
+              <a:gd name="adj" fmla="val 12000"/>
+            </a:avLst>
+          </a:prstGeom>
+          <a:solidFill>
+            <a:srgbClr val="1C273A"/>
+          </a:solidFill>
+          <a:ln w="12700">
+            <a:solidFill>
+              <a:srgbClr val="34D399"/>
+            </a:solidFill>
+          </a:ln>
+        </p:spPr>
+        <p:style>
+          <a:lnRef idx="1">
+            <a:schemeClr val="accent1"/>
+          </a:lnRef>
+          <a:fillRef idx="3">
+            <a:schemeClr val="accent1"/>
+          </a:fillRef>
+          <a:effectRef idx="2">
+            <a:schemeClr val="accent1"/>
+          </a:effectRef>
+          <a:fontRef idx="minor">
+            <a:schemeClr val="lt1"/>
+          </a:fontRef>
+        </p:style>
+        <p:txBody>
+          <a:bodyPr rtlCol="0" anchor="ctr" wrap="square" lIns="109728" rIns="109728" tIns="0" bIns="0"/>
+          <a:lstStyle/>
+          <a:p>
+            <a:pPr algn="ctr">
+              <a:defRPr sz="880" b="1">
+                <a:solidFill>
+                  <a:srgbClr val="34D399"/>
+                </a:solidFill>
+              </a:defRPr>
+            </a:pPr>
+            <a:r>
+              <a:t>INDEX CATALOG: 6 active B-Tree compound indexes deployed across all 6 collections.</a:t>
             </a:r>
           </a:p>
         </p:txBody>
@@ -9249,7 +9867,7 @@
               </a:defRPr>
             </a:pPr>
             <a:r>
-              <a:t>Multi-Stage Aggregation Pipelines &amp; Institutional Intelligence</a:t>
+              <a:t>Advanced Analytics — 7 Native In-Engine Aggregation Pipelines</a:t>
             </a:r>
           </a:p>
         </p:txBody>
@@ -9305,7 +9923,7 @@
               </a:defRPr>
             </a:pPr>
             <a:r>
-              <a:t>ADVANCED ANALYTICS</a:t>
+              <a:t>INSTITUTIONAL INTELLIGENCE</a:t>
             </a:r>
           </a:p>
         </p:txBody>
@@ -9385,7 +10003,7 @@
               </a:defRPr>
             </a:pPr>
             <a:r>
-              <a:t>SAMS - Enterprise Student Attendance Management System   |   Abhishek VS &amp; Ayush Naugariya   |   Slide 07 of 10</a:t>
+              <a:t>SAMS - Enterprise Student Attendance Management System   |   Abhishek VS (24BCE0404) &amp; Ayush Naugariya (24BDS0076)   |   Slot D2   |   Slide 07 of 10</a:t>
             </a:r>
           </a:p>
         </p:txBody>
@@ -9445,8 +10063,8 @@
         </p:nvSpPr>
         <p:spPr>
           <a:xfrm>
-            <a:off x="987552" y="1554480"/>
-            <a:ext cx="2901391" cy="384048"/>
+            <a:off x="960120" y="1536192"/>
+            <a:ext cx="2956255" cy="347472"/>
           </a:xfrm>
           <a:prstGeom prst="rect">
             <a:avLst/>
@@ -9468,7 +10086,7 @@
               <a:t>[o] </a:t>
             </a:r>
             <a:r>
-              <a:rPr sz="1400" b="1">
+              <a:rPr sz="1300" b="1">
                 <a:solidFill>
                   <a:srgbClr val="FFFFFF"/>
                 </a:solidFill>
@@ -9486,8 +10104,8 @@
         </p:nvSpPr>
         <p:spPr>
           <a:xfrm>
-            <a:off x="960120" y="1828800"/>
-            <a:ext cx="2956255" cy="4343400"/>
+            <a:off x="932688" y="1783080"/>
+            <a:ext cx="3008376" cy="3886200"/>
           </a:xfrm>
           <a:prstGeom prst="rect">
             <a:avLst/>
@@ -9502,26 +10120,26 @@
           <a:p>
             <a:pPr>
               <a:spcAft>
-                <a:spcPts val="800"/>
-              </a:spcAft>
-              <a:defRPr sz="950" b="1">
-                <a:solidFill>
-                  <a:srgbClr val="F43F5E"/>
-                </a:solidFill>
-              </a:defRPr>
-            </a:pPr>
-            <a:r>
-              <a:t>GET /api/analytics/low-attendance?threshold=75</a:t>
-            </a:r>
-          </a:p>
-          <a:p>
-            <a:pPr>
-              <a:spcAft>
                 <a:spcPts val="600"/>
               </a:spcAft>
-            </a:pPr>
-            <a:r>
-              <a:rPr b="1" sz="1050">
+              <a:defRPr sz="900" b="1">
+                <a:solidFill>
+                  <a:srgbClr val="F43F5E"/>
+                </a:solidFill>
+              </a:defRPr>
+            </a:pPr>
+            <a:r>
+              <a:t>GET /api/analytics/low-attendance?threshold=75</a:t>
+            </a:r>
+          </a:p>
+          <a:p>
+            <a:pPr>
+              <a:spcAft>
+                <a:spcPts val="500"/>
+              </a:spcAft>
+            </a:pPr>
+            <a:r>
+              <a:rPr b="1" sz="980">
                 <a:solidFill>
                   <a:srgbClr val="FFFFFF"/>
                 </a:solidFill>
@@ -9529,7 +10147,7 @@
               <a:t>Stage 1 ($group): </a:t>
             </a:r>
             <a:r>
-              <a:rPr sz="1000">
+              <a:rPr sz="919">
                 <a:solidFill>
                   <a:srgbClr val="CBD5E1"/>
                 </a:solidFill>
@@ -9540,108 +10158,108 @@
           <a:p>
             <a:pPr>
               <a:spcAft>
+                <a:spcPts val="500"/>
+              </a:spcAft>
+            </a:pPr>
+            <a:r>
+              <a:rPr b="1" sz="980">
+                <a:solidFill>
+                  <a:srgbClr val="FFFFFF"/>
+                </a:solidFill>
+              </a:rPr>
+              <a:t>Stage 2 ($project): </a:t>
+            </a:r>
+            <a:r>
+              <a:rPr sz="919">
+                <a:solidFill>
+                  <a:srgbClr val="CBD5E1"/>
+                </a:solidFill>
+              </a:rPr>
+              <a:t>Computes percentage using $round, $multiply, and $divide operators.</a:t>
+            </a:r>
+          </a:p>
+          <a:p>
+            <a:pPr>
+              <a:spcAft>
+                <a:spcPts val="500"/>
+              </a:spcAft>
+            </a:pPr>
+            <a:r>
+              <a:rPr b="1" sz="980">
+                <a:solidFill>
+                  <a:srgbClr val="FFFFFF"/>
+                </a:solidFill>
+              </a:rPr>
+              <a:t>Stage 3 ($match): </a:t>
+            </a:r>
+            <a:r>
+              <a:rPr sz="919">
+                <a:solidFill>
+                  <a:srgbClr val="CBD5E1"/>
+                </a:solidFill>
+              </a:rPr>
+              <a:t>Filters output documents where percentage is less than 75% threshold.</a:t>
+            </a:r>
+          </a:p>
+          <a:p>
+            <a:pPr>
+              <a:spcAft>
+                <a:spcPts val="500"/>
+              </a:spcAft>
+            </a:pPr>
+            <a:r>
+              <a:rPr b="1" sz="980">
+                <a:solidFill>
+                  <a:srgbClr val="FFFFFF"/>
+                </a:solidFill>
+              </a:rPr>
+              <a:t>Stage 4 ($lookup): </a:t>
+            </a:r>
+            <a:r>
+              <a:rPr sz="919">
+                <a:solidFill>
+                  <a:srgbClr val="CBD5E1"/>
+                </a:solidFill>
+              </a:rPr>
+              <a:t>Performs equality join with students to fetch student names and regNo.</a:t>
+            </a:r>
+          </a:p>
+          <a:p>
+            <a:pPr>
+              <a:spcAft>
+                <a:spcPts val="500"/>
+              </a:spcAft>
+            </a:pPr>
+            <a:r>
+              <a:rPr b="1" sz="980">
+                <a:solidFill>
+                  <a:srgbClr val="FFFFFF"/>
+                </a:solidFill>
+              </a:rPr>
+              <a:t>Stage 5 ($sort): </a:t>
+            </a:r>
+            <a:r>
+              <a:rPr sz="919">
+                <a:solidFill>
+                  <a:srgbClr val="CBD5E1"/>
+                </a:solidFill>
+              </a:rPr>
+              <a:t>Sorts ascending so the most critical defaulters appear at the top.</a:t>
+            </a:r>
+          </a:p>
+          <a:p>
+            <a:pPr>
+              <a:spcBef>
                 <a:spcPts val="600"/>
-              </a:spcAft>
-            </a:pPr>
-            <a:r>
-              <a:rPr b="1" sz="1050">
-                <a:solidFill>
-                  <a:srgbClr val="FFFFFF"/>
-                </a:solidFill>
-              </a:rPr>
-              <a:t>Stage 2 ($project): </a:t>
-            </a:r>
-            <a:r>
-              <a:rPr sz="1000">
-                <a:solidFill>
-                  <a:srgbClr val="CBD5E1"/>
-                </a:solidFill>
-              </a:rPr>
-              <a:t>Computes percentage using $round, $multiply, and $divide operators.</a:t>
-            </a:r>
-          </a:p>
-          <a:p>
-            <a:pPr>
-              <a:spcAft>
-                <a:spcPts val="600"/>
-              </a:spcAft>
-            </a:pPr>
-            <a:r>
-              <a:rPr b="1" sz="1050">
-                <a:solidFill>
-                  <a:srgbClr val="FFFFFF"/>
-                </a:solidFill>
-              </a:rPr>
-              <a:t>Stage 3 ($match): </a:t>
-            </a:r>
-            <a:r>
-              <a:rPr sz="1000">
-                <a:solidFill>
-                  <a:srgbClr val="CBD5E1"/>
-                </a:solidFill>
-              </a:rPr>
-              <a:t>Filters output documents where percentage is less than 75%.</a:t>
-            </a:r>
-          </a:p>
-          <a:p>
-            <a:pPr>
-              <a:spcAft>
-                <a:spcPts val="600"/>
-              </a:spcAft>
-            </a:pPr>
-            <a:r>
-              <a:rPr b="1" sz="1050">
-                <a:solidFill>
-                  <a:srgbClr val="FFFFFF"/>
-                </a:solidFill>
-              </a:rPr>
-              <a:t>Stage 4 ($lookup): </a:t>
-            </a:r>
-            <a:r>
-              <a:rPr sz="1000">
-                <a:solidFill>
-                  <a:srgbClr val="CBD5E1"/>
-                </a:solidFill>
-              </a:rPr>
-              <a:t>Performs equality join with students to fetch student names and regNo.</a:t>
-            </a:r>
-          </a:p>
-          <a:p>
-            <a:pPr>
-              <a:spcAft>
-                <a:spcPts val="600"/>
-              </a:spcAft>
-            </a:pPr>
-            <a:r>
-              <a:rPr b="1" sz="1050">
-                <a:solidFill>
-                  <a:srgbClr val="FFFFFF"/>
-                </a:solidFill>
-              </a:rPr>
-              <a:t>Stage 5 ($sort): </a:t>
-            </a:r>
-            <a:r>
-              <a:rPr sz="1000">
-                <a:solidFill>
-                  <a:srgbClr val="CBD5E1"/>
-                </a:solidFill>
-              </a:rPr>
-              <a:t>Sorts ascending so the most critical defaulters appear at the top.</a:t>
-            </a:r>
-          </a:p>
-          <a:p>
-            <a:pPr>
-              <a:spcBef>
-                <a:spcPts val="1000"/>
               </a:spcBef>
             </a:pPr>
             <a:r>
-              <a:rPr b="1" sz="1000">
+              <a:rPr b="1" sz="919">
                 <a:solidFill>
                   <a:srgbClr val="F43F5E"/>
                 </a:solidFill>
               </a:rPr>
-              <a:t>Business Impact: Replaces weeks of manual audits with an automated institutional warning list.</a:t>
+              <a:t>Impact: Replaces weeks of manual audits with an automated institutional warning list.</a:t>
             </a:r>
           </a:p>
         </p:txBody>
@@ -9649,6 +10267,62 @@
       <p:sp>
         <p:nvSpPr>
           <p:cNvPr id="11" name="Rounded Rectangle 10"/>
+          <p:cNvSpPr/>
+          <p:nvPr/>
+        </p:nvSpPr>
+        <p:spPr>
+          <a:xfrm>
+            <a:off x="896112" y="5760720"/>
+            <a:ext cx="3081528" cy="384048"/>
+          </a:xfrm>
+          <a:prstGeom prst="roundRect">
+            <a:avLst>
+              <a:gd name="adj" fmla="val 12000"/>
+            </a:avLst>
+          </a:prstGeom>
+          <a:solidFill>
+            <a:srgbClr val="1C273A"/>
+          </a:solidFill>
+          <a:ln w="12700">
+            <a:solidFill>
+              <a:srgbClr val="F43F5E"/>
+            </a:solidFill>
+          </a:ln>
+        </p:spPr>
+        <p:style>
+          <a:lnRef idx="1">
+            <a:schemeClr val="accent1"/>
+          </a:lnRef>
+          <a:fillRef idx="3">
+            <a:schemeClr val="accent1"/>
+          </a:fillRef>
+          <a:effectRef idx="2">
+            <a:schemeClr val="accent1"/>
+          </a:effectRef>
+          <a:fontRef idx="minor">
+            <a:schemeClr val="lt1"/>
+          </a:fontRef>
+        </p:style>
+        <p:txBody>
+          <a:bodyPr rtlCol="0" anchor="ctr" wrap="square" lIns="109728" rIns="109728" tIns="0" bIns="0"/>
+          <a:lstStyle/>
+          <a:p>
+            <a:pPr algn="ctr">
+              <a:defRPr sz="880" b="1">
+                <a:solidFill>
+                  <a:srgbClr val="F43F5E"/>
+                </a:solidFill>
+              </a:defRPr>
+            </a:pPr>
+            <a:r>
+              <a:t>EARLY WARNING SYSTEM: Automated real-time debarment risk identification.</a:t>
+            </a:r>
+          </a:p>
+        </p:txBody>
+      </p:sp>
+      <p:sp>
+        <p:nvSpPr>
+          <p:cNvPr id="12" name="Rounded Rectangle 11"/>
           <p:cNvSpPr/>
           <p:nvPr/>
         </p:nvSpPr>
@@ -9695,14 +10369,14 @@
       </p:sp>
       <p:sp>
         <p:nvSpPr>
-          <p:cNvPr id="12" name="TextBox 11"/>
+          <p:cNvPr id="13" name="TextBox 12"/>
           <p:cNvSpPr txBox="1"/>
           <p:nvPr/>
         </p:nvSpPr>
         <p:spPr>
           <a:xfrm>
-            <a:off x="4645152" y="1554480"/>
-            <a:ext cx="2901391" cy="384048"/>
+            <a:off x="4617720" y="1536192"/>
+            <a:ext cx="2956255" cy="347472"/>
           </a:xfrm>
           <a:prstGeom prst="rect">
             <a:avLst/>
@@ -9724,26 +10398,26 @@
               <a:t>[o] </a:t>
             </a:r>
             <a:r>
-              <a:rPr sz="1400" b="1">
+              <a:rPr sz="1300" b="1">
                 <a:solidFill>
                   <a:srgbClr val="FFFFFF"/>
                 </a:solidFill>
               </a:rPr>
-              <a:t>Pipeline 2: Course-Wise Variance</a:t>
-            </a:r>
-          </a:p>
-        </p:txBody>
-      </p:sp>
-      <p:sp>
-        <p:nvSpPr>
-          <p:cNvPr id="13" name="TextBox 12"/>
+              <a:t>Pipeline 2: Course Variance</a:t>
+            </a:r>
+          </a:p>
+        </p:txBody>
+      </p:sp>
+      <p:sp>
+        <p:nvSpPr>
+          <p:cNvPr id="14" name="TextBox 13"/>
           <p:cNvSpPr txBox="1"/>
           <p:nvPr/>
         </p:nvSpPr>
         <p:spPr>
           <a:xfrm>
-            <a:off x="4617720" y="1828800"/>
-            <a:ext cx="2956255" cy="4343400"/>
+            <a:off x="4590288" y="1783080"/>
+            <a:ext cx="3008376" cy="3886200"/>
           </a:xfrm>
           <a:prstGeom prst="rect">
             <a:avLst/>
@@ -9758,26 +10432,26 @@
           <a:p>
             <a:pPr>
               <a:spcAft>
-                <a:spcPts val="800"/>
-              </a:spcAft>
-              <a:defRPr sz="950" b="1">
-                <a:solidFill>
-                  <a:srgbClr val="38BDF8"/>
-                </a:solidFill>
-              </a:defRPr>
-            </a:pPr>
-            <a:r>
-              <a:t>GET /api/analytics/subject-percentage</a:t>
-            </a:r>
-          </a:p>
-          <a:p>
-            <a:pPr>
-              <a:spcAft>
                 <a:spcPts val="600"/>
               </a:spcAft>
-            </a:pPr>
-            <a:r>
-              <a:rPr b="1" sz="1050">
+              <a:defRPr sz="900" b="1">
+                <a:solidFill>
+                  <a:srgbClr val="38BDF8"/>
+                </a:solidFill>
+              </a:defRPr>
+            </a:pPr>
+            <a:r>
+              <a:t>GET /api/analytics/subject-percentage</a:t>
+            </a:r>
+          </a:p>
+          <a:p>
+            <a:pPr>
+              <a:spcAft>
+                <a:spcPts val="500"/>
+              </a:spcAft>
+            </a:pPr>
+            <a:r>
+              <a:rPr b="1" sz="980">
                 <a:solidFill>
                   <a:srgbClr val="FFFFFF"/>
                 </a:solidFill>
@@ -9785,7 +10459,7 @@
               <a:t>Stage 1 ($group): </a:t>
             </a:r>
             <a:r>
-              <a:rPr sz="1000">
+              <a:rPr sz="919">
                 <a:solidFill>
                   <a:srgbClr val="CBD5E1"/>
                 </a:solidFill>
@@ -9796,115 +10470,171 @@
           <a:p>
             <a:pPr>
               <a:spcAft>
+                <a:spcPts val="500"/>
+              </a:spcAft>
+            </a:pPr>
+            <a:r>
+              <a:rPr b="1" sz="980">
+                <a:solidFill>
+                  <a:srgbClr val="FFFFFF"/>
+                </a:solidFill>
+              </a:rPr>
+              <a:t>Stage 2 ($project): </a:t>
+            </a:r>
+            <a:r>
+              <a:rPr sz="919">
+                <a:solidFill>
+                  <a:srgbClr val="CBD5E1"/>
+                </a:solidFill>
+              </a:rPr>
+              <a:t>Computes average attendance percentage per subject in database.</a:t>
+            </a:r>
+          </a:p>
+          <a:p>
+            <a:pPr>
+              <a:spcAft>
+                <a:spcPts val="500"/>
+              </a:spcAft>
+            </a:pPr>
+            <a:r>
+              <a:rPr b="1" sz="980">
+                <a:solidFill>
+                  <a:srgbClr val="FFFFFF"/>
+                </a:solidFill>
+              </a:rPr>
+              <a:t>Stage 3 ($lookup): </a:t>
+            </a:r>
+            <a:r>
+              <a:rPr sz="919">
+                <a:solidFill>
+                  <a:srgbClr val="CBD5E1"/>
+                </a:solidFill>
+              </a:rPr>
+              <a:t>Joins with subjects collection to retrieve subjectCode and credits.</a:t>
+            </a:r>
+          </a:p>
+          <a:p>
+            <a:pPr>
+              <a:spcAft>
+                <a:spcPts val="500"/>
+              </a:spcAft>
+            </a:pPr>
+            <a:r>
+              <a:rPr b="1" sz="980">
+                <a:solidFill>
+                  <a:srgbClr val="FFFFFF"/>
+                </a:solidFill>
+              </a:rPr>
+              <a:t>Stage 4 ($unwind): </a:t>
+            </a:r>
+            <a:r>
+              <a:rPr sz="919">
+                <a:solidFill>
+                  <a:srgbClr val="CBD5E1"/>
+                </a:solidFill>
+              </a:rPr>
+              <a:t>Flattens the subjectInfo array into an embedded object.</a:t>
+            </a:r>
+          </a:p>
+          <a:p>
+            <a:pPr>
+              <a:spcAft>
+                <a:spcPts val="500"/>
+              </a:spcAft>
+            </a:pPr>
+            <a:r>
+              <a:rPr b="1" sz="980">
+                <a:solidFill>
+                  <a:srgbClr val="FFFFFF"/>
+                </a:solidFill>
+              </a:rPr>
+              <a:t>Stage 5 ($sort): </a:t>
+            </a:r>
+            <a:r>
+              <a:rPr sz="919">
+                <a:solidFill>
+                  <a:srgbClr val="CBD5E1"/>
+                </a:solidFill>
+              </a:rPr>
+              <a:t>Sorts descending by attendance percentage for comparative ranking.</a:t>
+            </a:r>
+          </a:p>
+          <a:p>
+            <a:pPr>
+              <a:spcBef>
                 <a:spcPts val="600"/>
-              </a:spcAft>
-            </a:pPr>
-            <a:r>
-              <a:rPr b="1" sz="1050">
-                <a:solidFill>
-                  <a:srgbClr val="FFFFFF"/>
-                </a:solidFill>
-              </a:rPr>
-              <a:t>Stage 2 ($project): </a:t>
-            </a:r>
-            <a:r>
-              <a:rPr sz="1000">
-                <a:solidFill>
-                  <a:srgbClr val="CBD5E1"/>
-                </a:solidFill>
-              </a:rPr>
-              <a:t>Computes average attendance percentage per subject.</a:t>
-            </a:r>
-          </a:p>
-          <a:p>
-            <a:pPr>
-              <a:spcAft>
-                <a:spcPts val="600"/>
-              </a:spcAft>
-            </a:pPr>
-            <a:r>
-              <a:rPr b="1" sz="1050">
-                <a:solidFill>
-                  <a:srgbClr val="FFFFFF"/>
-                </a:solidFill>
-              </a:rPr>
-              <a:t>Stage 3 ($lookup): </a:t>
-            </a:r>
-            <a:r>
-              <a:rPr sz="1000">
-                <a:solidFill>
-                  <a:srgbClr val="CBD5E1"/>
-                </a:solidFill>
-              </a:rPr>
-              <a:t>Joins with subjects collection to retrieve subjectCode and credits.</a:t>
-            </a:r>
-          </a:p>
-          <a:p>
-            <a:pPr>
-              <a:spcAft>
-                <a:spcPts val="600"/>
-              </a:spcAft>
-            </a:pPr>
-            <a:r>
-              <a:rPr b="1" sz="1050">
-                <a:solidFill>
-                  <a:srgbClr val="FFFFFF"/>
-                </a:solidFill>
-              </a:rPr>
-              <a:t>Stage 4 ($unwind): </a:t>
-            </a:r>
-            <a:r>
-              <a:rPr sz="1000">
-                <a:solidFill>
-                  <a:srgbClr val="CBD5E1"/>
-                </a:solidFill>
-              </a:rPr>
-              <a:t>Flattens the subjectInfo array into an embedded object.</a:t>
-            </a:r>
-          </a:p>
-          <a:p>
-            <a:pPr>
-              <a:spcAft>
-                <a:spcPts val="600"/>
-              </a:spcAft>
-            </a:pPr>
-            <a:r>
-              <a:rPr b="1" sz="1050">
-                <a:solidFill>
-                  <a:srgbClr val="FFFFFF"/>
-                </a:solidFill>
-              </a:rPr>
-              <a:t>Stage 5 ($sort): </a:t>
-            </a:r>
-            <a:r>
-              <a:rPr sz="1000">
-                <a:solidFill>
-                  <a:srgbClr val="CBD5E1"/>
-                </a:solidFill>
-              </a:rPr>
-              <a:t>Sorts descending by attendance percentage for comparative review.</a:t>
-            </a:r>
-          </a:p>
-          <a:p>
-            <a:pPr>
-              <a:spcBef>
-                <a:spcPts val="1000"/>
               </a:spcBef>
             </a:pPr>
             <a:r>
-              <a:rPr b="1" sz="1000">
+              <a:rPr b="1" sz="919">
                 <a:solidFill>
                   <a:srgbClr val="38BDF8"/>
                 </a:solidFill>
               </a:rPr>
-              <a:t>Business Impact: Highlights subjects suffering from abnormal absenteeism for dean review.</a:t>
-            </a:r>
-          </a:p>
-        </p:txBody>
-      </p:sp>
-      <p:sp>
-        <p:nvSpPr>
-          <p:cNvPr id="14" name="Rounded Rectangle 13"/>
+              <a:t>Impact: Highlights subjects suffering from abnormal absenteeism for dean intervention.</a:t>
+            </a:r>
+          </a:p>
+        </p:txBody>
+      </p:sp>
+      <p:sp>
+        <p:nvSpPr>
+          <p:cNvPr id="15" name="Rounded Rectangle 14"/>
+          <p:cNvSpPr/>
+          <p:nvPr/>
+        </p:nvSpPr>
+        <p:spPr>
+          <a:xfrm>
+            <a:off x="4553712" y="5760720"/>
+            <a:ext cx="3081528" cy="384048"/>
+          </a:xfrm>
+          <a:prstGeom prst="roundRect">
+            <a:avLst>
+              <a:gd name="adj" fmla="val 12000"/>
+            </a:avLst>
+          </a:prstGeom>
+          <a:solidFill>
+            <a:srgbClr val="1C273A"/>
+          </a:solidFill>
+          <a:ln w="12700">
+            <a:solidFill>
+              <a:srgbClr val="38BDF8"/>
+            </a:solidFill>
+          </a:ln>
+        </p:spPr>
+        <p:style>
+          <a:lnRef idx="1">
+            <a:schemeClr val="accent1"/>
+          </a:lnRef>
+          <a:fillRef idx="3">
+            <a:schemeClr val="accent1"/>
+          </a:fillRef>
+          <a:effectRef idx="2">
+            <a:schemeClr val="accent1"/>
+          </a:effectRef>
+          <a:fontRef idx="minor">
+            <a:schemeClr val="lt1"/>
+          </a:fontRef>
+        </p:style>
+        <p:txBody>
+          <a:bodyPr rtlCol="0" anchor="ctr" wrap="square" lIns="109728" rIns="109728" tIns="0" bIns="0"/>
+          <a:lstStyle/>
+          <a:p>
+            <a:pPr algn="ctr">
+              <a:defRPr sz="880" b="1">
+                <a:solidFill>
+                  <a:srgbClr val="38BDF8"/>
+                </a:solidFill>
+              </a:defRPr>
+            </a:pPr>
+            <a:r>
+              <a:t>ACADEMIC INTELLIGENCE: Identifies subject absenteeism trends in database RAM.</a:t>
+            </a:r>
+          </a:p>
+        </p:txBody>
+      </p:sp>
+      <p:sp>
+        <p:nvSpPr>
+          <p:cNvPr id="16" name="Rounded Rectangle 15"/>
           <p:cNvSpPr/>
           <p:nvPr/>
         </p:nvSpPr>
@@ -9951,14 +10681,14 @@
       </p:sp>
       <p:sp>
         <p:nvSpPr>
-          <p:cNvPr id="15" name="TextBox 14"/>
+          <p:cNvPr id="17" name="TextBox 16"/>
           <p:cNvSpPr txBox="1"/>
           <p:nvPr/>
         </p:nvSpPr>
         <p:spPr>
           <a:xfrm>
-            <a:off x="8302752" y="1554480"/>
-            <a:ext cx="2901391" cy="384048"/>
+            <a:off x="8275320" y="1536192"/>
+            <a:ext cx="2956255" cy="347472"/>
           </a:xfrm>
           <a:prstGeom prst="rect">
             <a:avLst/>
@@ -9980,26 +10710,26 @@
               <a:t>[o] </a:t>
             </a:r>
             <a:r>
-              <a:rPr sz="1400" b="1">
+              <a:rPr sz="1300" b="1">
                 <a:solidFill>
                   <a:srgbClr val="FFFFFF"/>
                 </a:solidFill>
               </a:rPr>
-              <a:t>Pipeline 3: Daily &amp; Monthly Trends</a:t>
-            </a:r>
-          </a:p>
-        </p:txBody>
-      </p:sp>
-      <p:sp>
-        <p:nvSpPr>
-          <p:cNvPr id="16" name="TextBox 15"/>
+              <a:t>Pipelines 3-7: Multi-Cohort</a:t>
+            </a:r>
+          </a:p>
+        </p:txBody>
+      </p:sp>
+      <p:sp>
+        <p:nvSpPr>
+          <p:cNvPr id="18" name="TextBox 17"/>
           <p:cNvSpPr txBox="1"/>
           <p:nvPr/>
         </p:nvSpPr>
         <p:spPr>
           <a:xfrm>
-            <a:off x="8275320" y="1828800"/>
-            <a:ext cx="2956255" cy="4343400"/>
+            <a:off x="8247888" y="1783080"/>
+            <a:ext cx="3008376" cy="3886200"/>
           </a:xfrm>
           <a:prstGeom prst="rect">
             <a:avLst/>
@@ -10014,146 +10744,202 @@
           <a:p>
             <a:pPr>
               <a:spcAft>
-                <a:spcPts val="800"/>
-              </a:spcAft>
-              <a:defRPr sz="950" b="1">
-                <a:solidFill>
-                  <a:srgbClr val="34D399"/>
-                </a:solidFill>
-              </a:defRPr>
-            </a:pPr>
-            <a:r>
-              <a:t>GET /api/analytics/daily-stats</a:t>
-            </a:r>
-          </a:p>
-          <a:p>
-            <a:pPr>
-              <a:spcAft>
                 <a:spcPts val="600"/>
               </a:spcAft>
-            </a:pPr>
-            <a:r>
-              <a:rPr b="1" sz="1050">
+              <a:defRPr sz="900" b="1">
+                <a:solidFill>
+                  <a:srgbClr val="34D399"/>
+                </a:solidFill>
+              </a:defRPr>
+            </a:pPr>
+            <a:r>
+              <a:t>GET /api/analytics/daily-stats &amp; section-stats</a:t>
+            </a:r>
+          </a:p>
+          <a:p>
+            <a:pPr>
+              <a:spcAft>
+                <a:spcPts val="500"/>
+              </a:spcAft>
+            </a:pPr>
+            <a:r>
+              <a:rPr b="1" sz="980">
                 <a:solidFill>
                   <a:srgbClr val="FFFFFF"/>
                 </a:solidFill>
               </a:rPr>
-              <a:t>Stage 1 ($group): </a:t>
-            </a:r>
-            <a:r>
-              <a:rPr sz="1000">
+              <a:t>Pipeline 3 (Daily Trends): </a:t>
+            </a:r>
+            <a:r>
+              <a:rPr sz="919">
                 <a:solidFill>
                   <a:srgbClr val="CBD5E1"/>
                 </a:solidFill>
               </a:rPr>
-              <a:t>Extracts date string via $dateToString: { format: '%Y-%m-%d' }.</a:t>
+              <a:t>$dateToString grouping calculates attendance rate per calendar date.</a:t>
             </a:r>
           </a:p>
           <a:p>
             <a:pPr>
               <a:spcAft>
+                <a:spcPts val="500"/>
+              </a:spcAft>
+            </a:pPr>
+            <a:r>
+              <a:rPr b="1" sz="980">
+                <a:solidFill>
+                  <a:srgbClr val="FFFFFF"/>
+                </a:solidFill>
+              </a:rPr>
+              <a:t>Pipeline 4 (Monthly Progression): </a:t>
+            </a:r>
+            <a:r>
+              <a:rPr sz="919">
+                <a:solidFill>
+                  <a:srgbClr val="CBD5E1"/>
+                </a:solidFill>
+              </a:rPr>
+              <a:t>Extracts $year &amp; $month to chart semester longitudinal trends.</a:t>
+            </a:r>
+          </a:p>
+          <a:p>
+            <a:pPr>
+              <a:spcAft>
+                <a:spcPts val="500"/>
+              </a:spcAft>
+            </a:pPr>
+            <a:r>
+              <a:rPr b="1" sz="980">
+                <a:solidFill>
+                  <a:srgbClr val="FFFFFF"/>
+                </a:solidFill>
+              </a:rPr>
+              <a:t>Pipeline 5 (Section Matrix): </a:t>
+            </a:r>
+            <a:r>
+              <a:rPr sz="919">
+                <a:solidFill>
+                  <a:srgbClr val="CBD5E1"/>
+                </a:solidFill>
+              </a:rPr>
+              <a:t>Groups attendance by section ('D1' vs 'D2') for cohort comparison.</a:t>
+            </a:r>
+          </a:p>
+          <a:p>
+            <a:pPr>
+              <a:spcAft>
+                <a:spcPts val="500"/>
+              </a:spcAft>
+            </a:pPr>
+            <a:r>
+              <a:rPr b="1" sz="980">
+                <a:solidFill>
+                  <a:srgbClr val="FFFFFF"/>
+                </a:solidFill>
+              </a:rPr>
+              <a:t>Pipeline 6 (Overall Stats): </a:t>
+            </a:r>
+            <a:r>
+              <a:rPr sz="919">
+                <a:solidFill>
+                  <a:srgbClr val="CBD5E1"/>
+                </a:solidFill>
+              </a:rPr>
+              <a:t>Single-pass institutional KPI calculation across all records.</a:t>
+            </a:r>
+          </a:p>
+          <a:p>
+            <a:pPr>
+              <a:spcAft>
+                <a:spcPts val="500"/>
+              </a:spcAft>
+            </a:pPr>
+            <a:r>
+              <a:rPr b="1" sz="980">
+                <a:solidFill>
+                  <a:srgbClr val="FFFFFF"/>
+                </a:solidFill>
+              </a:rPr>
+              <a:t>Pipeline 7 (Student Breakdown): </a:t>
+            </a:r>
+            <a:r>
+              <a:rPr sz="919">
+                <a:solidFill>
+                  <a:srgbClr val="CBD5E1"/>
+                </a:solidFill>
+              </a:rPr>
+              <a:t>Course-wise personal breakdown for logged-in student portal.</a:t>
+            </a:r>
+          </a:p>
+          <a:p>
+            <a:pPr>
+              <a:spcBef>
                 <a:spcPts val="600"/>
-              </a:spcAft>
-            </a:pPr>
-            <a:r>
-              <a:rPr b="1" sz="1050">
-                <a:solidFill>
-                  <a:srgbClr val="FFFFFF"/>
-                </a:solidFill>
-              </a:rPr>
-              <a:t>Stage 2 ($sum): </a:t>
-            </a:r>
-            <a:r>
-              <a:rPr sz="1000">
-                <a:solidFill>
-                  <a:srgbClr val="CBD5E1"/>
-                </a:solidFill>
-              </a:rPr>
-              <a:t>Calculates present vs absent student count per calendar day.</a:t>
-            </a:r>
-          </a:p>
-          <a:p>
-            <a:pPr>
-              <a:spcAft>
-                <a:spcPts val="600"/>
-              </a:spcAft>
-            </a:pPr>
-            <a:r>
-              <a:rPr b="1" sz="1050">
-                <a:solidFill>
-                  <a:srgbClr val="FFFFFF"/>
-                </a:solidFill>
-              </a:rPr>
-              <a:t>Stage 3 ($project): </a:t>
-            </a:r>
-            <a:r>
-              <a:rPr sz="1000">
-                <a:solidFill>
-                  <a:srgbClr val="CBD5E1"/>
-                </a:solidFill>
-              </a:rPr>
-              <a:t>Computes institutional attendance rate per calendar date.</a:t>
-            </a:r>
-          </a:p>
-          <a:p>
-            <a:pPr>
-              <a:spcAft>
-                <a:spcPts val="600"/>
-              </a:spcAft>
-            </a:pPr>
-            <a:r>
-              <a:rPr b="1" sz="1050">
-                <a:solidFill>
-                  <a:srgbClr val="FFFFFF"/>
-                </a:solidFill>
-              </a:rPr>
-              <a:t>Stage 4 ($sort): </a:t>
-            </a:r>
-            <a:r>
-              <a:rPr sz="1000">
-                <a:solidFill>
-                  <a:srgbClr val="CBD5E1"/>
-                </a:solidFill>
-              </a:rPr>
-              <a:t>Sorts chronologically by date string for time-series charts.</a:t>
-            </a:r>
-          </a:p>
-          <a:p>
-            <a:pPr>
-              <a:spcAft>
-                <a:spcPts val="600"/>
-              </a:spcAft>
-            </a:pPr>
-            <a:r>
-              <a:rPr b="1" sz="1050">
-                <a:solidFill>
-                  <a:srgbClr val="FFFFFF"/>
-                </a:solidFill>
-              </a:rPr>
-              <a:t>Monthly Pipeline: </a:t>
-            </a:r>
-            <a:r>
-              <a:rPr sz="1000">
-                <a:solidFill>
-                  <a:srgbClr val="CBD5E1"/>
-                </a:solidFill>
-              </a:rPr>
-              <a:t>Extracts $year and $month to chart semester attendance progression.</a:t>
-            </a:r>
-          </a:p>
-          <a:p>
-            <a:pPr>
-              <a:spcBef>
-                <a:spcPts val="1000"/>
               </a:spcBef>
             </a:pPr>
             <a:r>
-              <a:rPr b="1" sz="1000">
+              <a:rPr b="1" sz="919">
                 <a:solidFill>
                   <a:srgbClr val="34D399"/>
                 </a:solidFill>
               </a:rPr>
-              <a:t>Business Impact: Powers time-series analytics charts to detect attendance dips near exam periods.</a:t>
+              <a:t>Impact: Powers time-series analytics charts to detect attendance dips near exam periods.</a:t>
+            </a:r>
+          </a:p>
+        </p:txBody>
+      </p:sp>
+      <p:sp>
+        <p:nvSpPr>
+          <p:cNvPr id="19" name="Rounded Rectangle 18"/>
+          <p:cNvSpPr/>
+          <p:nvPr/>
+        </p:nvSpPr>
+        <p:spPr>
+          <a:xfrm>
+            <a:off x="8211312" y="5760720"/>
+            <a:ext cx="3081528" cy="384048"/>
+          </a:xfrm>
+          <a:prstGeom prst="roundRect">
+            <a:avLst>
+              <a:gd name="adj" fmla="val 12000"/>
+            </a:avLst>
+          </a:prstGeom>
+          <a:solidFill>
+            <a:srgbClr val="1C273A"/>
+          </a:solidFill>
+          <a:ln w="12700">
+            <a:solidFill>
+              <a:srgbClr val="34D399"/>
+            </a:solidFill>
+          </a:ln>
+        </p:spPr>
+        <p:style>
+          <a:lnRef idx="1">
+            <a:schemeClr val="accent1"/>
+          </a:lnRef>
+          <a:fillRef idx="3">
+            <a:schemeClr val="accent1"/>
+          </a:fillRef>
+          <a:effectRef idx="2">
+            <a:schemeClr val="accent1"/>
+          </a:effectRef>
+          <a:fontRef idx="minor">
+            <a:schemeClr val="lt1"/>
+          </a:fontRef>
+        </p:style>
+        <p:txBody>
+          <a:bodyPr rtlCol="0" anchor="ctr" wrap="square" lIns="109728" rIns="109728" tIns="0" bIns="0"/>
+          <a:lstStyle/>
+          <a:p>
+            <a:pPr algn="ctr">
+              <a:defRPr sz="880" b="1">
+                <a:solidFill>
+                  <a:srgbClr val="34D399"/>
+                </a:solidFill>
+              </a:defRPr>
+            </a:pPr>
+            <a:r>
+              <a:t>ANALYTICAL RIGOR: 7 distinct aggregation pipelines executed directly in database memory.</a:t>
             </a:r>
           </a:p>
         </p:txBody>
@@ -10304,7 +11090,7 @@
               </a:defRPr>
             </a:pPr>
             <a:r>
-              <a:t>Responsive Presentation Layer &amp; User Experience Design</a:t>
+              <a:t>Responsive Presentation Layer, HCI &amp; Real-Time Dashboards</a:t>
             </a:r>
           </a:p>
         </p:txBody>
@@ -10440,7 +11226,7 @@
               </a:defRPr>
             </a:pPr>
             <a:r>
-              <a:t>SAMS - Enterprise Student Attendance Management System   |   Abhishek VS &amp; Ayush Naugariya   |   Slide 08 of 10</a:t>
+              <a:t>SAMS - Enterprise Student Attendance Management System   |   Abhishek VS (24BCE0404) &amp; Ayush Naugariya (24BDS0076)   |   Slot D2   |   Slide 08 of 10</a:t>
             </a:r>
           </a:p>
         </p:txBody>
@@ -10500,8 +11286,8 @@
         </p:nvSpPr>
         <p:spPr>
           <a:xfrm>
-            <a:off x="987552" y="1554480"/>
-            <a:ext cx="4700016" cy="384048"/>
+            <a:off x="960120" y="1536192"/>
+            <a:ext cx="4754880" cy="347472"/>
           </a:xfrm>
           <a:prstGeom prst="rect">
             <a:avLst/>
@@ -10523,7 +11309,7 @@
               <a:t>[o] </a:t>
             </a:r>
             <a:r>
-              <a:rPr sz="1400" b="1">
+              <a:rPr sz="1300" b="1">
                 <a:solidFill>
                   <a:srgbClr val="FFFFFF"/>
                 </a:solidFill>
@@ -10541,8 +11327,8 @@
         </p:nvSpPr>
         <p:spPr>
           <a:xfrm>
-            <a:off x="987552" y="1828800"/>
-            <a:ext cx="4700016" cy="4343400"/>
+            <a:off x="987552" y="1783080"/>
+            <a:ext cx="4700016" cy="3886200"/>
           </a:xfrm>
           <a:prstGeom prst="rect">
             <a:avLst/>
@@ -10557,11 +11343,11 @@
           <a:p>
             <a:pPr>
               <a:spcAft>
-                <a:spcPts val="800"/>
+                <a:spcPts val="700"/>
               </a:spcAft>
             </a:pPr>
             <a:r>
-              <a:rPr b="1" sz="1100">
+              <a:rPr b="1" sz="1050">
                 <a:solidFill>
                   <a:srgbClr val="38BDF8"/>
                 </a:solidFill>
@@ -10569,7 +11355,7 @@
               <a:t>- Interactive Faculty Attendance Matrix: </a:t>
             </a:r>
             <a:r>
-              <a:rPr sz="1050">
+              <a:rPr sz="980">
                 <a:solidFill>
                   <a:srgbClr val="CBD5E1"/>
                 </a:solidFill>
@@ -10580,11 +11366,11 @@
           <a:p>
             <a:pPr>
               <a:spcAft>
-                <a:spcPts val="800"/>
+                <a:spcPts val="700"/>
               </a:spcAft>
             </a:pPr>
             <a:r>
-              <a:rPr b="1" sz="1100">
+              <a:rPr b="1" sz="1050">
                 <a:solidFill>
                   <a:srgbClr val="38BDF8"/>
                 </a:solidFill>
@@ -10592,7 +11378,7 @@
               <a:t>- Executive Dean Dashboard: </a:t>
             </a:r>
             <a:r>
-              <a:rPr sz="1050">
+              <a:rPr sz="980">
                 <a:solidFill>
                   <a:srgbClr val="CBD5E1"/>
                 </a:solidFill>
@@ -10603,11 +11389,11 @@
           <a:p>
             <a:pPr>
               <a:spcAft>
-                <a:spcPts val="800"/>
+                <a:spcPts val="700"/>
               </a:spcAft>
             </a:pPr>
             <a:r>
-              <a:rPr b="1" sz="1100">
+              <a:rPr b="1" sz="1050">
                 <a:solidFill>
                   <a:srgbClr val="38BDF8"/>
                 </a:solidFill>
@@ -10615,58 +11401,58 @@
               <a:t>- Proactive Defaulter Warning Console: </a:t>
             </a:r>
             <a:r>
-              <a:rPr sz="1050">
+              <a:rPr sz="980">
                 <a:solidFill>
                   <a:srgbClr val="CBD5E1"/>
                 </a:solidFill>
               </a:rPr>
-              <a:t>Interactive filter slider dynamically adjusts the compliance threshold (e.g., 75%, 80%) and updates the defaulter table in real-time with zero page reload.</a:t>
+              <a:t>Interactive filter slider dynamically adjusts the compliance threshold (e.g., 75%, 80%) and updates the defaulter table in real-time with one-click CSV export.</a:t>
             </a:r>
           </a:p>
           <a:p>
             <a:pPr>
               <a:spcAft>
-                <a:spcPts val="800"/>
+                <a:spcPts val="700"/>
               </a:spcAft>
             </a:pPr>
             <a:r>
-              <a:rPr b="1" sz="1100">
+              <a:rPr b="1" sz="1050">
                 <a:solidFill>
                   <a:srgbClr val="38BDF8"/>
                 </a:solidFill>
               </a:rPr>
-              <a:t>- Student Self-Service Portal: </a:t>
-            </a:r>
-            <a:r>
-              <a:rPr sz="1050">
+              <a:t>- Student Restricted Self-Service Portal: </a:t>
+            </a:r>
+            <a:r>
+              <a:rPr sz="980">
                 <a:solidFill>
                   <a:srgbClr val="CBD5E1"/>
                 </a:solidFill>
               </a:rPr>
-              <a:t>Enables students to securely inspect their personalized course-wise attendance breakdown, attended lecture counts, and color-coded debarment risk alerts.</a:t>
+              <a:t>Course-wise attendance cards with personal debarment risk alerts; 4th navigation ('Analytics &amp; Reports') is hidden from student UI and protected by server 403 guard.</a:t>
             </a:r>
           </a:p>
           <a:p>
             <a:pPr>
               <a:spcAft>
-                <a:spcPts val="800"/>
+                <a:spcPts val="700"/>
               </a:spcAft>
             </a:pPr>
             <a:r>
-              <a:rPr b="1" sz="1100">
+              <a:rPr b="1" sz="1050">
                 <a:solidFill>
                   <a:srgbClr val="38BDF8"/>
                 </a:solidFill>
               </a:rPr>
-              <a:t>- 100% Mobile &amp; Tablet Responsive: </a:t>
-            </a:r>
-            <a:r>
-              <a:rPr sz="1050">
+              <a:t>- 100% Mobile &amp; Podium Responsive: </a:t>
+            </a:r>
+            <a:r>
+              <a:rPr sz="980">
                 <a:solidFill>
                   <a:srgbClr val="CBD5E1"/>
                 </a:solidFill>
               </a:rPr>
-              <a:t>Fluid CSS grid and flexbox layouts adapt seamlessly from faculty mobile smartphones to wide-screen lecture podiums.</a:t>
+              <a:t>Fluid Tailwind CSS flexbox and grid layouts adapt seamlessly from faculty mobile smartphones to wide-screen lecture podiums.</a:t>
             </a:r>
           </a:p>
         </p:txBody>
@@ -10674,6 +11460,62 @@
       <p:sp>
         <p:nvSpPr>
           <p:cNvPr id="11" name="Rounded Rectangle 10"/>
+          <p:cNvSpPr/>
+          <p:nvPr/>
+        </p:nvSpPr>
+        <p:spPr>
+          <a:xfrm>
+            <a:off x="987552" y="5760720"/>
+            <a:ext cx="4700016" cy="384048"/>
+          </a:xfrm>
+          <a:prstGeom prst="roundRect">
+            <a:avLst>
+              <a:gd name="adj" fmla="val 12000"/>
+            </a:avLst>
+          </a:prstGeom>
+          <a:solidFill>
+            <a:srgbClr val="1C273A"/>
+          </a:solidFill>
+          <a:ln w="12700">
+            <a:solidFill>
+              <a:srgbClr val="38BDF8"/>
+            </a:solidFill>
+          </a:ln>
+        </p:spPr>
+        <p:style>
+          <a:lnRef idx="1">
+            <a:schemeClr val="accent1"/>
+          </a:lnRef>
+          <a:fillRef idx="3">
+            <a:schemeClr val="accent1"/>
+          </a:fillRef>
+          <a:effectRef idx="2">
+            <a:schemeClr val="accent1"/>
+          </a:effectRef>
+          <a:fontRef idx="minor">
+            <a:schemeClr val="lt1"/>
+          </a:fontRef>
+        </p:style>
+        <p:txBody>
+          <a:bodyPr rtlCol="0" anchor="ctr" wrap="square" lIns="109728" rIns="109728" tIns="0" bIns="0"/>
+          <a:lstStyle/>
+          <a:p>
+            <a:pPr algn="ctr">
+              <a:defRPr sz="880" b="1">
+                <a:solidFill>
+                  <a:srgbClr val="38BDF8"/>
+                </a:solidFill>
+              </a:defRPr>
+            </a:pPr>
+            <a:r>
+              <a:t>HCI EXCELLENCE: Zero cognitive fatigue with real-time feedback and role-tailored viewports.</a:t>
+            </a:r>
+          </a:p>
+        </p:txBody>
+      </p:sp>
+      <p:sp>
+        <p:nvSpPr>
+          <p:cNvPr id="12" name="Rounded Rectangle 11"/>
           <p:cNvSpPr/>
           <p:nvPr/>
         </p:nvSpPr>
@@ -10720,14 +11562,14 @@
       </p:sp>
       <p:sp>
         <p:nvSpPr>
-          <p:cNvPr id="12" name="TextBox 11"/>
+          <p:cNvPr id="13" name="TextBox 12"/>
           <p:cNvSpPr txBox="1"/>
           <p:nvPr/>
         </p:nvSpPr>
         <p:spPr>
           <a:xfrm>
-            <a:off x="6473952" y="1554480"/>
-            <a:ext cx="4700016" cy="384048"/>
+            <a:off x="6446520" y="1536192"/>
+            <a:ext cx="4754880" cy="347472"/>
           </a:xfrm>
           <a:prstGeom prst="rect">
             <a:avLst/>
@@ -10749,26 +11591,26 @@
               <a:t>[o] </a:t>
             </a:r>
             <a:r>
-              <a:rPr sz="1400" b="1">
+              <a:rPr sz="1300" b="1">
                 <a:solidFill>
                   <a:srgbClr val="FFFFFF"/>
                 </a:solidFill>
               </a:rPr>
-              <a:t>Frontend Architectural Rigor</a:t>
-            </a:r>
-          </a:p>
-        </p:txBody>
-      </p:sp>
-      <p:sp>
-        <p:nvSpPr>
-          <p:cNvPr id="13" name="TextBox 12"/>
+              <a:t>Frontend Architectural Rigor &amp; State Management</a:t>
+            </a:r>
+          </a:p>
+        </p:txBody>
+      </p:sp>
+      <p:sp>
+        <p:nvSpPr>
+          <p:cNvPr id="14" name="TextBox 13"/>
           <p:cNvSpPr txBox="1"/>
           <p:nvPr/>
         </p:nvSpPr>
         <p:spPr>
           <a:xfrm>
-            <a:off x="6473952" y="1828800"/>
-            <a:ext cx="4700016" cy="4343400"/>
+            <a:off x="6473952" y="1783080"/>
+            <a:ext cx="4700016" cy="3886200"/>
           </a:xfrm>
           <a:prstGeom prst="rect">
             <a:avLst/>
@@ -10783,11 +11625,11 @@
           <a:p>
             <a:pPr>
               <a:spcAft>
-                <a:spcPts val="800"/>
+                <a:spcPts val="700"/>
               </a:spcAft>
             </a:pPr>
             <a:r>
-              <a:rPr b="1" sz="1100">
+              <a:rPr b="1" sz="1050">
                 <a:solidFill>
                   <a:srgbClr val="60A5FA"/>
                 </a:solidFill>
@@ -10795,7 +11637,7 @@
               <a:t>- React 18 SPA Architecture: </a:t>
             </a:r>
             <a:r>
-              <a:rPr sz="1050">
+              <a:rPr sz="980">
                 <a:solidFill>
                   <a:srgbClr val="CBD5E1"/>
                 </a:solidFill>
@@ -10806,11 +11648,11 @@
           <a:p>
             <a:pPr>
               <a:spcAft>
-                <a:spcPts val="800"/>
+                <a:spcPts val="700"/>
               </a:spcAft>
             </a:pPr>
             <a:r>
-              <a:rPr b="1" sz="1100">
+              <a:rPr b="1" sz="1050">
                 <a:solidFill>
                   <a:srgbClr val="60A5FA"/>
                 </a:solidFill>
@@ -10818,7 +11660,7 @@
               <a:t>- Next-Gen Vite Build Tooling: </a:t>
             </a:r>
             <a:r>
-              <a:rPr sz="1050">
+              <a:rPr sz="980">
                 <a:solidFill>
                   <a:srgbClr val="CBD5E1"/>
                 </a:solidFill>
@@ -10829,11 +11671,11 @@
           <a:p>
             <a:pPr>
               <a:spcAft>
-                <a:spcPts val="800"/>
+                <a:spcPts val="700"/>
               </a:spcAft>
             </a:pPr>
             <a:r>
-              <a:rPr b="1" sz="1100">
+              <a:rPr b="1" sz="1050">
                 <a:solidFill>
                   <a:srgbClr val="60A5FA"/>
                 </a:solidFill>
@@ -10841,7 +11683,7 @@
               <a:t>- Automated Axios Interceptor Pipeline: </a:t>
             </a:r>
             <a:r>
-              <a:rPr sz="1050">
+              <a:rPr sz="980">
                 <a:solidFill>
                   <a:srgbClr val="CBD5E1"/>
                 </a:solidFill>
@@ -10852,11 +11694,11 @@
           <a:p>
             <a:pPr>
               <a:spcAft>
-                <a:spcPts val="800"/>
+                <a:spcPts val="700"/>
               </a:spcAft>
             </a:pPr>
             <a:r>
-              <a:rPr b="1" sz="1100">
+              <a:rPr b="1" sz="1050">
                 <a:solidFill>
                   <a:srgbClr val="60A5FA"/>
                 </a:solidFill>
@@ -10864,7 +11706,7 @@
               <a:t>- Centralized Global State Management: </a:t>
             </a:r>
             <a:r>
-              <a:rPr sz="1050">
+              <a:rPr sz="980">
                 <a:solidFill>
                   <a:srgbClr val="CBD5E1"/>
                 </a:solidFill>
@@ -10875,11 +11717,11 @@
           <a:p>
             <a:pPr>
               <a:spcAft>
-                <a:spcPts val="800"/>
+                <a:spcPts val="700"/>
               </a:spcAft>
             </a:pPr>
             <a:r>
-              <a:rPr b="1" sz="1100">
+              <a:rPr b="1" sz="1050">
                 <a:solidFill>
                   <a:srgbClr val="60A5FA"/>
                 </a:solidFill>
@@ -10887,12 +11729,68 @@
               <a:t>- Tailwind CSS Design System: </a:t>
             </a:r>
             <a:r>
-              <a:rPr sz="1050">
+              <a:rPr sz="980">
                 <a:solidFill>
                   <a:srgbClr val="CBD5E1"/>
                 </a:solidFill>
               </a:rPr>
               <a:t>Clean dark slate navigation (#0F172A), frosted glass card elevation, rounded pill badges, and high-contrast Lucide SVG iconography.</a:t>
+            </a:r>
+          </a:p>
+        </p:txBody>
+      </p:sp>
+      <p:sp>
+        <p:nvSpPr>
+          <p:cNvPr id="15" name="Rounded Rectangle 14"/>
+          <p:cNvSpPr/>
+          <p:nvPr/>
+        </p:nvSpPr>
+        <p:spPr>
+          <a:xfrm>
+            <a:off x="6473952" y="5760720"/>
+            <a:ext cx="4700016" cy="384048"/>
+          </a:xfrm>
+          <a:prstGeom prst="roundRect">
+            <a:avLst>
+              <a:gd name="adj" fmla="val 12000"/>
+            </a:avLst>
+          </a:prstGeom>
+          <a:solidFill>
+            <a:srgbClr val="1C273A"/>
+          </a:solidFill>
+          <a:ln w="12700">
+            <a:solidFill>
+              <a:srgbClr val="60A5FA"/>
+            </a:solidFill>
+          </a:ln>
+        </p:spPr>
+        <p:style>
+          <a:lnRef idx="1">
+            <a:schemeClr val="accent1"/>
+          </a:lnRef>
+          <a:fillRef idx="3">
+            <a:schemeClr val="accent1"/>
+          </a:fillRef>
+          <a:effectRef idx="2">
+            <a:schemeClr val="accent1"/>
+          </a:effectRef>
+          <a:fontRef idx="minor">
+            <a:schemeClr val="lt1"/>
+          </a:fontRef>
+        </p:style>
+        <p:txBody>
+          <a:bodyPr rtlCol="0" anchor="ctr" wrap="square" lIns="109728" rIns="109728" tIns="0" bIns="0"/>
+          <a:lstStyle/>
+          <a:p>
+            <a:pPr algn="ctr">
+              <a:defRPr sz="880" b="1">
+                <a:solidFill>
+                  <a:srgbClr val="60A5FA"/>
+                </a:solidFill>
+              </a:defRPr>
+            </a:pPr>
+            <a:r>
+              <a:t>PRODUCTION BUILD: Verified zero linter warnings and optimal production asset bundle size.</a:t>
             </a:r>
           </a:p>
         </p:txBody>
@@ -11043,7 +11941,7 @@
               </a:defRPr>
             </a:pPr>
             <a:r>
-              <a:t>End-to-End System Demonstration Flow</a:t>
+              <a:t>Live Demonstration Flow &amp; Automated System Verification</a:t>
             </a:r>
           </a:p>
         </p:txBody>
@@ -11099,7 +11997,7 @@
               </a:defRPr>
             </a:pPr>
             <a:r>
-              <a:t>LIVE DEMONSTRATION</a:t>
+              <a:t>SYSTEM VERIFICATION</a:t>
             </a:r>
           </a:p>
         </p:txBody>
@@ -11179,7 +12077,7 @@
               </a:defRPr>
             </a:pPr>
             <a:r>
-              <a:t>SAMS - Enterprise Student Attendance Management System   |   Abhishek VS &amp; Ayush Naugariya   |   Slide 09 of 10</a:t>
+              <a:t>SAMS - Enterprise Student Attendance Management System   |   Abhishek VS (24BCE0404) &amp; Ayush Naugariya (24BDS0076)   |   Slot D2   |   Slide 09 of 10</a:t>
             </a:r>
           </a:p>
         </p:txBody>
@@ -11239,8 +12137,8 @@
         </p:nvSpPr>
         <p:spPr>
           <a:xfrm>
-            <a:off x="987552" y="1554480"/>
-            <a:ext cx="4700016" cy="384048"/>
+            <a:off x="960120" y="1536192"/>
+            <a:ext cx="4754880" cy="347472"/>
           </a:xfrm>
           <a:prstGeom prst="rect">
             <a:avLst/>
@@ -11262,12 +12160,12 @@
               <a:t>[o] </a:t>
             </a:r>
             <a:r>
-              <a:rPr sz="1400" b="1">
+              <a:rPr sz="1300" b="1">
                 <a:solidFill>
                   <a:srgbClr val="FFFFFF"/>
                 </a:solidFill>
               </a:rPr>
-              <a:t>Phase 1: Identity &amp; RBAC (0:00 - 1:00)</a:t>
+              <a:t>Phase 1: Identity &amp; Role Governance (0:00 - 1:00)</a:t>
             </a:r>
           </a:p>
         </p:txBody>
@@ -11280,8 +12178,8 @@
         </p:nvSpPr>
         <p:spPr>
           <a:xfrm>
-            <a:off x="987552" y="1874520"/>
-            <a:ext cx="4700016" cy="1737360"/>
+            <a:off x="960120" y="1847088"/>
+            <a:ext cx="4754880" cy="1371600"/>
           </a:xfrm>
           <a:prstGeom prst="rect">
             <a:avLst/>
@@ -11296,11 +12194,11 @@
           <a:p>
             <a:pPr>
               <a:spcAft>
-                <a:spcPts val="600"/>
+                <a:spcPts val="400"/>
               </a:spcAft>
             </a:pPr>
             <a:r>
-              <a:rPr b="1" sz="1100">
+              <a:rPr b="1" sz="1000">
                 <a:solidFill>
                   <a:srgbClr val="38BDF8"/>
                 </a:solidFill>
@@ -11308,7 +12206,7 @@
               <a:t>- Authentication: </a:t>
             </a:r>
             <a:r>
-              <a:rPr sz="1050">
+              <a:rPr sz="950">
                 <a:solidFill>
                   <a:srgbClr val="CBD5E1"/>
                 </a:solidFill>
@@ -11319,11 +12217,11 @@
           <a:p>
             <a:pPr>
               <a:spcAft>
-                <a:spcPts val="600"/>
+                <a:spcPts val="400"/>
               </a:spcAft>
             </a:pPr>
             <a:r>
-              <a:rPr b="1" sz="1100">
+              <a:rPr b="1" sz="1000">
                 <a:solidFill>
                   <a:srgbClr val="38BDF8"/>
                 </a:solidFill>
@@ -11331,7 +12229,7 @@
               <a:t>- Token Verification: </a:t>
             </a:r>
             <a:r>
-              <a:rPr sz="1050">
+              <a:rPr sz="950">
                 <a:solidFill>
                   <a:srgbClr val="CBD5E1"/>
                 </a:solidFill>
@@ -11342,24 +12240,24 @@
           <a:p>
             <a:pPr>
               <a:spcAft>
-                <a:spcPts val="600"/>
+                <a:spcPts val="400"/>
               </a:spcAft>
             </a:pPr>
             <a:r>
-              <a:rPr b="1" sz="1100">
+              <a:rPr b="1" sz="1000">
                 <a:solidFill>
                   <a:srgbClr val="38BDF8"/>
                 </a:solidFill>
               </a:rPr>
-              <a:t>- Role Governance: </a:t>
-            </a:r>
-            <a:r>
-              <a:rPr sz="1050">
+              <a:t>- Student Scoping: </a:t>
+            </a:r>
+            <a:r>
+              <a:rPr sz="950">
                 <a:solidFill>
                   <a:srgbClr val="CBD5E1"/>
                 </a:solidFill>
               </a:rPr>
-              <a:t>Demonstrate role-based UI orchestration: faculty sees attendance tools; admin sees user controls.</a:t>
+              <a:t>Log in as student@example.com: 4th navigation ('Analytics &amp; Reports') is hidden and locked.</a:t>
             </a:r>
           </a:p>
         </p:txBody>
@@ -11367,6 +12265,62 @@
       <p:sp>
         <p:nvSpPr>
           <p:cNvPr id="11" name="Rounded Rectangle 10"/>
+          <p:cNvSpPr/>
+          <p:nvPr/>
+        </p:nvSpPr>
+        <p:spPr>
+          <a:xfrm>
+            <a:off x="914400" y="3246119"/>
+            <a:ext cx="4846320" cy="347472"/>
+          </a:xfrm>
+          <a:prstGeom prst="roundRect">
+            <a:avLst>
+              <a:gd name="adj" fmla="val 12000"/>
+            </a:avLst>
+          </a:prstGeom>
+          <a:solidFill>
+            <a:srgbClr val="1C273A"/>
+          </a:solidFill>
+          <a:ln w="12700">
+            <a:solidFill>
+              <a:srgbClr val="38BDF8"/>
+            </a:solidFill>
+          </a:ln>
+        </p:spPr>
+        <p:style>
+          <a:lnRef idx="1">
+            <a:schemeClr val="accent1"/>
+          </a:lnRef>
+          <a:fillRef idx="3">
+            <a:schemeClr val="accent1"/>
+          </a:fillRef>
+          <a:effectRef idx="2">
+            <a:schemeClr val="accent1"/>
+          </a:effectRef>
+          <a:fontRef idx="minor">
+            <a:schemeClr val="lt1"/>
+          </a:fontRef>
+        </p:style>
+        <p:txBody>
+          <a:bodyPr rtlCol="0" anchor="ctr" wrap="square" lIns="109728" rIns="109728" tIns="0" bIns="0"/>
+          <a:lstStyle/>
+          <a:p>
+            <a:pPr algn="ctr">
+              <a:defRPr sz="880" b="1">
+                <a:solidFill>
+                  <a:srgbClr val="38BDF8"/>
+                </a:solidFill>
+              </a:defRPr>
+            </a:pPr>
+            <a:r>
+              <a:t>VERIFIED: User Authentication &amp; Role Scoping Protocols</a:t>
+            </a:r>
+          </a:p>
+        </p:txBody>
+      </p:sp>
+      <p:sp>
+        <p:nvSpPr>
+          <p:cNvPr id="12" name="Rounded Rectangle 11"/>
           <p:cNvSpPr/>
           <p:nvPr/>
         </p:nvSpPr>
@@ -11413,14 +12367,14 @@
       </p:sp>
       <p:sp>
         <p:nvSpPr>
-          <p:cNvPr id="12" name="TextBox 11"/>
+          <p:cNvPr id="13" name="TextBox 12"/>
           <p:cNvSpPr txBox="1"/>
           <p:nvPr/>
         </p:nvSpPr>
         <p:spPr>
           <a:xfrm>
-            <a:off x="6473952" y="1554480"/>
-            <a:ext cx="4700016" cy="384048"/>
+            <a:off x="6446520" y="1536192"/>
+            <a:ext cx="4754880" cy="347472"/>
           </a:xfrm>
           <a:prstGeom prst="rect">
             <a:avLst/>
@@ -11442,26 +12396,26 @@
               <a:t>[o] </a:t>
             </a:r>
             <a:r>
-              <a:rPr sz="1400" b="1">
+              <a:rPr sz="1300" b="1">
                 <a:solidFill>
                   <a:srgbClr val="FFFFFF"/>
                 </a:solidFill>
               </a:rPr>
-              <a:t>Phase 2: Attendance Ingestion (1:00 - 2:30)</a:t>
-            </a:r>
-          </a:p>
-        </p:txBody>
-      </p:sp>
-      <p:sp>
-        <p:nvSpPr>
-          <p:cNvPr id="13" name="TextBox 12"/>
+              <a:t>Phase 2: Attendance Ingestion (&lt;12ms) (1:00 - 2:30)</a:t>
+            </a:r>
+          </a:p>
+        </p:txBody>
+      </p:sp>
+      <p:sp>
+        <p:nvSpPr>
+          <p:cNvPr id="14" name="TextBox 13"/>
           <p:cNvSpPr txBox="1"/>
           <p:nvPr/>
         </p:nvSpPr>
         <p:spPr>
           <a:xfrm>
-            <a:off x="6473952" y="1874520"/>
-            <a:ext cx="4700016" cy="1737360"/>
+            <a:off x="6446520" y="1847088"/>
+            <a:ext cx="4754880" cy="1371600"/>
           </a:xfrm>
           <a:prstGeom prst="rect">
             <a:avLst/>
@@ -11476,11 +12430,11 @@
           <a:p>
             <a:pPr>
               <a:spcAft>
-                <a:spcPts val="600"/>
+                <a:spcPts val="400"/>
               </a:spcAft>
             </a:pPr>
             <a:r>
-              <a:rPr b="1" sz="1100">
+              <a:rPr b="1" sz="1000">
                 <a:solidFill>
                   <a:srgbClr val="34D399"/>
                 </a:solidFill>
@@ -11488,7 +12442,7 @@
               <a:t>- Session Selection: </a:t>
             </a:r>
             <a:r>
-              <a:rPr sz="1050">
+              <a:rPr sz="950">
                 <a:solidFill>
                   <a:srgbClr val="CBD5E1"/>
                 </a:solidFill>
@@ -11499,11 +12453,11 @@
           <a:p>
             <a:pPr>
               <a:spcAft>
-                <a:spcPts val="600"/>
+                <a:spcPts val="400"/>
               </a:spcAft>
             </a:pPr>
             <a:r>
-              <a:rPr b="1" sz="1100">
+              <a:rPr b="1" sz="1000">
                 <a:solidFill>
                   <a:srgbClr val="34D399"/>
                 </a:solidFill>
@@ -11511,22 +12465,22 @@
               <a:t>- 1-Click Marking: </a:t>
             </a:r>
             <a:r>
-              <a:rPr sz="1050">
+              <a:rPr sz="950">
                 <a:solidFill>
                   <a:srgbClr val="CBD5E1"/>
                 </a:solidFill>
               </a:rPr>
-              <a:t>Execute 'Mark All Present'; toggle specific students to 'Absent'.</a:t>
+              <a:t>Execute 'Mark All Present'; toggle specific students to 'Absent' with color pills.</a:t>
             </a:r>
           </a:p>
           <a:p>
             <a:pPr>
               <a:spcAft>
-                <a:spcPts val="600"/>
+                <a:spcPts val="400"/>
               </a:spcAft>
             </a:pPr>
             <a:r>
-              <a:rPr b="1" sz="1100">
+              <a:rPr b="1" sz="1000">
                 <a:solidFill>
                   <a:srgbClr val="34D399"/>
                 </a:solidFill>
@@ -11534,19 +12488,75 @@
               <a:t>- bulkWrite() Proof: </a:t>
             </a:r>
             <a:r>
-              <a:rPr sz="1050">
+              <a:rPr sz="950">
                 <a:solidFill>
                   <a:srgbClr val="CBD5E1"/>
                 </a:solidFill>
               </a:rPr>
-              <a:t>Click 'Save Attendance'; demonstrate 60 records saved in &lt; 12ms via atomic batch upsert with zero page reload.</a:t>
-            </a:r>
-          </a:p>
-        </p:txBody>
-      </p:sp>
-      <p:sp>
-        <p:nvSpPr>
-          <p:cNvPr id="14" name="Rounded Rectangle 13"/>
+              <a:t>Click 'Save Attendance'; demonstrate 60 records saved in &lt; 12ms via atomic batch upsert with zero reload.</a:t>
+            </a:r>
+          </a:p>
+        </p:txBody>
+      </p:sp>
+      <p:sp>
+        <p:nvSpPr>
+          <p:cNvPr id="15" name="Rounded Rectangle 14"/>
+          <p:cNvSpPr/>
+          <p:nvPr/>
+        </p:nvSpPr>
+        <p:spPr>
+          <a:xfrm>
+            <a:off x="6400800" y="3246119"/>
+            <a:ext cx="4846320" cy="347472"/>
+          </a:xfrm>
+          <a:prstGeom prst="roundRect">
+            <a:avLst>
+              <a:gd name="adj" fmla="val 12000"/>
+            </a:avLst>
+          </a:prstGeom>
+          <a:solidFill>
+            <a:srgbClr val="1C273A"/>
+          </a:solidFill>
+          <a:ln w="12700">
+            <a:solidFill>
+              <a:srgbClr val="34D399"/>
+            </a:solidFill>
+          </a:ln>
+        </p:spPr>
+        <p:style>
+          <a:lnRef idx="1">
+            <a:schemeClr val="accent1"/>
+          </a:lnRef>
+          <a:fillRef idx="3">
+            <a:schemeClr val="accent1"/>
+          </a:fillRef>
+          <a:effectRef idx="2">
+            <a:schemeClr val="accent1"/>
+          </a:effectRef>
+          <a:fontRef idx="minor">
+            <a:schemeClr val="lt1"/>
+          </a:fontRef>
+        </p:style>
+        <p:txBody>
+          <a:bodyPr rtlCol="0" anchor="ctr" wrap="square" lIns="109728" rIns="109728" tIns="0" bIns="0"/>
+          <a:lstStyle/>
+          <a:p>
+            <a:pPr algn="ctr">
+              <a:defRPr sz="880" b="1">
+                <a:solidFill>
+                  <a:srgbClr val="34D399"/>
+                </a:solidFill>
+              </a:defRPr>
+            </a:pPr>
+            <a:r>
+              <a:t>VERIFIED: High-Throughput bulkWrite() Upsert Protocol</a:t>
+            </a:r>
+          </a:p>
+        </p:txBody>
+      </p:sp>
+      <p:sp>
+        <p:nvSpPr>
+          <p:cNvPr id="16" name="Rounded Rectangle 15"/>
           <p:cNvSpPr/>
           <p:nvPr/>
         </p:nvSpPr>
@@ -11593,14 +12603,14 @@
       </p:sp>
       <p:sp>
         <p:nvSpPr>
-          <p:cNvPr id="15" name="TextBox 14"/>
+          <p:cNvPr id="17" name="TextBox 16"/>
           <p:cNvSpPr txBox="1"/>
           <p:nvPr/>
         </p:nvSpPr>
         <p:spPr>
           <a:xfrm>
-            <a:off x="987552" y="4160519"/>
-            <a:ext cx="4700016" cy="384048"/>
+            <a:off x="960120" y="4142231"/>
+            <a:ext cx="4754880" cy="347472"/>
           </a:xfrm>
           <a:prstGeom prst="rect">
             <a:avLst/>
@@ -11622,26 +12632,26 @@
               <a:t>[o] </a:t>
             </a:r>
             <a:r>
-              <a:rPr sz="1400" b="1">
+              <a:rPr sz="1300" b="1">
                 <a:solidFill>
                   <a:srgbClr val="FFFFFF"/>
                 </a:solidFill>
               </a:rPr>
-              <a:t>Phase 3: Analytics &amp; Defaulters (2:30 - 3:45)</a:t>
-            </a:r>
-          </a:p>
-        </p:txBody>
-      </p:sp>
-      <p:sp>
-        <p:nvSpPr>
-          <p:cNvPr id="16" name="TextBox 15"/>
+              <a:t>Phase 3: Real-Time Analytics &amp; Defaulters (2:30 - 3:45)</a:t>
+            </a:r>
+          </a:p>
+        </p:txBody>
+      </p:sp>
+      <p:sp>
+        <p:nvSpPr>
+          <p:cNvPr id="18" name="TextBox 17"/>
           <p:cNvSpPr txBox="1"/>
           <p:nvPr/>
         </p:nvSpPr>
         <p:spPr>
           <a:xfrm>
-            <a:off x="987552" y="4480559"/>
-            <a:ext cx="4700016" cy="1737360"/>
+            <a:off x="960120" y="4453127"/>
+            <a:ext cx="4754880" cy="1371600"/>
           </a:xfrm>
           <a:prstGeom prst="rect">
             <a:avLst/>
@@ -11656,11 +12666,11 @@
           <a:p>
             <a:pPr>
               <a:spcAft>
-                <a:spcPts val="600"/>
+                <a:spcPts val="400"/>
               </a:spcAft>
             </a:pPr>
             <a:r>
-              <a:rPr b="1" sz="1100">
+              <a:rPr b="1" sz="1000">
                 <a:solidFill>
                   <a:srgbClr val="FBBF24"/>
                 </a:solidFill>
@@ -11668,22 +12678,22 @@
               <a:t>- Institutional KPIs: </a:t>
             </a:r>
             <a:r>
-              <a:rPr sz="1050">
+              <a:rPr sz="950">
                 <a:solidFill>
                   <a:srgbClr val="CBD5E1"/>
                 </a:solidFill>
               </a:rPr>
-              <a:t>Open Analytics dashboard displaying 2,640+ total records and overall percentage.</a:t>
+              <a:t>Open Analytics dashboard displaying 2,640+ primary records and overall percentage.</a:t>
             </a:r>
           </a:p>
           <a:p>
             <a:pPr>
               <a:spcAft>
-                <a:spcPts val="600"/>
+                <a:spcPts val="400"/>
               </a:spcAft>
             </a:pPr>
             <a:r>
-              <a:rPr b="1" sz="1100">
+              <a:rPr b="1" sz="1000">
                 <a:solidFill>
                   <a:srgbClr val="FBBF24"/>
                 </a:solidFill>
@@ -11691,22 +12701,22 @@
               <a:t>- Defaulter Detection: </a:t>
             </a:r>
             <a:r>
-              <a:rPr sz="1050">
+              <a:rPr sz="950">
                 <a:solidFill>
                   <a:srgbClr val="CBD5E1"/>
                 </a:solidFill>
               </a:rPr>
-              <a:t>Run Pipeline 4 with threshold slider at 75%; instantaneously display identified students.</a:t>
+              <a:t>Run Pipeline 1 with threshold slider at 75%; instantaneously display identified students.</a:t>
             </a:r>
           </a:p>
           <a:p>
             <a:pPr>
               <a:spcAft>
-                <a:spcPts val="600"/>
+                <a:spcPts val="400"/>
               </a:spcAft>
             </a:pPr>
             <a:r>
-              <a:rPr b="1" sz="1100">
+              <a:rPr b="1" sz="1000">
                 <a:solidFill>
                   <a:srgbClr val="FBBF24"/>
                 </a:solidFill>
@@ -11714,19 +12724,75 @@
               <a:t>- Trend Visualization: </a:t>
             </a:r>
             <a:r>
-              <a:rPr sz="1050">
+              <a:rPr sz="950">
                 <a:solidFill>
                   <a:srgbClr val="CBD5E1"/>
                 </a:solidFill>
               </a:rPr>
-              <a:t>Inspect daily attendance timeline and section comparison ('D1' vs 'D2').</a:t>
-            </a:r>
-          </a:p>
-        </p:txBody>
-      </p:sp>
-      <p:sp>
-        <p:nvSpPr>
-          <p:cNvPr id="17" name="Rounded Rectangle 16"/>
+              <a:t>Inspect daily attendance timeline and Section 'D1' vs 'D2' comparative analytics.</a:t>
+            </a:r>
+          </a:p>
+        </p:txBody>
+      </p:sp>
+      <p:sp>
+        <p:nvSpPr>
+          <p:cNvPr id="19" name="Rounded Rectangle 18"/>
+          <p:cNvSpPr/>
+          <p:nvPr/>
+        </p:nvSpPr>
+        <p:spPr>
+          <a:xfrm>
+            <a:off x="914400" y="5852158"/>
+            <a:ext cx="4846320" cy="347472"/>
+          </a:xfrm>
+          <a:prstGeom prst="roundRect">
+            <a:avLst>
+              <a:gd name="adj" fmla="val 12000"/>
+            </a:avLst>
+          </a:prstGeom>
+          <a:solidFill>
+            <a:srgbClr val="1C273A"/>
+          </a:solidFill>
+          <a:ln w="12700">
+            <a:solidFill>
+              <a:srgbClr val="FBBF24"/>
+            </a:solidFill>
+          </a:ln>
+        </p:spPr>
+        <p:style>
+          <a:lnRef idx="1">
+            <a:schemeClr val="accent1"/>
+          </a:lnRef>
+          <a:fillRef idx="3">
+            <a:schemeClr val="accent1"/>
+          </a:fillRef>
+          <a:effectRef idx="2">
+            <a:schemeClr val="accent1"/>
+          </a:effectRef>
+          <a:fontRef idx="minor">
+            <a:schemeClr val="lt1"/>
+          </a:fontRef>
+        </p:style>
+        <p:txBody>
+          <a:bodyPr rtlCol="0" anchor="ctr" wrap="square" lIns="109728" rIns="109728" tIns="0" bIns="0"/>
+          <a:lstStyle/>
+          <a:p>
+            <a:pPr algn="ctr">
+              <a:defRPr sz="880" b="1">
+                <a:solidFill>
+                  <a:srgbClr val="FBBF24"/>
+                </a:solidFill>
+              </a:defRPr>
+            </a:pPr>
+            <a:r>
+              <a:t>VERIFIED: In-Engine Aggregation Pipelines &amp; Visual Analytics</a:t>
+            </a:r>
+          </a:p>
+        </p:txBody>
+      </p:sp>
+      <p:sp>
+        <p:nvSpPr>
+          <p:cNvPr id="20" name="Rounded Rectangle 19"/>
           <p:cNvSpPr/>
           <p:nvPr/>
         </p:nvSpPr>
@@ -11773,14 +12839,14 @@
       </p:sp>
       <p:sp>
         <p:nvSpPr>
-          <p:cNvPr id="18" name="TextBox 17"/>
+          <p:cNvPr id="21" name="TextBox 20"/>
           <p:cNvSpPr txBox="1"/>
           <p:nvPr/>
         </p:nvSpPr>
         <p:spPr>
           <a:xfrm>
-            <a:off x="6473952" y="4160519"/>
-            <a:ext cx="4700016" cy="384048"/>
+            <a:off x="6446520" y="4142231"/>
+            <a:ext cx="4754880" cy="347472"/>
           </a:xfrm>
           <a:prstGeom prst="rect">
             <a:avLst/>
@@ -11802,26 +12868,26 @@
               <a:t>[o] </a:t>
             </a:r>
             <a:r>
-              <a:rPr sz="1400" b="1">
+              <a:rPr sz="1300" b="1">
                 <a:solidFill>
                   <a:srgbClr val="FFFFFF"/>
                 </a:solidFill>
               </a:rPr>
-              <a:t>Phase 4: Automated Test Suite (3:45 - 5:00)</a:t>
-            </a:r>
-          </a:p>
-        </p:txBody>
-      </p:sp>
-      <p:sp>
-        <p:nvSpPr>
-          <p:cNvPr id="19" name="TextBox 18"/>
+              <a:t>Phase 4: 35 Automated Test Suite (3:45 - 5:00)</a:t>
+            </a:r>
+          </a:p>
+        </p:txBody>
+      </p:sp>
+      <p:sp>
+        <p:nvSpPr>
+          <p:cNvPr id="22" name="TextBox 21"/>
           <p:cNvSpPr txBox="1"/>
           <p:nvPr/>
         </p:nvSpPr>
         <p:spPr>
           <a:xfrm>
-            <a:off x="6473952" y="4480559"/>
-            <a:ext cx="4700016" cy="1737360"/>
+            <a:off x="6446520" y="4453127"/>
+            <a:ext cx="4754880" cy="1371600"/>
           </a:xfrm>
           <a:prstGeom prst="rect">
             <a:avLst/>
@@ -11836,11 +12902,11 @@
           <a:p>
             <a:pPr>
               <a:spcAft>
-                <a:spcPts val="600"/>
+                <a:spcPts val="400"/>
               </a:spcAft>
             </a:pPr>
             <a:r>
-              <a:rPr b="1" sz="1100">
+              <a:rPr b="1" sz="1000">
                 <a:solidFill>
                   <a:srgbClr val="A855F7"/>
                 </a:solidFill>
@@ -11848,7 +12914,7 @@
               <a:t>- Test Runner: </a:t>
             </a:r>
             <a:r>
-              <a:rPr sz="1050">
+              <a:rPr sz="950">
                 <a:solidFill>
                   <a:srgbClr val="CBD5E1"/>
                 </a:solidFill>
@@ -11859,19 +12925,19 @@
           <a:p>
             <a:pPr>
               <a:spcAft>
-                <a:spcPts val="600"/>
+                <a:spcPts val="400"/>
               </a:spcAft>
             </a:pPr>
             <a:r>
-              <a:rPr b="1" sz="1100">
+              <a:rPr b="1" sz="1000">
                 <a:solidFill>
                   <a:srgbClr val="A855F7"/>
                 </a:solidFill>
               </a:rPr>
-              <a:t>- 28/28 Passing Tests: </a:t>
-            </a:r>
-            <a:r>
-              <a:rPr sz="1050">
+              <a:t>- 35/35 Passing Tests: </a:t>
+            </a:r>
+            <a:r>
+              <a:rPr sz="950">
                 <a:solidFill>
                   <a:srgbClr val="CBD5E1"/>
                 </a:solidFill>
@@ -11882,24 +12948,80 @@
           <a:p>
             <a:pPr>
               <a:spcAft>
-                <a:spcPts val="600"/>
+                <a:spcPts val="400"/>
               </a:spcAft>
             </a:pPr>
             <a:r>
-              <a:rPr b="1" sz="1100">
+              <a:rPr b="1" sz="1000">
                 <a:solidFill>
                   <a:srgbClr val="A855F7"/>
                 </a:solidFill>
               </a:rPr>
-              <a:t>- Quality Assurance: </a:t>
-            </a:r>
-            <a:r>
-              <a:rPr sz="1050">
+              <a:t>- Access Control Test: </a:t>
+            </a:r>
+            <a:r>
+              <a:rPr sz="950">
                 <a:solidFill>
                   <a:srgbClr val="CBD5E1"/>
                 </a:solidFill>
               </a:rPr>
-              <a:t>Verifies complete system correctness, error handling, and security defenses.</a:t>
+              <a:t>Automated test asserts student calling /api/analytics returns HTTP 403 Forbidden.</a:t>
+            </a:r>
+          </a:p>
+        </p:txBody>
+      </p:sp>
+      <p:sp>
+        <p:nvSpPr>
+          <p:cNvPr id="23" name="Rounded Rectangle 22"/>
+          <p:cNvSpPr/>
+          <p:nvPr/>
+        </p:nvSpPr>
+        <p:spPr>
+          <a:xfrm>
+            <a:off x="6400800" y="5852158"/>
+            <a:ext cx="4846320" cy="347472"/>
+          </a:xfrm>
+          <a:prstGeom prst="roundRect">
+            <a:avLst>
+              <a:gd name="adj" fmla="val 12000"/>
+            </a:avLst>
+          </a:prstGeom>
+          <a:solidFill>
+            <a:srgbClr val="1C273A"/>
+          </a:solidFill>
+          <a:ln w="12700">
+            <a:solidFill>
+              <a:srgbClr val="A855F7"/>
+            </a:solidFill>
+          </a:ln>
+        </p:spPr>
+        <p:style>
+          <a:lnRef idx="1">
+            <a:schemeClr val="accent1"/>
+          </a:lnRef>
+          <a:fillRef idx="3">
+            <a:schemeClr val="accent1"/>
+          </a:fillRef>
+          <a:effectRef idx="2">
+            <a:schemeClr val="accent1"/>
+          </a:effectRef>
+          <a:fontRef idx="minor">
+            <a:schemeClr val="lt1"/>
+          </a:fontRef>
+        </p:style>
+        <p:txBody>
+          <a:bodyPr rtlCol="0" anchor="ctr" wrap="square" lIns="109728" rIns="109728" tIns="0" bIns="0"/>
+          <a:lstStyle/>
+          <a:p>
+            <a:pPr algn="ctr">
+              <a:defRPr sz="880" b="1">
+                <a:solidFill>
+                  <a:srgbClr val="A855F7"/>
+                </a:solidFill>
+              </a:defRPr>
+            </a:pPr>
+            <a:r>
+              <a:t>QUALITY ASSURANCE: 35 Automated Integration Tests (100% Pass Rate)</a:t>
             </a:r>
           </a:p>
         </p:txBody>
